--- a/output/wordlabs-happy-3day.pptx
+++ b/output/wordlabs-happy-3day.pptx
@@ -4240,7 +4240,7 @@
                 <a:ea typeface="Calibri" pitchFamily="34" charset="-122"/>
                 <a:cs typeface="Calibri" pitchFamily="34" charset="-120"/>
               </a:rPr>
-              <a:t>"feeling or showing pleasure"</a:t>
+              <a:t>"feeling pleased or joyful"</a:t>
             </a:r>
             <a:endParaRPr lang="en-US" sz="2200" dirty="0"/>
           </a:p>
@@ -5288,7 +5288,7 @@
                 <a:ea typeface="Calibri" pitchFamily="34" charset="-122"/>
                 <a:cs typeface="Calibri" pitchFamily="34" charset="-120"/>
               </a:rPr>
-              <a:t>Word Labs  •  wordlabs.app  •  Root: 'happy' = feeling or showing pleasure</a:t>
+              <a:t>Word Labs  •  wordlabs.app  •  Root: 'happy' = feeling pleased or joyful</a:t>
             </a:r>
             <a:endParaRPr lang="en-US" sz="800" dirty="0"/>
           </a:p>
@@ -5622,7 +5622,7 @@
                 <a:ea typeface="Trebuchet MS" pitchFamily="34" charset="-122"/>
                 <a:cs typeface="Trebuchet MS" pitchFamily="34" charset="-120"/>
               </a:rPr>
-              <a:t>0</a:t>
+              <a:t>1</a:t>
             </a:r>
             <a:pPr algn="ctr" indent="0" marL="0">
               <a:buNone/>
@@ -5928,7 +5928,7 @@
                 <a:ea typeface="Calibri" pitchFamily="34" charset="-122"/>
                 <a:cs typeface="Calibri" pitchFamily="34" charset="-120"/>
               </a:rPr>
-              <a:t>Word Labs  •  wordlabs.app  •  Root: 'happy' = feeling or showing pleasure</a:t>
+              <a:t>Word Labs  •  wordlabs.app  •  Root: 'happy' = feeling pleased or joyful</a:t>
             </a:r>
             <a:endParaRPr lang="en-US" sz="800" dirty="0"/>
           </a:p>
@@ -6071,7 +6071,7 @@
                 <a:ea typeface="Calibri" pitchFamily="34" charset="-122"/>
                 <a:cs typeface="Calibri" pitchFamily="34" charset="-120"/>
               </a:rPr>
-              <a:t> and felt true </a:t>
+              <a:t> when she found out she was the </a:t>
             </a:r>
             <a:pPr algn="l" indent="0" marL="0">
               <a:buNone/>
@@ -6088,7 +6088,7 @@
                 <a:ea typeface="Calibri" pitchFamily="34" charset="-122"/>
                 <a:cs typeface="Calibri" pitchFamily="34" charset="-120"/>
               </a:rPr>
-              <a:t>happiness</a:t>
+              <a:t>happiest</a:t>
             </a:r>
             <a:pPr algn="l" indent="0" marL="0">
               <a:buNone/>
@@ -6102,7 +6102,7 @@
                 <a:ea typeface="Calibri" pitchFamily="34" charset="-122"/>
                 <a:cs typeface="Calibri" pitchFamily="34" charset="-120"/>
               </a:rPr>
-              <a:t> when her best friend arrived at the party.</a:t>
+              <a:t> student in the whole class!</a:t>
             </a:r>
             <a:endParaRPr lang="en-US" sz="1800" dirty="0"/>
           </a:p>
@@ -6385,7 +6385,7 @@
                 <a:ea typeface="Trebuchet MS" pitchFamily="34" charset="-122"/>
                 <a:cs typeface="Trebuchet MS" pitchFamily="34" charset="-120"/>
               </a:rPr>
-              <a:t>happiness</a:t>
+              <a:t>happiest</a:t>
             </a:r>
             <a:endParaRPr lang="en-US" sz="1400" dirty="0"/>
           </a:p>
@@ -6716,7 +6716,7 @@
                 <a:ea typeface="Calibri" pitchFamily="34" charset="-122"/>
                 <a:cs typeface="Calibri" pitchFamily="34" charset="-120"/>
               </a:rPr>
-              <a:t>Word Labs  •  wordlabs.app  •  Root: 'happy' = feeling or showing pleasure</a:t>
+              <a:t>Word Labs  •  wordlabs.app  •  Root: 'happy' = feeling pleased or joyful</a:t>
             </a:r>
             <a:endParaRPr lang="en-US" sz="800" dirty="0"/>
           </a:p>
@@ -7543,7 +7543,7 @@
                 <a:ea typeface="Calibri" pitchFamily="34" charset="-122"/>
                 <a:cs typeface="Calibri" pitchFamily="34" charset="-120"/>
               </a:rPr>
-              <a:t>Word Labs  •  wordlabs.app  •  Root: 'happy' = feeling or showing pleasure</a:t>
+              <a:t>Word Labs  •  wordlabs.app  •  Root: 'happy' = feeling pleased or joyful</a:t>
             </a:r>
             <a:endParaRPr lang="en-US" sz="800" dirty="0"/>
           </a:p>
@@ -7860,7 +7860,7 @@
                 <a:ea typeface="Calibri" pitchFamily="34" charset="-122"/>
                 <a:cs typeface="Calibri" pitchFamily="34" charset="-120"/>
               </a:rPr>
-              <a:t>feeling pleasure or joy</a:t>
+              <a:t>feeling pleased or joyful</a:t>
             </a:r>
             <a:endParaRPr lang="en-US" sz="850" dirty="0"/>
           </a:p>
@@ -7972,7 +7972,7 @@
                 <a:ea typeface="Calibri" pitchFamily="34" charset="-122"/>
                 <a:cs typeface="Calibri" pitchFamily="34" charset="-120"/>
               </a:rPr>
-              <a:t>in a certain way</a:t>
+              <a:t>in a way that</a:t>
             </a:r>
             <a:endParaRPr lang="en-US" sz="850" dirty="0"/>
           </a:p>
@@ -8011,7 +8011,7 @@
                 <a:ea typeface="Calibri" pitchFamily="34" charset="-122"/>
                 <a:cs typeface="Calibri" pitchFamily="34" charset="-120"/>
               </a:rPr>
-              <a:t>'y' changes to 'i' before '-ly'</a:t>
+              <a:t>y → i before suffix -ly</a:t>
             </a:r>
             <a:endParaRPr lang="en-US" sz="700" dirty="0"/>
           </a:p>
@@ -8567,7 +8567,7 @@
                 <a:ea typeface="Calibri" pitchFamily="34" charset="-122"/>
                 <a:cs typeface="Calibri" pitchFamily="34" charset="-120"/>
               </a:rPr>
-              <a:t>Word Labs  •  wordlabs.app  •  Root: 'happy' = feeling or showing pleasure</a:t>
+              <a:t>Word Labs  •  wordlabs.app  •  Root: 'happy' = feeling pleased or joyful</a:t>
             </a:r>
             <a:endParaRPr lang="en-US" sz="800" dirty="0"/>
           </a:p>
@@ -8884,7 +8884,7 @@
                 <a:ea typeface="Calibri" pitchFamily="34" charset="-122"/>
                 <a:cs typeface="Calibri" pitchFamily="34" charset="-120"/>
               </a:rPr>
-              <a:t>feeling pleasure or joy</a:t>
+              <a:t>feeling pleased or joyful</a:t>
             </a:r>
             <a:endParaRPr lang="en-US" sz="850" dirty="0"/>
           </a:p>
@@ -8996,7 +8996,7 @@
                 <a:ea typeface="Calibri" pitchFamily="34" charset="-122"/>
                 <a:cs typeface="Calibri" pitchFamily="34" charset="-120"/>
               </a:rPr>
-              <a:t>in a certain way</a:t>
+              <a:t>in a way that</a:t>
             </a:r>
             <a:endParaRPr lang="en-US" sz="850" dirty="0"/>
           </a:p>
@@ -9035,7 +9035,7 @@
                 <a:ea typeface="Calibri" pitchFamily="34" charset="-122"/>
                 <a:cs typeface="Calibri" pitchFamily="34" charset="-120"/>
               </a:rPr>
-              <a:t>'y' changes to 'i' before '-ly'</a:t>
+              <a:t>y → i before suffix -ly</a:t>
             </a:r>
             <a:endParaRPr lang="en-US" sz="700" dirty="0"/>
           </a:p>
@@ -9828,7 +9828,7 @@
                 <a:ea typeface="Calibri" pitchFamily="34" charset="-122"/>
                 <a:cs typeface="Calibri" pitchFamily="34" charset="-120"/>
               </a:rPr>
-              <a:t>Word Labs  •  wordlabs.app  •  Root: 'happy' = feeling or showing pleasure</a:t>
+              <a:t>Word Labs  •  wordlabs.app  •  Root: 'happy' = feeling pleased or joyful</a:t>
             </a:r>
             <a:endParaRPr lang="en-US" sz="800" dirty="0"/>
           </a:p>
@@ -10145,7 +10145,7 @@
                 <a:ea typeface="Calibri" pitchFamily="34" charset="-122"/>
                 <a:cs typeface="Calibri" pitchFamily="34" charset="-120"/>
               </a:rPr>
-              <a:t>feeling pleasure or joy</a:t>
+              <a:t>feeling pleased or joyful</a:t>
             </a:r>
             <a:endParaRPr lang="en-US" sz="850" dirty="0"/>
           </a:p>
@@ -10257,7 +10257,7 @@
                 <a:ea typeface="Calibri" pitchFamily="34" charset="-122"/>
                 <a:cs typeface="Calibri" pitchFamily="34" charset="-120"/>
               </a:rPr>
-              <a:t>in a certain way</a:t>
+              <a:t>in a way that</a:t>
             </a:r>
             <a:endParaRPr lang="en-US" sz="850" dirty="0"/>
           </a:p>
@@ -10296,7 +10296,7 @@
                 <a:ea typeface="Calibri" pitchFamily="34" charset="-122"/>
                 <a:cs typeface="Calibri" pitchFamily="34" charset="-120"/>
               </a:rPr>
-              <a:t>'y' changes to 'i' before '-ly'</a:t>
+              <a:t>y → i before suffix -ly</a:t>
             </a:r>
             <a:endParaRPr lang="en-US" sz="700" dirty="0"/>
           </a:p>
@@ -11446,7 +11446,7 @@
                 <a:ea typeface="Calibri" pitchFamily="34" charset="-122"/>
                 <a:cs typeface="Calibri" pitchFamily="34" charset="-120"/>
               </a:rPr>
-              <a:t>Word Labs  •  wordlabs.app  •  Root: 'happy' = feeling or showing pleasure</a:t>
+              <a:t>Word Labs  •  wordlabs.app  •  Root: 'happy' = feeling pleased or joyful</a:t>
             </a:r>
             <a:endParaRPr lang="en-US" sz="800" dirty="0"/>
           </a:p>
@@ -11585,7 +11585,7 @@
                 <a:ea typeface="Trebuchet MS" pitchFamily="34" charset="-122"/>
                 <a:cs typeface="Trebuchet MS" pitchFamily="34" charset="-120"/>
               </a:rPr>
-              <a:t>happiness</a:t>
+              <a:t>happiest</a:t>
             </a:r>
             <a:endParaRPr lang="en-US" sz="2800" dirty="0"/>
           </a:p>
@@ -12273,7 +12273,7 @@
                 <a:ea typeface="Calibri" pitchFamily="34" charset="-122"/>
                 <a:cs typeface="Calibri" pitchFamily="34" charset="-120"/>
               </a:rPr>
-              <a:t>Word Labs  •  wordlabs.app  •  Root: 'happy' = feeling or showing pleasure</a:t>
+              <a:t>Word Labs  •  wordlabs.app  •  Root: 'happy' = feeling pleased or joyful</a:t>
             </a:r>
             <a:endParaRPr lang="en-US" sz="800" dirty="0"/>
           </a:p>
@@ -12412,7 +12412,7 @@
                 <a:ea typeface="Trebuchet MS" pitchFamily="34" charset="-122"/>
                 <a:cs typeface="Trebuchet MS" pitchFamily="34" charset="-120"/>
               </a:rPr>
-              <a:t>happiness</a:t>
+              <a:t>happiest</a:t>
             </a:r>
             <a:endParaRPr lang="en-US" sz="2800" dirty="0"/>
           </a:p>
@@ -12590,7 +12590,7 @@
                 <a:ea typeface="Calibri" pitchFamily="34" charset="-122"/>
                 <a:cs typeface="Calibri" pitchFamily="34" charset="-120"/>
               </a:rPr>
-              <a:t>feeling pleasure or joy</a:t>
+              <a:t>feeling pleased or joyful</a:t>
             </a:r>
             <a:endParaRPr lang="en-US" sz="850" dirty="0"/>
           </a:p>
@@ -12663,7 +12663,7 @@
                 <a:ea typeface="Trebuchet MS" pitchFamily="34" charset="-122"/>
                 <a:cs typeface="Trebuchet MS" pitchFamily="34" charset="-120"/>
               </a:rPr>
-              <a:t>ness</a:t>
+              <a:t>iest</a:t>
             </a:r>
             <a:endParaRPr lang="en-US" sz="1300" dirty="0"/>
           </a:p>
@@ -12702,7 +12702,7 @@
                 <a:ea typeface="Calibri" pitchFamily="34" charset="-122"/>
                 <a:cs typeface="Calibri" pitchFamily="34" charset="-120"/>
               </a:rPr>
-              <a:t>state or quality of</a:t>
+              <a:t>the most</a:t>
             </a:r>
             <a:endParaRPr lang="en-US" sz="850" dirty="0"/>
           </a:p>
@@ -12741,7 +12741,7 @@
                 <a:ea typeface="Calibri" pitchFamily="34" charset="-122"/>
                 <a:cs typeface="Calibri" pitchFamily="34" charset="-120"/>
               </a:rPr>
-              <a:t>'y' changes to 'i' before '-ness'</a:t>
+              <a:t>y → i before suffix -est</a:t>
             </a:r>
             <a:endParaRPr lang="en-US" sz="700" dirty="0"/>
           </a:p>
@@ -13297,7 +13297,7 @@
                 <a:ea typeface="Calibri" pitchFamily="34" charset="-122"/>
                 <a:cs typeface="Calibri" pitchFamily="34" charset="-120"/>
               </a:rPr>
-              <a:t>Word Labs  •  wordlabs.app  •  Root: 'happy' = feeling or showing pleasure</a:t>
+              <a:t>Word Labs  •  wordlabs.app  •  Root: 'happy' = feeling pleased or joyful</a:t>
             </a:r>
             <a:endParaRPr lang="en-US" sz="800" dirty="0"/>
           </a:p>
@@ -13436,7 +13436,7 @@
                 <a:ea typeface="Trebuchet MS" pitchFamily="34" charset="-122"/>
                 <a:cs typeface="Trebuchet MS" pitchFamily="34" charset="-120"/>
               </a:rPr>
-              <a:t>happiness</a:t>
+              <a:t>happiest</a:t>
             </a:r>
             <a:endParaRPr lang="en-US" sz="2800" dirty="0"/>
           </a:p>
@@ -13614,7 +13614,7 @@
                 <a:ea typeface="Calibri" pitchFamily="34" charset="-122"/>
                 <a:cs typeface="Calibri" pitchFamily="34" charset="-120"/>
               </a:rPr>
-              <a:t>feeling pleasure or joy</a:t>
+              <a:t>feeling pleased or joyful</a:t>
             </a:r>
             <a:endParaRPr lang="en-US" sz="850" dirty="0"/>
           </a:p>
@@ -13687,7 +13687,7 @@
                 <a:ea typeface="Trebuchet MS" pitchFamily="34" charset="-122"/>
                 <a:cs typeface="Trebuchet MS" pitchFamily="34" charset="-120"/>
               </a:rPr>
-              <a:t>ness</a:t>
+              <a:t>iest</a:t>
             </a:r>
             <a:endParaRPr lang="en-US" sz="1300" dirty="0"/>
           </a:p>
@@ -13726,7 +13726,7 @@
                 <a:ea typeface="Calibri" pitchFamily="34" charset="-122"/>
                 <a:cs typeface="Calibri" pitchFamily="34" charset="-120"/>
               </a:rPr>
-              <a:t>state or quality of</a:t>
+              <a:t>the most</a:t>
             </a:r>
             <a:endParaRPr lang="en-US" sz="850" dirty="0"/>
           </a:p>
@@ -13765,7 +13765,7 @@
                 <a:ea typeface="Calibri" pitchFamily="34" charset="-122"/>
                 <a:cs typeface="Calibri" pitchFamily="34" charset="-120"/>
               </a:rPr>
-              <a:t>'y' changes to 'i' before '-ness'</a:t>
+              <a:t>y → i before suffix -est</a:t>
             </a:r>
             <a:endParaRPr lang="en-US" sz="700" dirty="0"/>
           </a:p>
@@ -14134,7 +14134,7 @@
                 <a:ea typeface="Trebuchet MS" pitchFamily="34" charset="-122"/>
                 <a:cs typeface="Trebuchet MS" pitchFamily="34" charset="-120"/>
               </a:rPr>
-              <a:t>ness</a:t>
+              <a:t>est</a:t>
             </a:r>
             <a:endParaRPr lang="en-US" sz="1400" dirty="0"/>
           </a:p>
@@ -14467,7 +14467,7 @@
                 <a:ea typeface="Calibri" pitchFamily="34" charset="-122"/>
                 <a:cs typeface="Calibri" pitchFamily="34" charset="-120"/>
               </a:rPr>
-              <a:t>Root 'happy' — feeling or showing pleasure</a:t>
+              <a:t>Root 'happy' — feeling pleased or joyful</a:t>
             </a:r>
             <a:endParaRPr lang="en-US" sz="1600" dirty="0"/>
           </a:p>
@@ -14823,7 +14823,7 @@
                 <a:ea typeface="Calibri" pitchFamily="34" charset="-122"/>
                 <a:cs typeface="Calibri" pitchFamily="34" charset="-120"/>
               </a:rPr>
-              <a:t>Word Labs  •  wordlabs.app  •  Root: 'happy' = feeling or showing pleasure</a:t>
+              <a:t>Word Labs  •  wordlabs.app  •  Root: 'happy' = feeling pleased or joyful</a:t>
             </a:r>
             <a:endParaRPr lang="en-US" sz="800" dirty="0"/>
           </a:p>
@@ -14962,7 +14962,7 @@
                 <a:ea typeface="Trebuchet MS" pitchFamily="34" charset="-122"/>
                 <a:cs typeface="Trebuchet MS" pitchFamily="34" charset="-120"/>
               </a:rPr>
-              <a:t>happiness</a:t>
+              <a:t>happiest</a:t>
             </a:r>
             <a:endParaRPr lang="en-US" sz="2800" dirty="0"/>
           </a:p>
@@ -15140,7 +15140,7 @@
                 <a:ea typeface="Calibri" pitchFamily="34" charset="-122"/>
                 <a:cs typeface="Calibri" pitchFamily="34" charset="-120"/>
               </a:rPr>
-              <a:t>feeling pleasure or joy</a:t>
+              <a:t>feeling pleased or joyful</a:t>
             </a:r>
             <a:endParaRPr lang="en-US" sz="850" dirty="0"/>
           </a:p>
@@ -15213,7 +15213,7 @@
                 <a:ea typeface="Trebuchet MS" pitchFamily="34" charset="-122"/>
                 <a:cs typeface="Trebuchet MS" pitchFamily="34" charset="-120"/>
               </a:rPr>
-              <a:t>ness</a:t>
+              <a:t>iest</a:t>
             </a:r>
             <a:endParaRPr lang="en-US" sz="1300" dirty="0"/>
           </a:p>
@@ -15252,7 +15252,7 @@
                 <a:ea typeface="Calibri" pitchFamily="34" charset="-122"/>
                 <a:cs typeface="Calibri" pitchFamily="34" charset="-120"/>
               </a:rPr>
-              <a:t>state or quality of</a:t>
+              <a:t>the most</a:t>
             </a:r>
             <a:endParaRPr lang="en-US" sz="850" dirty="0"/>
           </a:p>
@@ -15291,7 +15291,7 @@
                 <a:ea typeface="Calibri" pitchFamily="34" charset="-122"/>
                 <a:cs typeface="Calibri" pitchFamily="34" charset="-120"/>
               </a:rPr>
-              <a:t>'y' changes to 'i' before '-ness'</a:t>
+              <a:t>y → i before suffix -est</a:t>
             </a:r>
             <a:endParaRPr lang="en-US" sz="700" dirty="0"/>
           </a:p>
@@ -15660,7 +15660,7 @@
                 <a:ea typeface="Trebuchet MS" pitchFamily="34" charset="-122"/>
                 <a:cs typeface="Trebuchet MS" pitchFamily="34" charset="-120"/>
               </a:rPr>
-              <a:t>ness</a:t>
+              <a:t>est</a:t>
             </a:r>
             <a:endParaRPr lang="en-US" sz="1400" dirty="0"/>
           </a:p>
@@ -16083,7 +16083,7 @@
                 <a:ea typeface="Trebuchet MS" pitchFamily="34" charset="-122"/>
                 <a:cs typeface="Trebuchet MS" pitchFamily="34" charset="-120"/>
               </a:rPr>
-              <a:t>n</a:t>
+              <a:t>e</a:t>
             </a:r>
             <a:endParaRPr lang="en-US" sz="900" dirty="0"/>
           </a:p>
@@ -16149,7 +16149,7 @@
                 <a:ea typeface="Trebuchet MS" pitchFamily="34" charset="-122"/>
                 <a:cs typeface="Trebuchet MS" pitchFamily="34" charset="-120"/>
               </a:rPr>
-              <a:t>e</a:t>
+              <a:t>s</a:t>
             </a:r>
             <a:endParaRPr lang="en-US" sz="900" dirty="0"/>
           </a:p>
@@ -16215,7 +16215,7 @@
                 <a:ea typeface="Trebuchet MS" pitchFamily="34" charset="-122"/>
                 <a:cs typeface="Trebuchet MS" pitchFamily="34" charset="-120"/>
               </a:rPr>
-              <a:t>ss</a:t>
+              <a:t>t</a:t>
             </a:r>
             <a:endParaRPr lang="en-US" sz="900" dirty="0"/>
           </a:p>
@@ -16789,7 +16789,7 @@
                 <a:ea typeface="Calibri" pitchFamily="34" charset="-122"/>
                 <a:cs typeface="Calibri" pitchFamily="34" charset="-120"/>
               </a:rPr>
-              <a:t>Word Labs  •  wordlabs.app  •  Root: 'happy' = feeling or showing pleasure</a:t>
+              <a:t>Word Labs  •  wordlabs.app  •  Root: 'happy' = feeling pleased or joyful</a:t>
             </a:r>
             <a:endParaRPr lang="en-US" sz="800" dirty="0"/>
           </a:p>
@@ -17123,7 +17123,7 @@
                 <a:ea typeface="Trebuchet MS" pitchFamily="34" charset="-122"/>
                 <a:cs typeface="Trebuchet MS" pitchFamily="34" charset="-120"/>
               </a:rPr>
-              <a:t>1</a:t>
+              <a:t>2</a:t>
             </a:r>
             <a:pPr algn="ctr" indent="0" marL="0">
               <a:buNone/>
@@ -17137,7 +17137,7 @@
                 <a:ea typeface="Trebuchet MS" pitchFamily="34" charset="-122"/>
                 <a:cs typeface="Trebuchet MS" pitchFamily="34" charset="-120"/>
               </a:rPr>
-              <a:t>  punctuation mark</a:t>
+              <a:t>  punctuation marks</a:t>
             </a:r>
             <a:endParaRPr lang="en-US" sz="2800" dirty="0"/>
           </a:p>
@@ -17429,7 +17429,7 @@
                 <a:ea typeface="Calibri" pitchFamily="34" charset="-122"/>
                 <a:cs typeface="Calibri" pitchFamily="34" charset="-120"/>
               </a:rPr>
-              <a:t>Word Labs  •  wordlabs.app  •  Root: 'happy' = feeling or showing pleasure</a:t>
+              <a:t>Word Labs  •  wordlabs.app  •  Root: 'happy' = feeling pleased or joyful</a:t>
             </a:r>
             <a:endParaRPr lang="en-US" sz="800" dirty="0"/>
           </a:p>
@@ -17541,7 +17541,7 @@
                 <a:ea typeface="Calibri" pitchFamily="34" charset="-122"/>
                 <a:cs typeface="Calibri" pitchFamily="34" charset="-120"/>
               </a:rPr>
-              <a:t>Despite her </a:t>
+              <a:t>Despite his </a:t>
             </a:r>
             <a:pPr algn="l" indent="0" marL="0">
               <a:buNone/>
@@ -17572,7 +17572,7 @@
                 <a:ea typeface="Calibri" pitchFamily="34" charset="-122"/>
                 <a:cs typeface="Calibri" pitchFamily="34" charset="-120"/>
               </a:rPr>
-              <a:t>, she spoke </a:t>
+              <a:t>, he tried to make others feel </a:t>
             </a:r>
             <a:pPr algn="l" indent="0" marL="0">
               <a:buNone/>
@@ -17589,7 +17589,7 @@
                 <a:ea typeface="Calibri" pitchFamily="34" charset="-122"/>
                 <a:cs typeface="Calibri" pitchFamily="34" charset="-120"/>
               </a:rPr>
-              <a:t>unhappily</a:t>
+              <a:t>happier</a:t>
             </a:r>
             <a:pPr algn="l" indent="0" marL="0">
               <a:buNone/>
@@ -17603,7 +17603,7 @@
                 <a:ea typeface="Calibri" pitchFamily="34" charset="-122"/>
                 <a:cs typeface="Calibri" pitchFamily="34" charset="-120"/>
               </a:rPr>
-              <a:t> but tried her best to make the </a:t>
+              <a:t>; true </a:t>
             </a:r>
             <a:pPr algn="l" indent="0" marL="0">
               <a:buNone/>
@@ -17620,7 +17620,7 @@
                 <a:ea typeface="Calibri" pitchFamily="34" charset="-122"/>
                 <a:cs typeface="Calibri" pitchFamily="34" charset="-120"/>
               </a:rPr>
-              <a:t>happiest</a:t>
+              <a:t>happiness</a:t>
             </a:r>
             <a:pPr algn="l" indent="0" marL="0">
               <a:buNone/>
@@ -17634,7 +17634,7 @@
                 <a:ea typeface="Calibri" pitchFamily="34" charset="-122"/>
                 <a:cs typeface="Calibri" pitchFamily="34" charset="-120"/>
               </a:rPr>
-              <a:t> choice she could.</a:t>
+              <a:t> can be shared with everyone.</a:t>
             </a:r>
             <a:endParaRPr lang="en-US" sz="1800" dirty="0"/>
           </a:p>
@@ -17917,7 +17917,7 @@
                 <a:ea typeface="Trebuchet MS" pitchFamily="34" charset="-122"/>
                 <a:cs typeface="Trebuchet MS" pitchFamily="34" charset="-120"/>
               </a:rPr>
-              <a:t>unhappily</a:t>
+              <a:t>happier</a:t>
             </a:r>
             <a:endParaRPr lang="en-US" sz="1400" dirty="0"/>
           </a:p>
@@ -18045,7 +18045,7 @@
                 <a:ea typeface="Trebuchet MS" pitchFamily="34" charset="-122"/>
                 <a:cs typeface="Trebuchet MS" pitchFamily="34" charset="-120"/>
               </a:rPr>
-              <a:t>happiest</a:t>
+              <a:t>happiness</a:t>
             </a:r>
             <a:endParaRPr lang="en-US" sz="1400" dirty="0"/>
           </a:p>
@@ -18376,7 +18376,7 @@
                 <a:ea typeface="Calibri" pitchFamily="34" charset="-122"/>
                 <a:cs typeface="Calibri" pitchFamily="34" charset="-120"/>
               </a:rPr>
-              <a:t>Word Labs  •  wordlabs.app  •  Root: 'happy' = feeling or showing pleasure</a:t>
+              <a:t>Word Labs  •  wordlabs.app  •  Root: 'happy' = feeling pleased or joyful</a:t>
             </a:r>
             <a:endParaRPr lang="en-US" sz="800" dirty="0"/>
           </a:p>
@@ -19203,7 +19203,7 @@
                 <a:ea typeface="Calibri" pitchFamily="34" charset="-122"/>
                 <a:cs typeface="Calibri" pitchFamily="34" charset="-120"/>
               </a:rPr>
-              <a:t>Word Labs  •  wordlabs.app  •  Root: 'happy' = feeling or showing pleasure</a:t>
+              <a:t>Word Labs  •  wordlabs.app  •  Root: 'happy' = feeling pleased or joyful</a:t>
             </a:r>
             <a:endParaRPr lang="en-US" sz="800" dirty="0"/>
           </a:p>
@@ -19632,7 +19632,7 @@
                 <a:ea typeface="Calibri" pitchFamily="34" charset="-122"/>
                 <a:cs typeface="Calibri" pitchFamily="34" charset="-120"/>
               </a:rPr>
-              <a:t>feeling pleasure or joy</a:t>
+              <a:t>feeling pleased or joyful</a:t>
             </a:r>
             <a:endParaRPr lang="en-US" sz="850" dirty="0"/>
           </a:p>
@@ -19705,7 +19705,7 @@
                 <a:ea typeface="Trebuchet MS" pitchFamily="34" charset="-122"/>
                 <a:cs typeface="Trebuchet MS" pitchFamily="34" charset="-120"/>
               </a:rPr>
-              <a:t>ness</a:t>
+              <a:t>iness</a:t>
             </a:r>
             <a:endParaRPr lang="en-US" sz="1300" dirty="0"/>
           </a:p>
@@ -19744,7 +19744,7 @@
                 <a:ea typeface="Calibri" pitchFamily="34" charset="-122"/>
                 <a:cs typeface="Calibri" pitchFamily="34" charset="-120"/>
               </a:rPr>
-              <a:t>state or quality of</a:t>
+              <a:t>the state of being</a:t>
             </a:r>
             <a:endParaRPr lang="en-US" sz="850" dirty="0"/>
           </a:p>
@@ -19783,7 +19783,7 @@
                 <a:ea typeface="Calibri" pitchFamily="34" charset="-122"/>
                 <a:cs typeface="Calibri" pitchFamily="34" charset="-120"/>
               </a:rPr>
-              <a:t>'y' changes to 'i' before '-ness'</a:t>
+              <a:t>y → i before suffix -ness</a:t>
             </a:r>
             <a:endParaRPr lang="en-US" sz="700" dirty="0"/>
           </a:p>
@@ -20339,7 +20339,7 @@
                 <a:ea typeface="Calibri" pitchFamily="34" charset="-122"/>
                 <a:cs typeface="Calibri" pitchFamily="34" charset="-120"/>
               </a:rPr>
-              <a:t>Word Labs  •  wordlabs.app  •  Root: 'happy' = feeling or showing pleasure</a:t>
+              <a:t>Word Labs  •  wordlabs.app  •  Root: 'happy' = feeling pleased or joyful</a:t>
             </a:r>
             <a:endParaRPr lang="en-US" sz="800" dirty="0"/>
           </a:p>
@@ -20768,7 +20768,7 @@
                 <a:ea typeface="Calibri" pitchFamily="34" charset="-122"/>
                 <a:cs typeface="Calibri" pitchFamily="34" charset="-120"/>
               </a:rPr>
-              <a:t>feeling pleasure or joy</a:t>
+              <a:t>feeling pleased or joyful</a:t>
             </a:r>
             <a:endParaRPr lang="en-US" sz="850" dirty="0"/>
           </a:p>
@@ -20841,7 +20841,7 @@
                 <a:ea typeface="Trebuchet MS" pitchFamily="34" charset="-122"/>
                 <a:cs typeface="Trebuchet MS" pitchFamily="34" charset="-120"/>
               </a:rPr>
-              <a:t>ness</a:t>
+              <a:t>iness</a:t>
             </a:r>
             <a:endParaRPr lang="en-US" sz="1300" dirty="0"/>
           </a:p>
@@ -20880,7 +20880,7 @@
                 <a:ea typeface="Calibri" pitchFamily="34" charset="-122"/>
                 <a:cs typeface="Calibri" pitchFamily="34" charset="-120"/>
               </a:rPr>
-              <a:t>state or quality of</a:t>
+              <a:t>the state of being</a:t>
             </a:r>
             <a:endParaRPr lang="en-US" sz="850" dirty="0"/>
           </a:p>
@@ -20919,7 +20919,7 @@
                 <a:ea typeface="Calibri" pitchFamily="34" charset="-122"/>
                 <a:cs typeface="Calibri" pitchFamily="34" charset="-120"/>
               </a:rPr>
-              <a:t>'y' changes to 'i' before '-ness'</a:t>
+              <a:t>y → i before suffix -ness</a:t>
             </a:r>
             <a:endParaRPr lang="en-US" sz="700" dirty="0"/>
           </a:p>
@@ -21817,7 +21817,7 @@
                 <a:ea typeface="Calibri" pitchFamily="34" charset="-122"/>
                 <a:cs typeface="Calibri" pitchFamily="34" charset="-120"/>
               </a:rPr>
-              <a:t>Word Labs  •  wordlabs.app  •  Root: 'happy' = feeling or showing pleasure</a:t>
+              <a:t>Word Labs  •  wordlabs.app  •  Root: 'happy' = feeling pleased or joyful</a:t>
             </a:r>
             <a:endParaRPr lang="en-US" sz="800" dirty="0"/>
           </a:p>
@@ -22246,7 +22246,7 @@
                 <a:ea typeface="Calibri" pitchFamily="34" charset="-122"/>
                 <a:cs typeface="Calibri" pitchFamily="34" charset="-120"/>
               </a:rPr>
-              <a:t>feeling pleasure or joy</a:t>
+              <a:t>feeling pleased or joyful</a:t>
             </a:r>
             <a:endParaRPr lang="en-US" sz="850" dirty="0"/>
           </a:p>
@@ -22319,7 +22319,7 @@
                 <a:ea typeface="Trebuchet MS" pitchFamily="34" charset="-122"/>
                 <a:cs typeface="Trebuchet MS" pitchFamily="34" charset="-120"/>
               </a:rPr>
-              <a:t>ness</a:t>
+              <a:t>iness</a:t>
             </a:r>
             <a:endParaRPr lang="en-US" sz="1300" dirty="0"/>
           </a:p>
@@ -22358,7 +22358,7 @@
                 <a:ea typeface="Calibri" pitchFamily="34" charset="-122"/>
                 <a:cs typeface="Calibri" pitchFamily="34" charset="-120"/>
               </a:rPr>
-              <a:t>state or quality of</a:t>
+              <a:t>the state of being</a:t>
             </a:r>
             <a:endParaRPr lang="en-US" sz="850" dirty="0"/>
           </a:p>
@@ -22397,7 +22397,7 @@
                 <a:ea typeface="Calibri" pitchFamily="34" charset="-122"/>
                 <a:cs typeface="Calibri" pitchFamily="34" charset="-120"/>
               </a:rPr>
-              <a:t>'y' changes to 'i' before '-ness'</a:t>
+              <a:t>y → i before suffix -ness</a:t>
             </a:r>
             <a:endParaRPr lang="en-US" sz="700" dirty="0"/>
           </a:p>
@@ -23850,7 +23850,7 @@
                 <a:ea typeface="Calibri" pitchFamily="34" charset="-122"/>
                 <a:cs typeface="Calibri" pitchFamily="34" charset="-120"/>
               </a:rPr>
-              <a:t>Word Labs  •  wordlabs.app  •  Root: 'happy' = feeling or showing pleasure</a:t>
+              <a:t>Word Labs  •  wordlabs.app  •  Root: 'happy' = feeling pleased or joyful</a:t>
             </a:r>
             <a:endParaRPr lang="en-US" sz="800" dirty="0"/>
           </a:p>
@@ -23989,7 +23989,7 @@
                 <a:ea typeface="Trebuchet MS" pitchFamily="34" charset="-122"/>
                 <a:cs typeface="Trebuchet MS" pitchFamily="34" charset="-120"/>
               </a:rPr>
-              <a:t>unhappily</a:t>
+              <a:t>happier</a:t>
             </a:r>
             <a:endParaRPr lang="en-US" sz="2800" dirty="0"/>
           </a:p>
@@ -24677,7 +24677,7 @@
                 <a:ea typeface="Calibri" pitchFamily="34" charset="-122"/>
                 <a:cs typeface="Calibri" pitchFamily="34" charset="-120"/>
               </a:rPr>
-              <a:t>Word Labs  •  wordlabs.app  •  Root: 'happy' = feeling or showing pleasure</a:t>
+              <a:t>Word Labs  •  wordlabs.app  •  Root: 'happy' = feeling pleased or joyful</a:t>
             </a:r>
             <a:endParaRPr lang="en-US" sz="800" dirty="0"/>
           </a:p>
@@ -24816,7 +24816,7 @@
                 <a:ea typeface="Trebuchet MS" pitchFamily="34" charset="-122"/>
                 <a:cs typeface="Trebuchet MS" pitchFamily="34" charset="-120"/>
               </a:rPr>
-              <a:t>unhappily</a:t>
+              <a:t>happier</a:t>
             </a:r>
             <a:endParaRPr lang="en-US" sz="2800" dirty="0"/>
           </a:p>
@@ -24896,7 +24896,7 @@
         </p:nvSpPr>
         <p:spPr>
           <a:xfrm>
-            <a:off x="2221992" y="2258568"/>
+            <a:off x="2938272" y="2258568"/>
             <a:ext cx="1828800" cy="292608"/>
           </a:xfrm>
           <a:prstGeom prst="rect">
@@ -24905,11 +24905,11 @@
             </a:avLst>
           </a:prstGeom>
           <a:solidFill>
-            <a:srgbClr val="DDD6FE"/>
+            <a:srgbClr val="CCFBF1"/>
           </a:solidFill>
           <a:ln w="19050">
             <a:solidFill>
-              <a:srgbClr val="7C3AED"/>
+              <a:srgbClr val="0D9488"/>
             </a:solidFill>
             <a:prstDash val="solid"/>
           </a:ln>
@@ -24930,7 +24930,7 @@
         </p:nvSpPr>
         <p:spPr>
           <a:xfrm>
-            <a:off x="2221992" y="2258568"/>
+            <a:off x="2938272" y="2258568"/>
             <a:ext cx="1828800" cy="292608"/>
           </a:xfrm>
           <a:prstGeom prst="rect">
@@ -24949,13 +24949,13 @@
             <a:r>
               <a:rPr lang="en-US" sz="1300" b="1" dirty="0">
                 <a:solidFill>
-                  <a:srgbClr val="4C1D95"/>
+                  <a:srgbClr val="0F766E"/>
                 </a:solidFill>
                 <a:latin typeface="Trebuchet MS" pitchFamily="34" charset="0"/>
                 <a:ea typeface="Trebuchet MS" pitchFamily="34" charset="-122"/>
                 <a:cs typeface="Trebuchet MS" pitchFamily="34" charset="-120"/>
               </a:rPr>
-              <a:t>un</a:t>
+              <a:t>happy</a:t>
             </a:r>
             <a:endParaRPr lang="en-US" sz="1300" dirty="0"/>
           </a:p>
@@ -24969,7 +24969,7 @@
         </p:nvSpPr>
         <p:spPr>
           <a:xfrm>
-            <a:off x="2221992" y="2569464"/>
+            <a:off x="2938272" y="2569464"/>
             <a:ext cx="1828800" cy="201168"/>
           </a:xfrm>
           <a:prstGeom prst="rect">
@@ -24994,7 +24994,7 @@
                 <a:ea typeface="Calibri" pitchFamily="34" charset="-122"/>
                 <a:cs typeface="Calibri" pitchFamily="34" charset="-120"/>
               </a:rPr>
-              <a:t>not</a:t>
+              <a:t>feeling pleased or joyful</a:t>
             </a:r>
             <a:endParaRPr lang="en-US" sz="850" dirty="0"/>
           </a:p>
@@ -25008,7 +25008,7 @@
         </p:nvSpPr>
         <p:spPr>
           <a:xfrm>
-            <a:off x="4370832" y="2258568"/>
+            <a:off x="5803392" y="2258568"/>
             <a:ext cx="1828800" cy="292608"/>
           </a:xfrm>
           <a:prstGeom prst="rect">
@@ -25017,11 +25017,11 @@
             </a:avLst>
           </a:prstGeom>
           <a:solidFill>
-            <a:srgbClr val="CCFBF1"/>
+            <a:srgbClr val="FCE7F3"/>
           </a:solidFill>
           <a:ln w="19050">
             <a:solidFill>
-              <a:srgbClr val="0D9488"/>
+              <a:srgbClr val="DB2777"/>
             </a:solidFill>
             <a:prstDash val="solid"/>
           </a:ln>
@@ -25042,7 +25042,7 @@
         </p:nvSpPr>
         <p:spPr>
           <a:xfrm>
-            <a:off x="4370832" y="2258568"/>
+            <a:off x="5803392" y="2258568"/>
             <a:ext cx="1828800" cy="292608"/>
           </a:xfrm>
           <a:prstGeom prst="rect">
@@ -25061,13 +25061,13 @@
             <a:r>
               <a:rPr lang="en-US" sz="1300" b="1" dirty="0">
                 <a:solidFill>
-                  <a:srgbClr val="0F766E"/>
+                  <a:srgbClr val="9D174D"/>
                 </a:solidFill>
                 <a:latin typeface="Trebuchet MS" pitchFamily="34" charset="0"/>
                 <a:ea typeface="Trebuchet MS" pitchFamily="34" charset="-122"/>
                 <a:cs typeface="Trebuchet MS" pitchFamily="34" charset="-120"/>
               </a:rPr>
-              <a:t>happy</a:t>
+              <a:t>ier</a:t>
             </a:r>
             <a:endParaRPr lang="en-US" sz="1300" dirty="0"/>
           </a:p>
@@ -25081,7 +25081,7 @@
         </p:nvSpPr>
         <p:spPr>
           <a:xfrm>
-            <a:off x="4370832" y="2569464"/>
+            <a:off x="5803392" y="2569464"/>
             <a:ext cx="1828800" cy="201168"/>
           </a:xfrm>
           <a:prstGeom prst="rect">
@@ -25106,7 +25106,7 @@
                 <a:ea typeface="Calibri" pitchFamily="34" charset="-122"/>
                 <a:cs typeface="Calibri" pitchFamily="34" charset="-120"/>
               </a:rPr>
-              <a:t>feeling pleasure or joy</a:t>
+              <a:t>more</a:t>
             </a:r>
             <a:endParaRPr lang="en-US" sz="850" dirty="0"/>
           </a:p>
@@ -25114,169 +25114,189 @@
       </p:sp>
       <p:sp>
         <p:nvSpPr>
-          <p:cNvPr id="22" name="Shape 20"/>
-          <p:cNvSpPr/>
-          <p:nvPr/>
-        </p:nvSpPr>
-        <p:spPr>
-          <a:xfrm>
-            <a:off x="6519672" y="2258568"/>
-            <a:ext cx="1828800" cy="292608"/>
+          <p:cNvPr id="22" name="Text 20"/>
+          <p:cNvSpPr/>
+          <p:nvPr/>
+        </p:nvSpPr>
+        <p:spPr>
+          <a:xfrm>
+            <a:off x="5803392" y="2752344"/>
+            <a:ext cx="1828800" cy="182880"/>
+          </a:xfrm>
+          <a:prstGeom prst="rect">
+            <a:avLst/>
+          </a:prstGeom>
+          <a:noFill/>
+          <a:ln/>
+        </p:spPr>
+        <p:txBody>
+          <a:bodyPr wrap="square" lIns="0" tIns="0" rIns="0" bIns="0" rtlCol="0" anchor="t"/>
+          <a:lstStyle/>
+          <a:p>
+            <a:pPr algn="ctr" indent="0" marL="0">
+              <a:buNone/>
+            </a:pPr>
+            <a:r>
+              <a:rPr lang="en-US" sz="700" i="1" dirty="0">
+                <a:solidFill>
+                  <a:srgbClr val="94A3B8"/>
+                </a:solidFill>
+                <a:latin typeface="Calibri" pitchFamily="34" charset="0"/>
+                <a:ea typeface="Calibri" pitchFamily="34" charset="-122"/>
+                <a:cs typeface="Calibri" pitchFamily="34" charset="-120"/>
+              </a:rPr>
+              <a:t>y → i before suffix -er</a:t>
+            </a:r>
+            <a:endParaRPr lang="en-US" sz="700" dirty="0"/>
+          </a:p>
+        </p:txBody>
+      </p:sp>
+      <p:sp>
+        <p:nvSpPr>
+          <p:cNvPr id="23" name="Shape 21"/>
+          <p:cNvSpPr/>
+          <p:nvPr/>
+        </p:nvSpPr>
+        <p:spPr>
+          <a:xfrm>
+            <a:off x="365760" y="3273552"/>
+            <a:ext cx="1371600" cy="658368"/>
           </a:xfrm>
           <a:prstGeom prst="rect">
             <a:avLst>
-              <a:gd name="adj" fmla="val 25000"/>
+              <a:gd name="adj" fmla="val 8333"/>
             </a:avLst>
           </a:prstGeom>
           <a:solidFill>
-            <a:srgbClr val="FCE7F3"/>
-          </a:solidFill>
-          <a:ln w="19050">
-            <a:solidFill>
-              <a:srgbClr val="DB2777"/>
-            </a:solidFill>
-            <a:prstDash val="solid"/>
-          </a:ln>
-          <a:effectLst>
-            <a:outerShdw sx="100000" sy="100000" kx="0" ky="0" algn="bl" rotWithShape="0" blurRad="101600" dist="38100" dir="8100000">
-              <a:srgbClr val="000000">
-                <a:alpha val="12000"/>
-              </a:srgbClr>
-            </a:outerShdw>
-          </a:effectLst>
-        </p:spPr>
-      </p:sp>
-      <p:sp>
-        <p:nvSpPr>
-          <p:cNvPr id="23" name="Text 21"/>
-          <p:cNvSpPr/>
-          <p:nvPr/>
-        </p:nvSpPr>
-        <p:spPr>
-          <a:xfrm>
-            <a:off x="6519672" y="2258568"/>
-            <a:ext cx="1828800" cy="292608"/>
-          </a:xfrm>
-          <a:prstGeom prst="rect">
-            <a:avLst/>
-          </a:prstGeom>
-          <a:noFill/>
-          <a:ln/>
-        </p:spPr>
-        <p:txBody>
-          <a:bodyPr wrap="square" lIns="0" tIns="0" rIns="0" bIns="0" rtlCol="0" anchor="ctr"/>
-          <a:lstStyle/>
-          <a:p>
-            <a:pPr algn="ctr" indent="0" marL="0">
-              <a:buNone/>
-            </a:pPr>
-            <a:r>
-              <a:rPr lang="en-US" sz="1300" b="1" dirty="0">
-                <a:solidFill>
-                  <a:srgbClr val="9D174D"/>
+            <a:srgbClr val="E2E8F0"/>
+          </a:solidFill>
+          <a:ln w="12700">
+            <a:solidFill>
+              <a:srgbClr val="E2E8F0"/>
+            </a:solidFill>
+            <a:prstDash val="solid"/>
+          </a:ln>
+        </p:spPr>
+      </p:sp>
+      <p:sp>
+        <p:nvSpPr>
+          <p:cNvPr id="24" name="Text 22"/>
+          <p:cNvSpPr/>
+          <p:nvPr/>
+        </p:nvSpPr>
+        <p:spPr>
+          <a:xfrm>
+            <a:off x="365760" y="3273552"/>
+            <a:ext cx="1371600" cy="658368"/>
+          </a:xfrm>
+          <a:prstGeom prst="rect">
+            <a:avLst/>
+          </a:prstGeom>
+          <a:noFill/>
+          <a:ln/>
+        </p:spPr>
+        <p:txBody>
+          <a:bodyPr wrap="square" lIns="0" tIns="0" rIns="0" bIns="0" rtlCol="0" anchor="ctr"/>
+          <a:lstStyle/>
+          <a:p>
+            <a:pPr algn="ctr" indent="0" marL="0">
+              <a:buNone/>
+            </a:pPr>
+            <a:r>
+              <a:rPr lang="en-US" sz="1100" b="1" dirty="0">
+                <a:solidFill>
+                  <a:srgbClr val="475569"/>
                 </a:solidFill>
                 <a:latin typeface="Trebuchet MS" pitchFamily="34" charset="0"/>
                 <a:ea typeface="Trebuchet MS" pitchFamily="34" charset="-122"/>
                 <a:cs typeface="Trebuchet MS" pitchFamily="34" charset="-120"/>
               </a:rPr>
-              <a:t>ily</a:t>
-            </a:r>
-            <a:endParaRPr lang="en-US" sz="1300" dirty="0"/>
-          </a:p>
-        </p:txBody>
-      </p:sp>
-      <p:sp>
-        <p:nvSpPr>
-          <p:cNvPr id="24" name="Text 22"/>
-          <p:cNvSpPr/>
-          <p:nvPr/>
-        </p:nvSpPr>
-        <p:spPr>
-          <a:xfrm>
-            <a:off x="6519672" y="2569464"/>
-            <a:ext cx="1828800" cy="201168"/>
-          </a:xfrm>
-          <a:prstGeom prst="rect">
-            <a:avLst/>
-          </a:prstGeom>
-          <a:noFill/>
-          <a:ln/>
-        </p:spPr>
-        <p:txBody>
-          <a:bodyPr wrap="square" lIns="0" tIns="0" rIns="0" bIns="0" rtlCol="0" anchor="t"/>
-          <a:lstStyle/>
-          <a:p>
-            <a:pPr algn="ctr" indent="0" marL="0">
-              <a:buNone/>
-            </a:pPr>
-            <a:r>
-              <a:rPr lang="en-US" sz="850" dirty="0">
-                <a:solidFill>
-                  <a:srgbClr val="475569"/>
+              <a:t>Syllables</a:t>
+            </a:r>
+            <a:endParaRPr lang="en-US" sz="1100" dirty="0"/>
+          </a:p>
+        </p:txBody>
+      </p:sp>
+      <p:sp>
+        <p:nvSpPr>
+          <p:cNvPr id="25" name="Shape 23"/>
+          <p:cNvSpPr/>
+          <p:nvPr/>
+        </p:nvSpPr>
+        <p:spPr>
+          <a:xfrm>
+            <a:off x="1874520" y="3273552"/>
+            <a:ext cx="6903720" cy="658368"/>
+          </a:xfrm>
+          <a:prstGeom prst="rect">
+            <a:avLst>
+              <a:gd name="adj" fmla="val 8333"/>
+            </a:avLst>
+          </a:prstGeom>
+          <a:solidFill>
+            <a:srgbClr val="F8FAFC"/>
+          </a:solidFill>
+          <a:ln w="12700">
+            <a:solidFill>
+              <a:srgbClr val="E2E8F0"/>
+            </a:solidFill>
+            <a:prstDash val="dash"/>
+          </a:ln>
+        </p:spPr>
+      </p:sp>
+      <p:sp>
+        <p:nvSpPr>
+          <p:cNvPr id="26" name="Text 24"/>
+          <p:cNvSpPr/>
+          <p:nvPr/>
+        </p:nvSpPr>
+        <p:spPr>
+          <a:xfrm>
+            <a:off x="1874520" y="3273552"/>
+            <a:ext cx="6903720" cy="658368"/>
+          </a:xfrm>
+          <a:prstGeom prst="rect">
+            <a:avLst/>
+          </a:prstGeom>
+          <a:noFill/>
+          <a:ln/>
+        </p:spPr>
+        <p:txBody>
+          <a:bodyPr wrap="square" rtlCol="0" anchor="ctr"/>
+          <a:lstStyle/>
+          <a:p>
+            <a:pPr algn="ctr" indent="0" marL="0">
+              <a:buNone/>
+            </a:pPr>
+            <a:r>
+              <a:rPr lang="en-US" sz="1100" i="1" dirty="0">
+                <a:solidFill>
+                  <a:srgbClr val="CBD5E1"/>
                 </a:solidFill>
                 <a:latin typeface="Calibri" pitchFamily="34" charset="0"/>
                 <a:ea typeface="Calibri" pitchFamily="34" charset="-122"/>
                 <a:cs typeface="Calibri" pitchFamily="34" charset="-120"/>
               </a:rPr>
-              <a:t>in a certain way</a:t>
-            </a:r>
-            <a:endParaRPr lang="en-US" sz="850" dirty="0"/>
-          </a:p>
-        </p:txBody>
-      </p:sp>
-      <p:sp>
-        <p:nvSpPr>
-          <p:cNvPr id="25" name="Text 23"/>
-          <p:cNvSpPr/>
-          <p:nvPr/>
-        </p:nvSpPr>
-        <p:spPr>
-          <a:xfrm>
-            <a:off x="6519672" y="2752344"/>
-            <a:ext cx="1828800" cy="182880"/>
-          </a:xfrm>
-          <a:prstGeom prst="rect">
-            <a:avLst/>
-          </a:prstGeom>
-          <a:noFill/>
-          <a:ln/>
-        </p:spPr>
-        <p:txBody>
-          <a:bodyPr wrap="square" lIns="0" tIns="0" rIns="0" bIns="0" rtlCol="0" anchor="t"/>
-          <a:lstStyle/>
-          <a:p>
-            <a:pPr algn="ctr" indent="0" marL="0">
-              <a:buNone/>
-            </a:pPr>
-            <a:r>
-              <a:rPr lang="en-US" sz="700" i="1" dirty="0">
-                <a:solidFill>
-                  <a:srgbClr val="94A3B8"/>
-                </a:solidFill>
-                <a:latin typeface="Calibri" pitchFamily="34" charset="0"/>
-                <a:ea typeface="Calibri" pitchFamily="34" charset="-122"/>
-                <a:cs typeface="Calibri" pitchFamily="34" charset="-120"/>
-              </a:rPr>
-              <a:t>'y' changes to 'i' before '-ly'</a:t>
-            </a:r>
-            <a:endParaRPr lang="en-US" sz="700" dirty="0"/>
-          </a:p>
-        </p:txBody>
-      </p:sp>
-      <p:sp>
-        <p:nvSpPr>
-          <p:cNvPr id="26" name="Shape 24"/>
-          <p:cNvSpPr/>
-          <p:nvPr/>
-        </p:nvSpPr>
-        <p:spPr>
-          <a:xfrm>
-            <a:off x="365760" y="3273552"/>
-            <a:ext cx="1371600" cy="658368"/>
+              <a:t>Write here...</a:t>
+            </a:r>
+            <a:endParaRPr lang="en-US" sz="1100" dirty="0"/>
+          </a:p>
+        </p:txBody>
+      </p:sp>
+      <p:sp>
+        <p:nvSpPr>
+          <p:cNvPr id="27" name="Shape 25"/>
+          <p:cNvSpPr/>
+          <p:nvPr/>
+        </p:nvSpPr>
+        <p:spPr>
+          <a:xfrm>
+            <a:off x="365760" y="4096512"/>
+            <a:ext cx="1371600" cy="804672"/>
           </a:xfrm>
           <a:prstGeom prst="rect">
             <a:avLst>
-              <a:gd name="adj" fmla="val 8333"/>
+              <a:gd name="adj" fmla="val 6818"/>
             </a:avLst>
           </a:prstGeom>
           <a:solidFill>
@@ -25292,14 +25312,14 @@
       </p:sp>
       <p:sp>
         <p:nvSpPr>
-          <p:cNvPr id="27" name="Text 25"/>
-          <p:cNvSpPr/>
-          <p:nvPr/>
-        </p:nvSpPr>
-        <p:spPr>
-          <a:xfrm>
-            <a:off x="365760" y="3273552"/>
-            <a:ext cx="1371600" cy="658368"/>
+          <p:cNvPr id="28" name="Text 26"/>
+          <p:cNvSpPr/>
+          <p:nvPr/>
+        </p:nvSpPr>
+        <p:spPr>
+          <a:xfrm>
+            <a:off x="365760" y="4096512"/>
+            <a:ext cx="1371600" cy="804672"/>
           </a:xfrm>
           <a:prstGeom prst="rect">
             <a:avLst/>
@@ -25323,7 +25343,7 @@
                 <a:ea typeface="Trebuchet MS" pitchFamily="34" charset="-122"/>
                 <a:cs typeface="Trebuchet MS" pitchFamily="34" charset="-120"/>
               </a:rPr>
-              <a:t>Syllables</a:t>
+              <a:t>Phonemes</a:t>
             </a:r>
             <a:endParaRPr lang="en-US" sz="1100" dirty="0"/>
           </a:p>
@@ -25331,80 +25351,14 @@
       </p:sp>
       <p:sp>
         <p:nvSpPr>
-          <p:cNvPr id="28" name="Shape 26"/>
-          <p:cNvSpPr/>
-          <p:nvPr/>
-        </p:nvSpPr>
-        <p:spPr>
-          <a:xfrm>
-            <a:off x="1874520" y="3273552"/>
-            <a:ext cx="6903720" cy="658368"/>
-          </a:xfrm>
-          <a:prstGeom prst="rect">
-            <a:avLst>
-              <a:gd name="adj" fmla="val 8333"/>
-            </a:avLst>
-          </a:prstGeom>
-          <a:solidFill>
-            <a:srgbClr val="F8FAFC"/>
-          </a:solidFill>
-          <a:ln w="12700">
-            <a:solidFill>
-              <a:srgbClr val="E2E8F0"/>
-            </a:solidFill>
-            <a:prstDash val="dash"/>
-          </a:ln>
-        </p:spPr>
-      </p:sp>
-      <p:sp>
-        <p:nvSpPr>
-          <p:cNvPr id="29" name="Text 27"/>
-          <p:cNvSpPr/>
-          <p:nvPr/>
-        </p:nvSpPr>
-        <p:spPr>
-          <a:xfrm>
-            <a:off x="1874520" y="3273552"/>
-            <a:ext cx="6903720" cy="658368"/>
-          </a:xfrm>
-          <a:prstGeom prst="rect">
-            <a:avLst/>
-          </a:prstGeom>
-          <a:noFill/>
-          <a:ln/>
-        </p:spPr>
-        <p:txBody>
-          <a:bodyPr wrap="square" rtlCol="0" anchor="ctr"/>
-          <a:lstStyle/>
-          <a:p>
-            <a:pPr algn="ctr" indent="0" marL="0">
-              <a:buNone/>
-            </a:pPr>
-            <a:r>
-              <a:rPr lang="en-US" sz="1100" i="1" dirty="0">
-                <a:solidFill>
-                  <a:srgbClr val="CBD5E1"/>
-                </a:solidFill>
-                <a:latin typeface="Calibri" pitchFamily="34" charset="0"/>
-                <a:ea typeface="Calibri" pitchFamily="34" charset="-122"/>
-                <a:cs typeface="Calibri" pitchFamily="34" charset="-120"/>
-              </a:rPr>
-              <a:t>Write here...</a:t>
-            </a:r>
-            <a:endParaRPr lang="en-US" sz="1100" dirty="0"/>
-          </a:p>
-        </p:txBody>
-      </p:sp>
-      <p:sp>
-        <p:nvSpPr>
-          <p:cNvPr id="30" name="Shape 28"/>
-          <p:cNvSpPr/>
-          <p:nvPr/>
-        </p:nvSpPr>
-        <p:spPr>
-          <a:xfrm>
-            <a:off x="365760" y="4096512"/>
-            <a:ext cx="1371600" cy="804672"/>
+          <p:cNvPr id="29" name="Shape 27"/>
+          <p:cNvSpPr/>
+          <p:nvPr/>
+        </p:nvSpPr>
+        <p:spPr>
+          <a:xfrm>
+            <a:off x="1874520" y="4096512"/>
+            <a:ext cx="6903720" cy="804672"/>
           </a:xfrm>
           <a:prstGeom prst="rect">
             <a:avLst>
@@ -25412,85 +25366,19 @@
             </a:avLst>
           </a:prstGeom>
           <a:solidFill>
-            <a:srgbClr val="E2E8F0"/>
+            <a:srgbClr val="F8FAFC"/>
           </a:solidFill>
           <a:ln w="12700">
             <a:solidFill>
               <a:srgbClr val="E2E8F0"/>
             </a:solidFill>
-            <a:prstDash val="solid"/>
-          </a:ln>
-        </p:spPr>
-      </p:sp>
-      <p:sp>
-        <p:nvSpPr>
-          <p:cNvPr id="31" name="Text 29"/>
-          <p:cNvSpPr/>
-          <p:nvPr/>
-        </p:nvSpPr>
-        <p:spPr>
-          <a:xfrm>
-            <a:off x="365760" y="4096512"/>
-            <a:ext cx="1371600" cy="804672"/>
-          </a:xfrm>
-          <a:prstGeom prst="rect">
-            <a:avLst/>
-          </a:prstGeom>
-          <a:noFill/>
-          <a:ln/>
-        </p:spPr>
-        <p:txBody>
-          <a:bodyPr wrap="square" lIns="0" tIns="0" rIns="0" bIns="0" rtlCol="0" anchor="ctr"/>
-          <a:lstStyle/>
-          <a:p>
-            <a:pPr algn="ctr" indent="0" marL="0">
-              <a:buNone/>
-            </a:pPr>
-            <a:r>
-              <a:rPr lang="en-US" sz="1100" b="1" dirty="0">
-                <a:solidFill>
-                  <a:srgbClr val="475569"/>
-                </a:solidFill>
-                <a:latin typeface="Trebuchet MS" pitchFamily="34" charset="0"/>
-                <a:ea typeface="Trebuchet MS" pitchFamily="34" charset="-122"/>
-                <a:cs typeface="Trebuchet MS" pitchFamily="34" charset="-120"/>
-              </a:rPr>
-              <a:t>Phonemes</a:t>
-            </a:r>
-            <a:endParaRPr lang="en-US" sz="1100" dirty="0"/>
-          </a:p>
-        </p:txBody>
-      </p:sp>
-      <p:sp>
-        <p:nvSpPr>
-          <p:cNvPr id="32" name="Shape 30"/>
-          <p:cNvSpPr/>
-          <p:nvPr/>
-        </p:nvSpPr>
-        <p:spPr>
-          <a:xfrm>
-            <a:off x="1874520" y="4096512"/>
-            <a:ext cx="6903720" cy="804672"/>
-          </a:xfrm>
-          <a:prstGeom prst="rect">
-            <a:avLst>
-              <a:gd name="adj" fmla="val 6818"/>
-            </a:avLst>
-          </a:prstGeom>
-          <a:solidFill>
-            <a:srgbClr val="F8FAFC"/>
-          </a:solidFill>
-          <a:ln w="12700">
-            <a:solidFill>
-              <a:srgbClr val="E2E8F0"/>
-            </a:solidFill>
             <a:prstDash val="dash"/>
           </a:ln>
         </p:spPr>
       </p:sp>
       <p:sp>
         <p:nvSpPr>
-          <p:cNvPr id="33" name="Text 31"/>
+          <p:cNvPr id="30" name="Text 28"/>
           <p:cNvSpPr/>
           <p:nvPr/>
         </p:nvSpPr>
@@ -25813,7 +25701,7 @@
                 <a:ea typeface="Calibri" pitchFamily="34" charset="-122"/>
                 <a:cs typeface="Calibri" pitchFamily="34" charset="-120"/>
               </a:rPr>
-              <a:t>Word Labs  •  wordlabs.app  •  Root: 'happy' = feeling or showing pleasure</a:t>
+              <a:t>Word Labs  •  wordlabs.app  •  Root: 'happy' = feeling pleased or joyful</a:t>
             </a:r>
             <a:endParaRPr lang="en-US" sz="800" dirty="0"/>
           </a:p>
@@ -25886,7 +25774,7 @@
                 <a:ea typeface="Trebuchet MS" pitchFamily="34" charset="-122"/>
                 <a:cs typeface="Trebuchet MS" pitchFamily="34" charset="-120"/>
               </a:rPr>
-              <a:t>We are learning that the root 'happy' means 'feeling or showing pleasure'.</a:t>
+              <a:t>We are learning that the root 'happy' means 'feeling pleased or joyful'.</a:t>
             </a:r>
             <a:endParaRPr lang="en-US" sz="2000" dirty="0"/>
           </a:p>
@@ -26532,7 +26420,7 @@
                 <a:ea typeface="Calibri" pitchFamily="34" charset="-122"/>
                 <a:cs typeface="Calibri" pitchFamily="34" charset="-120"/>
               </a:rPr>
-              <a:t>Word Labs  •  wordlabs.app  •  Root: 'happy' = feeling or showing pleasure</a:t>
+              <a:t>Word Labs  •  wordlabs.app  •  Root: 'happy' = feeling pleased or joyful</a:t>
             </a:r>
             <a:endParaRPr lang="en-US" sz="800" dirty="0"/>
           </a:p>
@@ -26671,7 +26559,7 @@
                 <a:ea typeface="Trebuchet MS" pitchFamily="34" charset="-122"/>
                 <a:cs typeface="Trebuchet MS" pitchFamily="34" charset="-120"/>
               </a:rPr>
-              <a:t>unhappily</a:t>
+              <a:t>happier</a:t>
             </a:r>
             <a:endParaRPr lang="en-US" sz="2800" dirty="0"/>
           </a:p>
@@ -26751,7 +26639,7 @@
         </p:nvSpPr>
         <p:spPr>
           <a:xfrm>
-            <a:off x="2221992" y="2258568"/>
+            <a:off x="2938272" y="2258568"/>
             <a:ext cx="1828800" cy="292608"/>
           </a:xfrm>
           <a:prstGeom prst="rect">
@@ -26760,11 +26648,11 @@
             </a:avLst>
           </a:prstGeom>
           <a:solidFill>
-            <a:srgbClr val="DDD6FE"/>
+            <a:srgbClr val="CCFBF1"/>
           </a:solidFill>
           <a:ln w="19050">
             <a:solidFill>
-              <a:srgbClr val="7C3AED"/>
+              <a:srgbClr val="0D9488"/>
             </a:solidFill>
             <a:prstDash val="solid"/>
           </a:ln>
@@ -26785,7 +26673,7 @@
         </p:nvSpPr>
         <p:spPr>
           <a:xfrm>
-            <a:off x="2221992" y="2258568"/>
+            <a:off x="2938272" y="2258568"/>
             <a:ext cx="1828800" cy="292608"/>
           </a:xfrm>
           <a:prstGeom prst="rect">
@@ -26804,13 +26692,13 @@
             <a:r>
               <a:rPr lang="en-US" sz="1300" b="1" dirty="0">
                 <a:solidFill>
-                  <a:srgbClr val="4C1D95"/>
+                  <a:srgbClr val="0F766E"/>
                 </a:solidFill>
                 <a:latin typeface="Trebuchet MS" pitchFamily="34" charset="0"/>
                 <a:ea typeface="Trebuchet MS" pitchFamily="34" charset="-122"/>
                 <a:cs typeface="Trebuchet MS" pitchFamily="34" charset="-120"/>
               </a:rPr>
-              <a:t>un</a:t>
+              <a:t>happy</a:t>
             </a:r>
             <a:endParaRPr lang="en-US" sz="1300" dirty="0"/>
           </a:p>
@@ -26824,7 +26712,7 @@
         </p:nvSpPr>
         <p:spPr>
           <a:xfrm>
-            <a:off x="2221992" y="2569464"/>
+            <a:off x="2938272" y="2569464"/>
             <a:ext cx="1828800" cy="201168"/>
           </a:xfrm>
           <a:prstGeom prst="rect">
@@ -26849,7 +26737,7 @@
                 <a:ea typeface="Calibri" pitchFamily="34" charset="-122"/>
                 <a:cs typeface="Calibri" pitchFamily="34" charset="-120"/>
               </a:rPr>
-              <a:t>not</a:t>
+              <a:t>feeling pleased or joyful</a:t>
             </a:r>
             <a:endParaRPr lang="en-US" sz="850" dirty="0"/>
           </a:p>
@@ -26863,7 +26751,7 @@
         </p:nvSpPr>
         <p:spPr>
           <a:xfrm>
-            <a:off x="4370832" y="2258568"/>
+            <a:off x="5803392" y="2258568"/>
             <a:ext cx="1828800" cy="292608"/>
           </a:xfrm>
           <a:prstGeom prst="rect">
@@ -26872,11 +26760,11 @@
             </a:avLst>
           </a:prstGeom>
           <a:solidFill>
-            <a:srgbClr val="CCFBF1"/>
+            <a:srgbClr val="FCE7F3"/>
           </a:solidFill>
           <a:ln w="19050">
             <a:solidFill>
-              <a:srgbClr val="0D9488"/>
+              <a:srgbClr val="DB2777"/>
             </a:solidFill>
             <a:prstDash val="solid"/>
           </a:ln>
@@ -26897,7 +26785,7 @@
         </p:nvSpPr>
         <p:spPr>
           <a:xfrm>
-            <a:off x="4370832" y="2258568"/>
+            <a:off x="5803392" y="2258568"/>
             <a:ext cx="1828800" cy="292608"/>
           </a:xfrm>
           <a:prstGeom prst="rect">
@@ -26916,13 +26804,13 @@
             <a:r>
               <a:rPr lang="en-US" sz="1300" b="1" dirty="0">
                 <a:solidFill>
-                  <a:srgbClr val="0F766E"/>
+                  <a:srgbClr val="9D174D"/>
                 </a:solidFill>
                 <a:latin typeface="Trebuchet MS" pitchFamily="34" charset="0"/>
                 <a:ea typeface="Trebuchet MS" pitchFamily="34" charset="-122"/>
                 <a:cs typeface="Trebuchet MS" pitchFamily="34" charset="-120"/>
               </a:rPr>
-              <a:t>happy</a:t>
+              <a:t>ier</a:t>
             </a:r>
             <a:endParaRPr lang="en-US" sz="1300" dirty="0"/>
           </a:p>
@@ -26936,7 +26824,7 @@
         </p:nvSpPr>
         <p:spPr>
           <a:xfrm>
-            <a:off x="4370832" y="2569464"/>
+            <a:off x="5803392" y="2569464"/>
             <a:ext cx="1828800" cy="201168"/>
           </a:xfrm>
           <a:prstGeom prst="rect">
@@ -26961,7 +26849,7 @@
                 <a:ea typeface="Calibri" pitchFamily="34" charset="-122"/>
                 <a:cs typeface="Calibri" pitchFamily="34" charset="-120"/>
               </a:rPr>
-              <a:t>feeling pleasure or joy</a:t>
+              <a:t>more</a:t>
             </a:r>
             <a:endParaRPr lang="en-US" sz="850" dirty="0"/>
           </a:p>
@@ -26969,165 +26857,119 @@
       </p:sp>
       <p:sp>
         <p:nvSpPr>
-          <p:cNvPr id="22" name="Shape 20"/>
-          <p:cNvSpPr/>
-          <p:nvPr/>
-        </p:nvSpPr>
-        <p:spPr>
-          <a:xfrm>
-            <a:off x="6519672" y="2258568"/>
-            <a:ext cx="1828800" cy="292608"/>
+          <p:cNvPr id="22" name="Text 20"/>
+          <p:cNvSpPr/>
+          <p:nvPr/>
+        </p:nvSpPr>
+        <p:spPr>
+          <a:xfrm>
+            <a:off x="5803392" y="2752344"/>
+            <a:ext cx="1828800" cy="182880"/>
+          </a:xfrm>
+          <a:prstGeom prst="rect">
+            <a:avLst/>
+          </a:prstGeom>
+          <a:noFill/>
+          <a:ln/>
+        </p:spPr>
+        <p:txBody>
+          <a:bodyPr wrap="square" lIns="0" tIns="0" rIns="0" bIns="0" rtlCol="0" anchor="t"/>
+          <a:lstStyle/>
+          <a:p>
+            <a:pPr algn="ctr" indent="0" marL="0">
+              <a:buNone/>
+            </a:pPr>
+            <a:r>
+              <a:rPr lang="en-US" sz="700" i="1" dirty="0">
+                <a:solidFill>
+                  <a:srgbClr val="94A3B8"/>
+                </a:solidFill>
+                <a:latin typeface="Calibri" pitchFamily="34" charset="0"/>
+                <a:ea typeface="Calibri" pitchFamily="34" charset="-122"/>
+                <a:cs typeface="Calibri" pitchFamily="34" charset="-120"/>
+              </a:rPr>
+              <a:t>y → i before suffix -er</a:t>
+            </a:r>
+            <a:endParaRPr lang="en-US" sz="700" dirty="0"/>
+          </a:p>
+        </p:txBody>
+      </p:sp>
+      <p:sp>
+        <p:nvSpPr>
+          <p:cNvPr id="23" name="Shape 21"/>
+          <p:cNvSpPr/>
+          <p:nvPr/>
+        </p:nvSpPr>
+        <p:spPr>
+          <a:xfrm>
+            <a:off x="365760" y="3273552"/>
+            <a:ext cx="1371600" cy="658368"/>
           </a:xfrm>
           <a:prstGeom prst="rect">
             <a:avLst>
-              <a:gd name="adj" fmla="val 25000"/>
+              <a:gd name="adj" fmla="val 8333"/>
             </a:avLst>
           </a:prstGeom>
           <a:solidFill>
-            <a:srgbClr val="FCE7F3"/>
-          </a:solidFill>
-          <a:ln w="19050">
-            <a:solidFill>
-              <a:srgbClr val="DB2777"/>
-            </a:solidFill>
-            <a:prstDash val="solid"/>
-          </a:ln>
-          <a:effectLst>
-            <a:outerShdw sx="100000" sy="100000" kx="0" ky="0" algn="bl" rotWithShape="0" blurRad="101600" dist="38100" dir="8100000">
-              <a:srgbClr val="000000">
-                <a:alpha val="12000"/>
-              </a:srgbClr>
-            </a:outerShdw>
-          </a:effectLst>
-        </p:spPr>
-      </p:sp>
-      <p:sp>
-        <p:nvSpPr>
-          <p:cNvPr id="23" name="Text 21"/>
-          <p:cNvSpPr/>
-          <p:nvPr/>
-        </p:nvSpPr>
-        <p:spPr>
-          <a:xfrm>
-            <a:off x="6519672" y="2258568"/>
-            <a:ext cx="1828800" cy="292608"/>
-          </a:xfrm>
-          <a:prstGeom prst="rect">
-            <a:avLst/>
-          </a:prstGeom>
-          <a:noFill/>
-          <a:ln/>
-        </p:spPr>
-        <p:txBody>
-          <a:bodyPr wrap="square" lIns="0" tIns="0" rIns="0" bIns="0" rtlCol="0" anchor="ctr"/>
-          <a:lstStyle/>
-          <a:p>
-            <a:pPr algn="ctr" indent="0" marL="0">
-              <a:buNone/>
-            </a:pPr>
-            <a:r>
-              <a:rPr lang="en-US" sz="1300" b="1" dirty="0">
-                <a:solidFill>
-                  <a:srgbClr val="9D174D"/>
+            <a:srgbClr val="E2E8F0"/>
+          </a:solidFill>
+          <a:ln w="12700">
+            <a:solidFill>
+              <a:srgbClr val="E2E8F0"/>
+            </a:solidFill>
+            <a:prstDash val="solid"/>
+          </a:ln>
+        </p:spPr>
+      </p:sp>
+      <p:sp>
+        <p:nvSpPr>
+          <p:cNvPr id="24" name="Text 22"/>
+          <p:cNvSpPr/>
+          <p:nvPr/>
+        </p:nvSpPr>
+        <p:spPr>
+          <a:xfrm>
+            <a:off x="365760" y="3273552"/>
+            <a:ext cx="1371600" cy="658368"/>
+          </a:xfrm>
+          <a:prstGeom prst="rect">
+            <a:avLst/>
+          </a:prstGeom>
+          <a:noFill/>
+          <a:ln/>
+        </p:spPr>
+        <p:txBody>
+          <a:bodyPr wrap="square" lIns="0" tIns="0" rIns="0" bIns="0" rtlCol="0" anchor="ctr"/>
+          <a:lstStyle/>
+          <a:p>
+            <a:pPr algn="ctr" indent="0" marL="0">
+              <a:buNone/>
+            </a:pPr>
+            <a:r>
+              <a:rPr lang="en-US" sz="1100" b="1" dirty="0">
+                <a:solidFill>
+                  <a:srgbClr val="475569"/>
                 </a:solidFill>
                 <a:latin typeface="Trebuchet MS" pitchFamily="34" charset="0"/>
                 <a:ea typeface="Trebuchet MS" pitchFamily="34" charset="-122"/>
                 <a:cs typeface="Trebuchet MS" pitchFamily="34" charset="-120"/>
               </a:rPr>
-              <a:t>ily</a:t>
-            </a:r>
-            <a:endParaRPr lang="en-US" sz="1300" dirty="0"/>
-          </a:p>
-        </p:txBody>
-      </p:sp>
-      <p:sp>
-        <p:nvSpPr>
-          <p:cNvPr id="24" name="Text 22"/>
-          <p:cNvSpPr/>
-          <p:nvPr/>
-        </p:nvSpPr>
-        <p:spPr>
-          <a:xfrm>
-            <a:off x="6519672" y="2569464"/>
-            <a:ext cx="1828800" cy="201168"/>
-          </a:xfrm>
-          <a:prstGeom prst="rect">
-            <a:avLst/>
-          </a:prstGeom>
-          <a:noFill/>
-          <a:ln/>
-        </p:spPr>
-        <p:txBody>
-          <a:bodyPr wrap="square" lIns="0" tIns="0" rIns="0" bIns="0" rtlCol="0" anchor="t"/>
-          <a:lstStyle/>
-          <a:p>
-            <a:pPr algn="ctr" indent="0" marL="0">
-              <a:buNone/>
-            </a:pPr>
-            <a:r>
-              <a:rPr lang="en-US" sz="850" dirty="0">
-                <a:solidFill>
-                  <a:srgbClr val="475569"/>
-                </a:solidFill>
-                <a:latin typeface="Calibri" pitchFamily="34" charset="0"/>
-                <a:ea typeface="Calibri" pitchFamily="34" charset="-122"/>
-                <a:cs typeface="Calibri" pitchFamily="34" charset="-120"/>
-              </a:rPr>
-              <a:t>in a certain way</a:t>
-            </a:r>
-            <a:endParaRPr lang="en-US" sz="850" dirty="0"/>
-          </a:p>
-        </p:txBody>
-      </p:sp>
-      <p:sp>
-        <p:nvSpPr>
-          <p:cNvPr id="25" name="Text 23"/>
-          <p:cNvSpPr/>
-          <p:nvPr/>
-        </p:nvSpPr>
-        <p:spPr>
-          <a:xfrm>
-            <a:off x="6519672" y="2752344"/>
-            <a:ext cx="1828800" cy="182880"/>
-          </a:xfrm>
-          <a:prstGeom prst="rect">
-            <a:avLst/>
-          </a:prstGeom>
-          <a:noFill/>
-          <a:ln/>
-        </p:spPr>
-        <p:txBody>
-          <a:bodyPr wrap="square" lIns="0" tIns="0" rIns="0" bIns="0" rtlCol="0" anchor="t"/>
-          <a:lstStyle/>
-          <a:p>
-            <a:pPr algn="ctr" indent="0" marL="0">
-              <a:buNone/>
-            </a:pPr>
-            <a:r>
-              <a:rPr lang="en-US" sz="700" i="1" dirty="0">
-                <a:solidFill>
-                  <a:srgbClr val="94A3B8"/>
-                </a:solidFill>
-                <a:latin typeface="Calibri" pitchFamily="34" charset="0"/>
-                <a:ea typeface="Calibri" pitchFamily="34" charset="-122"/>
-                <a:cs typeface="Calibri" pitchFamily="34" charset="-120"/>
-              </a:rPr>
-              <a:t>'y' changes to 'i' before '-ly'</a:t>
-            </a:r>
-            <a:endParaRPr lang="en-US" sz="700" dirty="0"/>
-          </a:p>
-        </p:txBody>
-      </p:sp>
-      <p:sp>
-        <p:nvSpPr>
-          <p:cNvPr id="26" name="Shape 24"/>
-          <p:cNvSpPr/>
-          <p:nvPr/>
-        </p:nvSpPr>
-        <p:spPr>
-          <a:xfrm>
-            <a:off x="365760" y="3273552"/>
-            <a:ext cx="1371600" cy="658368"/>
+              <a:t>Syllables</a:t>
+            </a:r>
+            <a:endParaRPr lang="en-US" sz="1100" dirty="0"/>
+          </a:p>
+        </p:txBody>
+      </p:sp>
+      <p:sp>
+        <p:nvSpPr>
+          <p:cNvPr id="25" name="Shape 23"/>
+          <p:cNvSpPr/>
+          <p:nvPr/>
+        </p:nvSpPr>
+        <p:spPr>
+          <a:xfrm>
+            <a:off x="1874520" y="3273552"/>
+            <a:ext cx="6903720" cy="658368"/>
           </a:xfrm>
           <a:prstGeom prst="rect">
             <a:avLst>
@@ -27135,11 +26977,38 @@
             </a:avLst>
           </a:prstGeom>
           <a:solidFill>
-            <a:srgbClr val="E2E8F0"/>
-          </a:solidFill>
-          <a:ln w="12700">
-            <a:solidFill>
-              <a:srgbClr val="E2E8F0"/>
+            <a:srgbClr val="CCFBF1"/>
+          </a:solidFill>
+          <a:ln w="12700">
+            <a:solidFill>
+              <a:srgbClr val="0D9488"/>
+            </a:solidFill>
+            <a:prstDash val="solid"/>
+          </a:ln>
+        </p:spPr>
+      </p:sp>
+      <p:sp>
+        <p:nvSpPr>
+          <p:cNvPr id="26" name="Shape 24"/>
+          <p:cNvSpPr/>
+          <p:nvPr/>
+        </p:nvSpPr>
+        <p:spPr>
+          <a:xfrm>
+            <a:off x="2313432" y="3364992"/>
+            <a:ext cx="1645920" cy="475488"/>
+          </a:xfrm>
+          <a:prstGeom prst="rect">
+            <a:avLst>
+              <a:gd name="adj" fmla="val 9615"/>
+            </a:avLst>
+          </a:prstGeom>
+          <a:solidFill>
+            <a:srgbClr val="FFFFFF"/>
+          </a:solidFill>
+          <a:ln w="12700">
+            <a:solidFill>
+              <a:srgbClr val="0D9488"/>
             </a:solidFill>
             <a:prstDash val="solid"/>
           </a:ln>
@@ -27153,63 +27022,75 @@
         </p:nvSpPr>
         <p:spPr>
           <a:xfrm>
-            <a:off x="365760" y="3273552"/>
-            <a:ext cx="1371600" cy="658368"/>
-          </a:xfrm>
-          <a:prstGeom prst="rect">
-            <a:avLst/>
-          </a:prstGeom>
-          <a:noFill/>
-          <a:ln/>
-        </p:spPr>
-        <p:txBody>
-          <a:bodyPr wrap="square" lIns="0" tIns="0" rIns="0" bIns="0" rtlCol="0" anchor="ctr"/>
-          <a:lstStyle/>
-          <a:p>
-            <a:pPr algn="ctr" indent="0" marL="0">
-              <a:buNone/>
-            </a:pPr>
-            <a:r>
-              <a:rPr lang="en-US" sz="1100" b="1" dirty="0">
-                <a:solidFill>
-                  <a:srgbClr val="475569"/>
+            <a:off x="2313432" y="3364992"/>
+            <a:ext cx="1645920" cy="475488"/>
+          </a:xfrm>
+          <a:prstGeom prst="rect">
+            <a:avLst/>
+          </a:prstGeom>
+          <a:noFill/>
+          <a:ln/>
+        </p:spPr>
+        <p:txBody>
+          <a:bodyPr wrap="square" lIns="0" tIns="0" rIns="0" bIns="0" rtlCol="0" anchor="ctr"/>
+          <a:lstStyle/>
+          <a:p>
+            <a:pPr algn="ctr" indent="0" marL="0">
+              <a:buNone/>
+            </a:pPr>
+            <a:r>
+              <a:rPr lang="en-US" sz="1400" b="1" dirty="0">
+                <a:solidFill>
+                  <a:srgbClr val="0D9488"/>
                 </a:solidFill>
                 <a:latin typeface="Trebuchet MS" pitchFamily="34" charset="0"/>
                 <a:ea typeface="Trebuchet MS" pitchFamily="34" charset="-122"/>
                 <a:cs typeface="Trebuchet MS" pitchFamily="34" charset="-120"/>
               </a:rPr>
-              <a:t>Syllables</a:t>
-            </a:r>
-            <a:endParaRPr lang="en-US" sz="1100" dirty="0"/>
-          </a:p>
-        </p:txBody>
-      </p:sp>
-      <p:sp>
-        <p:nvSpPr>
-          <p:cNvPr id="28" name="Shape 26"/>
-          <p:cNvSpPr/>
-          <p:nvPr/>
-        </p:nvSpPr>
-        <p:spPr>
-          <a:xfrm>
-            <a:off x="1874520" y="3273552"/>
-            <a:ext cx="6903720" cy="658368"/>
-          </a:xfrm>
-          <a:prstGeom prst="rect">
-            <a:avLst>
-              <a:gd name="adj" fmla="val 8333"/>
-            </a:avLst>
-          </a:prstGeom>
-          <a:solidFill>
-            <a:srgbClr val="CCFBF1"/>
-          </a:solidFill>
-          <a:ln w="12700">
-            <a:solidFill>
-              <a:srgbClr val="0D9488"/>
-            </a:solidFill>
-            <a:prstDash val="solid"/>
-          </a:ln>
-        </p:spPr>
+              <a:t>hap</a:t>
+            </a:r>
+            <a:endParaRPr lang="en-US" sz="1400" dirty="0"/>
+          </a:p>
+        </p:txBody>
+      </p:sp>
+      <p:sp>
+        <p:nvSpPr>
+          <p:cNvPr id="28" name="Text 26"/>
+          <p:cNvSpPr/>
+          <p:nvPr/>
+        </p:nvSpPr>
+        <p:spPr>
+          <a:xfrm>
+            <a:off x="3959352" y="3364992"/>
+            <a:ext cx="411480" cy="475488"/>
+          </a:xfrm>
+          <a:prstGeom prst="rect">
+            <a:avLst/>
+          </a:prstGeom>
+          <a:noFill/>
+          <a:ln/>
+        </p:spPr>
+        <p:txBody>
+          <a:bodyPr wrap="square" lIns="0" tIns="0" rIns="0" bIns="0" rtlCol="0" anchor="ctr"/>
+          <a:lstStyle/>
+          <a:p>
+            <a:pPr algn="ctr" indent="0" marL="0">
+              <a:buNone/>
+            </a:pPr>
+            <a:r>
+              <a:rPr lang="en-US" sz="1600" b="1" dirty="0">
+                <a:solidFill>
+                  <a:srgbClr val="0D9488"/>
+                </a:solidFill>
+                <a:latin typeface="Trebuchet MS" pitchFamily="34" charset="0"/>
+                <a:ea typeface="Trebuchet MS" pitchFamily="34" charset="-122"/>
+                <a:cs typeface="Trebuchet MS" pitchFamily="34" charset="-120"/>
+              </a:rPr>
+              <a:t>·</a:t>
+            </a:r>
+            <a:endParaRPr lang="en-US" sz="1600" dirty="0"/>
+          </a:p>
+        </p:txBody>
       </p:sp>
       <p:sp>
         <p:nvSpPr>
@@ -27219,8 +27100,8 @@
         </p:nvSpPr>
         <p:spPr>
           <a:xfrm>
-            <a:off x="1975104" y="3364992"/>
-            <a:ext cx="1554480" cy="475488"/>
+            <a:off x="4370832" y="3364992"/>
+            <a:ext cx="1645920" cy="475488"/>
           </a:xfrm>
           <a:prstGeom prst="rect">
             <a:avLst>
@@ -27246,8 +27127,8 @@
         </p:nvSpPr>
         <p:spPr>
           <a:xfrm>
-            <a:off x="1975104" y="3364992"/>
-            <a:ext cx="1554480" cy="475488"/>
+            <a:off x="4370832" y="3364992"/>
+            <a:ext cx="1645920" cy="475488"/>
           </a:xfrm>
           <a:prstGeom prst="rect">
             <a:avLst/>
@@ -27271,7 +27152,7 @@
                 <a:ea typeface="Trebuchet MS" pitchFamily="34" charset="-122"/>
                 <a:cs typeface="Trebuchet MS" pitchFamily="34" charset="-120"/>
               </a:rPr>
-              <a:t>un</a:t>
+              <a:t>pi</a:t>
             </a:r>
             <a:endParaRPr lang="en-US" sz="1400" dirty="0"/>
           </a:p>
@@ -27285,8 +27166,8 @@
         </p:nvSpPr>
         <p:spPr>
           <a:xfrm>
-            <a:off x="3529584" y="3364992"/>
-            <a:ext cx="73152" cy="475488"/>
+            <a:off x="6016752" y="3364992"/>
+            <a:ext cx="411480" cy="475488"/>
           </a:xfrm>
           <a:prstGeom prst="rect">
             <a:avLst/>
@@ -27324,8 +27205,8 @@
         </p:nvSpPr>
         <p:spPr>
           <a:xfrm>
-            <a:off x="3602736" y="3364992"/>
-            <a:ext cx="1554480" cy="475488"/>
+            <a:off x="6428232" y="3364992"/>
+            <a:ext cx="1645920" cy="475488"/>
           </a:xfrm>
           <a:prstGeom prst="rect">
             <a:avLst>
@@ -27351,8 +27232,8 @@
         </p:nvSpPr>
         <p:spPr>
           <a:xfrm>
-            <a:off x="3602736" y="3364992"/>
-            <a:ext cx="1554480" cy="475488"/>
+            <a:off x="6428232" y="3364992"/>
+            <a:ext cx="1645920" cy="475488"/>
           </a:xfrm>
           <a:prstGeom prst="rect">
             <a:avLst/>
@@ -27376,7 +27257,7 @@
                 <a:ea typeface="Trebuchet MS" pitchFamily="34" charset="-122"/>
                 <a:cs typeface="Trebuchet MS" pitchFamily="34" charset="-120"/>
               </a:rPr>
-              <a:t>hap</a:t>
+              <a:t>er</a:t>
             </a:r>
             <a:endParaRPr lang="en-US" sz="1400" dirty="0"/>
           </a:p>
@@ -27384,224 +27265,80 @@
       </p:sp>
       <p:sp>
         <p:nvSpPr>
-          <p:cNvPr id="34" name="Text 32"/>
-          <p:cNvSpPr/>
-          <p:nvPr/>
-        </p:nvSpPr>
-        <p:spPr>
-          <a:xfrm>
-            <a:off x="5157216" y="3364992"/>
-            <a:ext cx="73152" cy="475488"/>
-          </a:xfrm>
-          <a:prstGeom prst="rect">
-            <a:avLst/>
-          </a:prstGeom>
-          <a:noFill/>
-          <a:ln/>
-        </p:spPr>
-        <p:txBody>
-          <a:bodyPr wrap="square" lIns="0" tIns="0" rIns="0" bIns="0" rtlCol="0" anchor="ctr"/>
-          <a:lstStyle/>
-          <a:p>
-            <a:pPr algn="ctr" indent="0" marL="0">
-              <a:buNone/>
-            </a:pPr>
-            <a:r>
-              <a:rPr lang="en-US" sz="1600" b="1" dirty="0">
-                <a:solidFill>
-                  <a:srgbClr val="0D9488"/>
+          <p:cNvPr id="34" name="Shape 32"/>
+          <p:cNvSpPr/>
+          <p:nvPr/>
+        </p:nvSpPr>
+        <p:spPr>
+          <a:xfrm>
+            <a:off x="365760" y="4096512"/>
+            <a:ext cx="1371600" cy="804672"/>
+          </a:xfrm>
+          <a:prstGeom prst="rect">
+            <a:avLst>
+              <a:gd name="adj" fmla="val 6818"/>
+            </a:avLst>
+          </a:prstGeom>
+          <a:solidFill>
+            <a:srgbClr val="E2E8F0"/>
+          </a:solidFill>
+          <a:ln w="12700">
+            <a:solidFill>
+              <a:srgbClr val="E2E8F0"/>
+            </a:solidFill>
+            <a:prstDash val="solid"/>
+          </a:ln>
+        </p:spPr>
+      </p:sp>
+      <p:sp>
+        <p:nvSpPr>
+          <p:cNvPr id="35" name="Text 33"/>
+          <p:cNvSpPr/>
+          <p:nvPr/>
+        </p:nvSpPr>
+        <p:spPr>
+          <a:xfrm>
+            <a:off x="365760" y="4096512"/>
+            <a:ext cx="1371600" cy="804672"/>
+          </a:xfrm>
+          <a:prstGeom prst="rect">
+            <a:avLst/>
+          </a:prstGeom>
+          <a:noFill/>
+          <a:ln/>
+        </p:spPr>
+        <p:txBody>
+          <a:bodyPr wrap="square" lIns="0" tIns="0" rIns="0" bIns="0" rtlCol="0" anchor="ctr"/>
+          <a:lstStyle/>
+          <a:p>
+            <a:pPr algn="ctr" indent="0" marL="0">
+              <a:buNone/>
+            </a:pPr>
+            <a:r>
+              <a:rPr lang="en-US" sz="1100" b="1" dirty="0">
+                <a:solidFill>
+                  <a:srgbClr val="475569"/>
                 </a:solidFill>
                 <a:latin typeface="Trebuchet MS" pitchFamily="34" charset="0"/>
                 <a:ea typeface="Trebuchet MS" pitchFamily="34" charset="-122"/>
                 <a:cs typeface="Trebuchet MS" pitchFamily="34" charset="-120"/>
               </a:rPr>
-              <a:t>·</a:t>
-            </a:r>
-            <a:endParaRPr lang="en-US" sz="1600" dirty="0"/>
-          </a:p>
-        </p:txBody>
-      </p:sp>
-      <p:sp>
-        <p:nvSpPr>
-          <p:cNvPr id="35" name="Shape 33"/>
-          <p:cNvSpPr/>
-          <p:nvPr/>
-        </p:nvSpPr>
-        <p:spPr>
-          <a:xfrm>
-            <a:off x="5230368" y="3364992"/>
-            <a:ext cx="1554480" cy="475488"/>
-          </a:xfrm>
-          <a:prstGeom prst="rect">
-            <a:avLst>
-              <a:gd name="adj" fmla="val 9615"/>
-            </a:avLst>
-          </a:prstGeom>
-          <a:solidFill>
-            <a:srgbClr val="FFFFFF"/>
-          </a:solidFill>
-          <a:ln w="12700">
-            <a:solidFill>
-              <a:srgbClr val="0D9488"/>
-            </a:solidFill>
-            <a:prstDash val="solid"/>
-          </a:ln>
-        </p:spPr>
-      </p:sp>
-      <p:sp>
-        <p:nvSpPr>
-          <p:cNvPr id="36" name="Text 34"/>
-          <p:cNvSpPr/>
-          <p:nvPr/>
-        </p:nvSpPr>
-        <p:spPr>
-          <a:xfrm>
-            <a:off x="5230368" y="3364992"/>
-            <a:ext cx="1554480" cy="475488"/>
-          </a:xfrm>
-          <a:prstGeom prst="rect">
-            <a:avLst/>
-          </a:prstGeom>
-          <a:noFill/>
-          <a:ln/>
-        </p:spPr>
-        <p:txBody>
-          <a:bodyPr wrap="square" lIns="0" tIns="0" rIns="0" bIns="0" rtlCol="0" anchor="ctr"/>
-          <a:lstStyle/>
-          <a:p>
-            <a:pPr algn="ctr" indent="0" marL="0">
-              <a:buNone/>
-            </a:pPr>
-            <a:r>
-              <a:rPr lang="en-US" sz="1400" b="1" dirty="0">
-                <a:solidFill>
-                  <a:srgbClr val="0D9488"/>
-                </a:solidFill>
-                <a:latin typeface="Trebuchet MS" pitchFamily="34" charset="0"/>
-                <a:ea typeface="Trebuchet MS" pitchFamily="34" charset="-122"/>
-                <a:cs typeface="Trebuchet MS" pitchFamily="34" charset="-120"/>
-              </a:rPr>
-              <a:t>pi</a:t>
-            </a:r>
-            <a:endParaRPr lang="en-US" sz="1400" dirty="0"/>
-          </a:p>
-        </p:txBody>
-      </p:sp>
-      <p:sp>
-        <p:nvSpPr>
-          <p:cNvPr id="37" name="Text 35"/>
-          <p:cNvSpPr/>
-          <p:nvPr/>
-        </p:nvSpPr>
-        <p:spPr>
-          <a:xfrm>
-            <a:off x="6784848" y="3364992"/>
-            <a:ext cx="73152" cy="475488"/>
-          </a:xfrm>
-          <a:prstGeom prst="rect">
-            <a:avLst/>
-          </a:prstGeom>
-          <a:noFill/>
-          <a:ln/>
-        </p:spPr>
-        <p:txBody>
-          <a:bodyPr wrap="square" lIns="0" tIns="0" rIns="0" bIns="0" rtlCol="0" anchor="ctr"/>
-          <a:lstStyle/>
-          <a:p>
-            <a:pPr algn="ctr" indent="0" marL="0">
-              <a:buNone/>
-            </a:pPr>
-            <a:r>
-              <a:rPr lang="en-US" sz="1600" b="1" dirty="0">
-                <a:solidFill>
-                  <a:srgbClr val="0D9488"/>
-                </a:solidFill>
-                <a:latin typeface="Trebuchet MS" pitchFamily="34" charset="0"/>
-                <a:ea typeface="Trebuchet MS" pitchFamily="34" charset="-122"/>
-                <a:cs typeface="Trebuchet MS" pitchFamily="34" charset="-120"/>
-              </a:rPr>
-              <a:t>·</a:t>
-            </a:r>
-            <a:endParaRPr lang="en-US" sz="1600" dirty="0"/>
-          </a:p>
-        </p:txBody>
-      </p:sp>
-      <p:sp>
-        <p:nvSpPr>
-          <p:cNvPr id="38" name="Shape 36"/>
-          <p:cNvSpPr/>
-          <p:nvPr/>
-        </p:nvSpPr>
-        <p:spPr>
-          <a:xfrm>
-            <a:off x="6858000" y="3364992"/>
-            <a:ext cx="1554480" cy="475488"/>
-          </a:xfrm>
-          <a:prstGeom prst="rect">
-            <a:avLst>
-              <a:gd name="adj" fmla="val 9615"/>
-            </a:avLst>
-          </a:prstGeom>
-          <a:solidFill>
-            <a:srgbClr val="FFFFFF"/>
-          </a:solidFill>
-          <a:ln w="12700">
-            <a:solidFill>
-              <a:srgbClr val="0D9488"/>
-            </a:solidFill>
-            <a:prstDash val="solid"/>
-          </a:ln>
-        </p:spPr>
-      </p:sp>
-      <p:sp>
-        <p:nvSpPr>
-          <p:cNvPr id="39" name="Text 37"/>
-          <p:cNvSpPr/>
-          <p:nvPr/>
-        </p:nvSpPr>
-        <p:spPr>
-          <a:xfrm>
-            <a:off x="6858000" y="3364992"/>
-            <a:ext cx="1554480" cy="475488"/>
-          </a:xfrm>
-          <a:prstGeom prst="rect">
-            <a:avLst/>
-          </a:prstGeom>
-          <a:noFill/>
-          <a:ln/>
-        </p:spPr>
-        <p:txBody>
-          <a:bodyPr wrap="square" lIns="0" tIns="0" rIns="0" bIns="0" rtlCol="0" anchor="ctr"/>
-          <a:lstStyle/>
-          <a:p>
-            <a:pPr algn="ctr" indent="0" marL="0">
-              <a:buNone/>
-            </a:pPr>
-            <a:r>
-              <a:rPr lang="en-US" sz="1400" b="1" dirty="0">
-                <a:solidFill>
-                  <a:srgbClr val="0D9488"/>
-                </a:solidFill>
-                <a:latin typeface="Trebuchet MS" pitchFamily="34" charset="0"/>
-                <a:ea typeface="Trebuchet MS" pitchFamily="34" charset="-122"/>
-                <a:cs typeface="Trebuchet MS" pitchFamily="34" charset="-120"/>
-              </a:rPr>
-              <a:t>ly</a:t>
-            </a:r>
-            <a:endParaRPr lang="en-US" sz="1400" dirty="0"/>
-          </a:p>
-        </p:txBody>
-      </p:sp>
-      <p:sp>
-        <p:nvSpPr>
-          <p:cNvPr id="40" name="Shape 38"/>
-          <p:cNvSpPr/>
-          <p:nvPr/>
-        </p:nvSpPr>
-        <p:spPr>
-          <a:xfrm>
-            <a:off x="365760" y="4096512"/>
-            <a:ext cx="1371600" cy="804672"/>
+              <a:t>Phonemes</a:t>
+            </a:r>
+            <a:endParaRPr lang="en-US" sz="1100" dirty="0"/>
+          </a:p>
+        </p:txBody>
+      </p:sp>
+      <p:sp>
+        <p:nvSpPr>
+          <p:cNvPr id="36" name="Shape 34"/>
+          <p:cNvSpPr/>
+          <p:nvPr/>
+        </p:nvSpPr>
+        <p:spPr>
+          <a:xfrm>
+            <a:off x="1874520" y="4096512"/>
+            <a:ext cx="6903720" cy="804672"/>
           </a:xfrm>
           <a:prstGeom prst="rect">
             <a:avLst>
@@ -27609,85 +27346,19 @@
             </a:avLst>
           </a:prstGeom>
           <a:solidFill>
-            <a:srgbClr val="E2E8F0"/>
+            <a:srgbClr val="F8FAFC"/>
           </a:solidFill>
           <a:ln w="12700">
             <a:solidFill>
               <a:srgbClr val="E2E8F0"/>
             </a:solidFill>
-            <a:prstDash val="solid"/>
-          </a:ln>
-        </p:spPr>
-      </p:sp>
-      <p:sp>
-        <p:nvSpPr>
-          <p:cNvPr id="41" name="Text 39"/>
-          <p:cNvSpPr/>
-          <p:nvPr/>
-        </p:nvSpPr>
-        <p:spPr>
-          <a:xfrm>
-            <a:off x="365760" y="4096512"/>
-            <a:ext cx="1371600" cy="804672"/>
-          </a:xfrm>
-          <a:prstGeom prst="rect">
-            <a:avLst/>
-          </a:prstGeom>
-          <a:noFill/>
-          <a:ln/>
-        </p:spPr>
-        <p:txBody>
-          <a:bodyPr wrap="square" lIns="0" tIns="0" rIns="0" bIns="0" rtlCol="0" anchor="ctr"/>
-          <a:lstStyle/>
-          <a:p>
-            <a:pPr algn="ctr" indent="0" marL="0">
-              <a:buNone/>
-            </a:pPr>
-            <a:r>
-              <a:rPr lang="en-US" sz="1100" b="1" dirty="0">
-                <a:solidFill>
-                  <a:srgbClr val="475569"/>
-                </a:solidFill>
-                <a:latin typeface="Trebuchet MS" pitchFamily="34" charset="0"/>
-                <a:ea typeface="Trebuchet MS" pitchFamily="34" charset="-122"/>
-                <a:cs typeface="Trebuchet MS" pitchFamily="34" charset="-120"/>
-              </a:rPr>
-              <a:t>Phonemes</a:t>
-            </a:r>
-            <a:endParaRPr lang="en-US" sz="1100" dirty="0"/>
-          </a:p>
-        </p:txBody>
-      </p:sp>
-      <p:sp>
-        <p:nvSpPr>
-          <p:cNvPr id="42" name="Shape 40"/>
-          <p:cNvSpPr/>
-          <p:nvPr/>
-        </p:nvSpPr>
-        <p:spPr>
-          <a:xfrm>
-            <a:off x="1874520" y="4096512"/>
-            <a:ext cx="6903720" cy="804672"/>
-          </a:xfrm>
-          <a:prstGeom prst="rect">
-            <a:avLst>
-              <a:gd name="adj" fmla="val 6818"/>
-            </a:avLst>
-          </a:prstGeom>
-          <a:solidFill>
-            <a:srgbClr val="F8FAFC"/>
-          </a:solidFill>
-          <a:ln w="12700">
-            <a:solidFill>
-              <a:srgbClr val="E2E8F0"/>
-            </a:solidFill>
             <a:prstDash val="dash"/>
           </a:ln>
         </p:spPr>
       </p:sp>
       <p:sp>
         <p:nvSpPr>
-          <p:cNvPr id="43" name="Text 41"/>
+          <p:cNvPr id="37" name="Text 35"/>
           <p:cNvSpPr/>
           <p:nvPr/>
         </p:nvSpPr>
@@ -28010,7 +27681,7 @@
                 <a:ea typeface="Calibri" pitchFamily="34" charset="-122"/>
                 <a:cs typeface="Calibri" pitchFamily="34" charset="-120"/>
               </a:rPr>
-              <a:t>Word Labs  •  wordlabs.app  •  Root: 'happy' = feeling or showing pleasure</a:t>
+              <a:t>Word Labs  •  wordlabs.app  •  Root: 'happy' = feeling pleased or joyful</a:t>
             </a:r>
             <a:endParaRPr lang="en-US" sz="800" dirty="0"/>
           </a:p>
@@ -28149,7 +27820,7 @@
                 <a:ea typeface="Trebuchet MS" pitchFamily="34" charset="-122"/>
                 <a:cs typeface="Trebuchet MS" pitchFamily="34" charset="-120"/>
               </a:rPr>
-              <a:t>unhappily</a:t>
+              <a:t>happier</a:t>
             </a:r>
             <a:endParaRPr lang="en-US" sz="2800" dirty="0"/>
           </a:p>
@@ -28229,7 +27900,7 @@
         </p:nvSpPr>
         <p:spPr>
           <a:xfrm>
-            <a:off x="2221992" y="2258568"/>
+            <a:off x="2938272" y="2258568"/>
             <a:ext cx="1828800" cy="292608"/>
           </a:xfrm>
           <a:prstGeom prst="rect">
@@ -28238,11 +27909,11 @@
             </a:avLst>
           </a:prstGeom>
           <a:solidFill>
-            <a:srgbClr val="DDD6FE"/>
+            <a:srgbClr val="CCFBF1"/>
           </a:solidFill>
           <a:ln w="19050">
             <a:solidFill>
-              <a:srgbClr val="7C3AED"/>
+              <a:srgbClr val="0D9488"/>
             </a:solidFill>
             <a:prstDash val="solid"/>
           </a:ln>
@@ -28263,7 +27934,7 @@
         </p:nvSpPr>
         <p:spPr>
           <a:xfrm>
-            <a:off x="2221992" y="2258568"/>
+            <a:off x="2938272" y="2258568"/>
             <a:ext cx="1828800" cy="292608"/>
           </a:xfrm>
           <a:prstGeom prst="rect">
@@ -28282,13 +27953,13 @@
             <a:r>
               <a:rPr lang="en-US" sz="1300" b="1" dirty="0">
                 <a:solidFill>
-                  <a:srgbClr val="4C1D95"/>
+                  <a:srgbClr val="0F766E"/>
                 </a:solidFill>
                 <a:latin typeface="Trebuchet MS" pitchFamily="34" charset="0"/>
                 <a:ea typeface="Trebuchet MS" pitchFamily="34" charset="-122"/>
                 <a:cs typeface="Trebuchet MS" pitchFamily="34" charset="-120"/>
               </a:rPr>
-              <a:t>un</a:t>
+              <a:t>happy</a:t>
             </a:r>
             <a:endParaRPr lang="en-US" sz="1300" dirty="0"/>
           </a:p>
@@ -28302,7 +27973,7 @@
         </p:nvSpPr>
         <p:spPr>
           <a:xfrm>
-            <a:off x="2221992" y="2569464"/>
+            <a:off x="2938272" y="2569464"/>
             <a:ext cx="1828800" cy="201168"/>
           </a:xfrm>
           <a:prstGeom prst="rect">
@@ -28327,7 +27998,7 @@
                 <a:ea typeface="Calibri" pitchFamily="34" charset="-122"/>
                 <a:cs typeface="Calibri" pitchFamily="34" charset="-120"/>
               </a:rPr>
-              <a:t>not</a:t>
+              <a:t>feeling pleased or joyful</a:t>
             </a:r>
             <a:endParaRPr lang="en-US" sz="850" dirty="0"/>
           </a:p>
@@ -28341,7 +28012,7 @@
         </p:nvSpPr>
         <p:spPr>
           <a:xfrm>
-            <a:off x="4370832" y="2258568"/>
+            <a:off x="5803392" y="2258568"/>
             <a:ext cx="1828800" cy="292608"/>
           </a:xfrm>
           <a:prstGeom prst="rect">
@@ -28350,11 +28021,11 @@
             </a:avLst>
           </a:prstGeom>
           <a:solidFill>
-            <a:srgbClr val="CCFBF1"/>
+            <a:srgbClr val="FCE7F3"/>
           </a:solidFill>
           <a:ln w="19050">
             <a:solidFill>
-              <a:srgbClr val="0D9488"/>
+              <a:srgbClr val="DB2777"/>
             </a:solidFill>
             <a:prstDash val="solid"/>
           </a:ln>
@@ -28375,7 +28046,7 @@
         </p:nvSpPr>
         <p:spPr>
           <a:xfrm>
-            <a:off x="4370832" y="2258568"/>
+            <a:off x="5803392" y="2258568"/>
             <a:ext cx="1828800" cy="292608"/>
           </a:xfrm>
           <a:prstGeom prst="rect">
@@ -28394,13 +28065,13 @@
             <a:r>
               <a:rPr lang="en-US" sz="1300" b="1" dirty="0">
                 <a:solidFill>
-                  <a:srgbClr val="0F766E"/>
+                  <a:srgbClr val="9D174D"/>
                 </a:solidFill>
                 <a:latin typeface="Trebuchet MS" pitchFamily="34" charset="0"/>
                 <a:ea typeface="Trebuchet MS" pitchFamily="34" charset="-122"/>
                 <a:cs typeface="Trebuchet MS" pitchFamily="34" charset="-120"/>
               </a:rPr>
-              <a:t>happy</a:t>
+              <a:t>ier</a:t>
             </a:r>
             <a:endParaRPr lang="en-US" sz="1300" dirty="0"/>
           </a:p>
@@ -28414,7 +28085,7 @@
         </p:nvSpPr>
         <p:spPr>
           <a:xfrm>
-            <a:off x="4370832" y="2569464"/>
+            <a:off x="5803392" y="2569464"/>
             <a:ext cx="1828800" cy="201168"/>
           </a:xfrm>
           <a:prstGeom prst="rect">
@@ -28439,7 +28110,7 @@
                 <a:ea typeface="Calibri" pitchFamily="34" charset="-122"/>
                 <a:cs typeface="Calibri" pitchFamily="34" charset="-120"/>
               </a:rPr>
-              <a:t>feeling pleasure or joy</a:t>
+              <a:t>more</a:t>
             </a:r>
             <a:endParaRPr lang="en-US" sz="850" dirty="0"/>
           </a:p>
@@ -28447,165 +28118,119 @@
       </p:sp>
       <p:sp>
         <p:nvSpPr>
-          <p:cNvPr id="22" name="Shape 20"/>
-          <p:cNvSpPr/>
-          <p:nvPr/>
-        </p:nvSpPr>
-        <p:spPr>
-          <a:xfrm>
-            <a:off x="6519672" y="2258568"/>
-            <a:ext cx="1828800" cy="292608"/>
+          <p:cNvPr id="22" name="Text 20"/>
+          <p:cNvSpPr/>
+          <p:nvPr/>
+        </p:nvSpPr>
+        <p:spPr>
+          <a:xfrm>
+            <a:off x="5803392" y="2752344"/>
+            <a:ext cx="1828800" cy="182880"/>
+          </a:xfrm>
+          <a:prstGeom prst="rect">
+            <a:avLst/>
+          </a:prstGeom>
+          <a:noFill/>
+          <a:ln/>
+        </p:spPr>
+        <p:txBody>
+          <a:bodyPr wrap="square" lIns="0" tIns="0" rIns="0" bIns="0" rtlCol="0" anchor="t"/>
+          <a:lstStyle/>
+          <a:p>
+            <a:pPr algn="ctr" indent="0" marL="0">
+              <a:buNone/>
+            </a:pPr>
+            <a:r>
+              <a:rPr lang="en-US" sz="700" i="1" dirty="0">
+                <a:solidFill>
+                  <a:srgbClr val="94A3B8"/>
+                </a:solidFill>
+                <a:latin typeface="Calibri" pitchFamily="34" charset="0"/>
+                <a:ea typeface="Calibri" pitchFamily="34" charset="-122"/>
+                <a:cs typeface="Calibri" pitchFamily="34" charset="-120"/>
+              </a:rPr>
+              <a:t>y → i before suffix -er</a:t>
+            </a:r>
+            <a:endParaRPr lang="en-US" sz="700" dirty="0"/>
+          </a:p>
+        </p:txBody>
+      </p:sp>
+      <p:sp>
+        <p:nvSpPr>
+          <p:cNvPr id="23" name="Shape 21"/>
+          <p:cNvSpPr/>
+          <p:nvPr/>
+        </p:nvSpPr>
+        <p:spPr>
+          <a:xfrm>
+            <a:off x="365760" y="3273552"/>
+            <a:ext cx="1371600" cy="658368"/>
           </a:xfrm>
           <a:prstGeom prst="rect">
             <a:avLst>
-              <a:gd name="adj" fmla="val 25000"/>
+              <a:gd name="adj" fmla="val 8333"/>
             </a:avLst>
           </a:prstGeom>
           <a:solidFill>
-            <a:srgbClr val="FCE7F3"/>
-          </a:solidFill>
-          <a:ln w="19050">
-            <a:solidFill>
-              <a:srgbClr val="DB2777"/>
-            </a:solidFill>
-            <a:prstDash val="solid"/>
-          </a:ln>
-          <a:effectLst>
-            <a:outerShdw sx="100000" sy="100000" kx="0" ky="0" algn="bl" rotWithShape="0" blurRad="101600" dist="38100" dir="8100000">
-              <a:srgbClr val="000000">
-                <a:alpha val="12000"/>
-              </a:srgbClr>
-            </a:outerShdw>
-          </a:effectLst>
-        </p:spPr>
-      </p:sp>
-      <p:sp>
-        <p:nvSpPr>
-          <p:cNvPr id="23" name="Text 21"/>
-          <p:cNvSpPr/>
-          <p:nvPr/>
-        </p:nvSpPr>
-        <p:spPr>
-          <a:xfrm>
-            <a:off x="6519672" y="2258568"/>
-            <a:ext cx="1828800" cy="292608"/>
-          </a:xfrm>
-          <a:prstGeom prst="rect">
-            <a:avLst/>
-          </a:prstGeom>
-          <a:noFill/>
-          <a:ln/>
-        </p:spPr>
-        <p:txBody>
-          <a:bodyPr wrap="square" lIns="0" tIns="0" rIns="0" bIns="0" rtlCol="0" anchor="ctr"/>
-          <a:lstStyle/>
-          <a:p>
-            <a:pPr algn="ctr" indent="0" marL="0">
-              <a:buNone/>
-            </a:pPr>
-            <a:r>
-              <a:rPr lang="en-US" sz="1300" b="1" dirty="0">
-                <a:solidFill>
-                  <a:srgbClr val="9D174D"/>
+            <a:srgbClr val="E2E8F0"/>
+          </a:solidFill>
+          <a:ln w="12700">
+            <a:solidFill>
+              <a:srgbClr val="E2E8F0"/>
+            </a:solidFill>
+            <a:prstDash val="solid"/>
+          </a:ln>
+        </p:spPr>
+      </p:sp>
+      <p:sp>
+        <p:nvSpPr>
+          <p:cNvPr id="24" name="Text 22"/>
+          <p:cNvSpPr/>
+          <p:nvPr/>
+        </p:nvSpPr>
+        <p:spPr>
+          <a:xfrm>
+            <a:off x="365760" y="3273552"/>
+            <a:ext cx="1371600" cy="658368"/>
+          </a:xfrm>
+          <a:prstGeom prst="rect">
+            <a:avLst/>
+          </a:prstGeom>
+          <a:noFill/>
+          <a:ln/>
+        </p:spPr>
+        <p:txBody>
+          <a:bodyPr wrap="square" lIns="0" tIns="0" rIns="0" bIns="0" rtlCol="0" anchor="ctr"/>
+          <a:lstStyle/>
+          <a:p>
+            <a:pPr algn="ctr" indent="0" marL="0">
+              <a:buNone/>
+            </a:pPr>
+            <a:r>
+              <a:rPr lang="en-US" sz="1100" b="1" dirty="0">
+                <a:solidFill>
+                  <a:srgbClr val="475569"/>
                 </a:solidFill>
                 <a:latin typeface="Trebuchet MS" pitchFamily="34" charset="0"/>
                 <a:ea typeface="Trebuchet MS" pitchFamily="34" charset="-122"/>
                 <a:cs typeface="Trebuchet MS" pitchFamily="34" charset="-120"/>
               </a:rPr>
-              <a:t>ily</a:t>
-            </a:r>
-            <a:endParaRPr lang="en-US" sz="1300" dirty="0"/>
-          </a:p>
-        </p:txBody>
-      </p:sp>
-      <p:sp>
-        <p:nvSpPr>
-          <p:cNvPr id="24" name="Text 22"/>
-          <p:cNvSpPr/>
-          <p:nvPr/>
-        </p:nvSpPr>
-        <p:spPr>
-          <a:xfrm>
-            <a:off x="6519672" y="2569464"/>
-            <a:ext cx="1828800" cy="201168"/>
-          </a:xfrm>
-          <a:prstGeom prst="rect">
-            <a:avLst/>
-          </a:prstGeom>
-          <a:noFill/>
-          <a:ln/>
-        </p:spPr>
-        <p:txBody>
-          <a:bodyPr wrap="square" lIns="0" tIns="0" rIns="0" bIns="0" rtlCol="0" anchor="t"/>
-          <a:lstStyle/>
-          <a:p>
-            <a:pPr algn="ctr" indent="0" marL="0">
-              <a:buNone/>
-            </a:pPr>
-            <a:r>
-              <a:rPr lang="en-US" sz="850" dirty="0">
-                <a:solidFill>
-                  <a:srgbClr val="475569"/>
-                </a:solidFill>
-                <a:latin typeface="Calibri" pitchFamily="34" charset="0"/>
-                <a:ea typeface="Calibri" pitchFamily="34" charset="-122"/>
-                <a:cs typeface="Calibri" pitchFamily="34" charset="-120"/>
-              </a:rPr>
-              <a:t>in a certain way</a:t>
-            </a:r>
-            <a:endParaRPr lang="en-US" sz="850" dirty="0"/>
-          </a:p>
-        </p:txBody>
-      </p:sp>
-      <p:sp>
-        <p:nvSpPr>
-          <p:cNvPr id="25" name="Text 23"/>
-          <p:cNvSpPr/>
-          <p:nvPr/>
-        </p:nvSpPr>
-        <p:spPr>
-          <a:xfrm>
-            <a:off x="6519672" y="2752344"/>
-            <a:ext cx="1828800" cy="182880"/>
-          </a:xfrm>
-          <a:prstGeom prst="rect">
-            <a:avLst/>
-          </a:prstGeom>
-          <a:noFill/>
-          <a:ln/>
-        </p:spPr>
-        <p:txBody>
-          <a:bodyPr wrap="square" lIns="0" tIns="0" rIns="0" bIns="0" rtlCol="0" anchor="t"/>
-          <a:lstStyle/>
-          <a:p>
-            <a:pPr algn="ctr" indent="0" marL="0">
-              <a:buNone/>
-            </a:pPr>
-            <a:r>
-              <a:rPr lang="en-US" sz="700" i="1" dirty="0">
-                <a:solidFill>
-                  <a:srgbClr val="94A3B8"/>
-                </a:solidFill>
-                <a:latin typeface="Calibri" pitchFamily="34" charset="0"/>
-                <a:ea typeface="Calibri" pitchFamily="34" charset="-122"/>
-                <a:cs typeface="Calibri" pitchFamily="34" charset="-120"/>
-              </a:rPr>
-              <a:t>'y' changes to 'i' before '-ly'</a:t>
-            </a:r>
-            <a:endParaRPr lang="en-US" sz="700" dirty="0"/>
-          </a:p>
-        </p:txBody>
-      </p:sp>
-      <p:sp>
-        <p:nvSpPr>
-          <p:cNvPr id="26" name="Shape 24"/>
-          <p:cNvSpPr/>
-          <p:nvPr/>
-        </p:nvSpPr>
-        <p:spPr>
-          <a:xfrm>
-            <a:off x="365760" y="3273552"/>
-            <a:ext cx="1371600" cy="658368"/>
+              <a:t>Syllables</a:t>
+            </a:r>
+            <a:endParaRPr lang="en-US" sz="1100" dirty="0"/>
+          </a:p>
+        </p:txBody>
+      </p:sp>
+      <p:sp>
+        <p:nvSpPr>
+          <p:cNvPr id="25" name="Shape 23"/>
+          <p:cNvSpPr/>
+          <p:nvPr/>
+        </p:nvSpPr>
+        <p:spPr>
+          <a:xfrm>
+            <a:off x="1874520" y="3273552"/>
+            <a:ext cx="6903720" cy="658368"/>
           </a:xfrm>
           <a:prstGeom prst="rect">
             <a:avLst>
@@ -28613,11 +28238,38 @@
             </a:avLst>
           </a:prstGeom>
           <a:solidFill>
-            <a:srgbClr val="E2E8F0"/>
-          </a:solidFill>
-          <a:ln w="12700">
-            <a:solidFill>
-              <a:srgbClr val="E2E8F0"/>
+            <a:srgbClr val="CCFBF1"/>
+          </a:solidFill>
+          <a:ln w="12700">
+            <a:solidFill>
+              <a:srgbClr val="0D9488"/>
+            </a:solidFill>
+            <a:prstDash val="solid"/>
+          </a:ln>
+        </p:spPr>
+      </p:sp>
+      <p:sp>
+        <p:nvSpPr>
+          <p:cNvPr id="26" name="Shape 24"/>
+          <p:cNvSpPr/>
+          <p:nvPr/>
+        </p:nvSpPr>
+        <p:spPr>
+          <a:xfrm>
+            <a:off x="2313432" y="3364992"/>
+            <a:ext cx="1645920" cy="475488"/>
+          </a:xfrm>
+          <a:prstGeom prst="rect">
+            <a:avLst>
+              <a:gd name="adj" fmla="val 9615"/>
+            </a:avLst>
+          </a:prstGeom>
+          <a:solidFill>
+            <a:srgbClr val="FFFFFF"/>
+          </a:solidFill>
+          <a:ln w="12700">
+            <a:solidFill>
+              <a:srgbClr val="0D9488"/>
             </a:solidFill>
             <a:prstDash val="solid"/>
           </a:ln>
@@ -28631,32 +28283,308 @@
         </p:nvSpPr>
         <p:spPr>
           <a:xfrm>
-            <a:off x="365760" y="3273552"/>
-            <a:ext cx="1371600" cy="658368"/>
-          </a:xfrm>
-          <a:prstGeom prst="rect">
-            <a:avLst/>
-          </a:prstGeom>
-          <a:noFill/>
-          <a:ln/>
-        </p:spPr>
-        <p:txBody>
-          <a:bodyPr wrap="square" lIns="0" tIns="0" rIns="0" bIns="0" rtlCol="0" anchor="ctr"/>
-          <a:lstStyle/>
-          <a:p>
-            <a:pPr algn="ctr" indent="0" marL="0">
-              <a:buNone/>
-            </a:pPr>
-            <a:r>
-              <a:rPr lang="en-US" sz="1100" b="1" dirty="0">
-                <a:solidFill>
-                  <a:srgbClr val="475569"/>
+            <a:off x="2313432" y="3364992"/>
+            <a:ext cx="1645920" cy="475488"/>
+          </a:xfrm>
+          <a:prstGeom prst="rect">
+            <a:avLst/>
+          </a:prstGeom>
+          <a:noFill/>
+          <a:ln/>
+        </p:spPr>
+        <p:txBody>
+          <a:bodyPr wrap="square" lIns="0" tIns="0" rIns="0" bIns="0" rtlCol="0" anchor="ctr"/>
+          <a:lstStyle/>
+          <a:p>
+            <a:pPr algn="ctr" indent="0" marL="0">
+              <a:buNone/>
+            </a:pPr>
+            <a:r>
+              <a:rPr lang="en-US" sz="1400" b="1" dirty="0">
+                <a:solidFill>
+                  <a:srgbClr val="0D9488"/>
                 </a:solidFill>
                 <a:latin typeface="Trebuchet MS" pitchFamily="34" charset="0"/>
                 <a:ea typeface="Trebuchet MS" pitchFamily="34" charset="-122"/>
                 <a:cs typeface="Trebuchet MS" pitchFamily="34" charset="-120"/>
               </a:rPr>
-              <a:t>Syllables</a:t>
+              <a:t>hap</a:t>
+            </a:r>
+            <a:endParaRPr lang="en-US" sz="1400" dirty="0"/>
+          </a:p>
+        </p:txBody>
+      </p:sp>
+      <p:sp>
+        <p:nvSpPr>
+          <p:cNvPr id="28" name="Text 26"/>
+          <p:cNvSpPr/>
+          <p:nvPr/>
+        </p:nvSpPr>
+        <p:spPr>
+          <a:xfrm>
+            <a:off x="3959352" y="3364992"/>
+            <a:ext cx="411480" cy="475488"/>
+          </a:xfrm>
+          <a:prstGeom prst="rect">
+            <a:avLst/>
+          </a:prstGeom>
+          <a:noFill/>
+          <a:ln/>
+        </p:spPr>
+        <p:txBody>
+          <a:bodyPr wrap="square" lIns="0" tIns="0" rIns="0" bIns="0" rtlCol="0" anchor="ctr"/>
+          <a:lstStyle/>
+          <a:p>
+            <a:pPr algn="ctr" indent="0" marL="0">
+              <a:buNone/>
+            </a:pPr>
+            <a:r>
+              <a:rPr lang="en-US" sz="1600" b="1" dirty="0">
+                <a:solidFill>
+                  <a:srgbClr val="0D9488"/>
+                </a:solidFill>
+                <a:latin typeface="Trebuchet MS" pitchFamily="34" charset="0"/>
+                <a:ea typeface="Trebuchet MS" pitchFamily="34" charset="-122"/>
+                <a:cs typeface="Trebuchet MS" pitchFamily="34" charset="-120"/>
+              </a:rPr>
+              <a:t>·</a:t>
+            </a:r>
+            <a:endParaRPr lang="en-US" sz="1600" dirty="0"/>
+          </a:p>
+        </p:txBody>
+      </p:sp>
+      <p:sp>
+        <p:nvSpPr>
+          <p:cNvPr id="29" name="Shape 27"/>
+          <p:cNvSpPr/>
+          <p:nvPr/>
+        </p:nvSpPr>
+        <p:spPr>
+          <a:xfrm>
+            <a:off x="4370832" y="3364992"/>
+            <a:ext cx="1645920" cy="475488"/>
+          </a:xfrm>
+          <a:prstGeom prst="rect">
+            <a:avLst>
+              <a:gd name="adj" fmla="val 9615"/>
+            </a:avLst>
+          </a:prstGeom>
+          <a:solidFill>
+            <a:srgbClr val="FFFFFF"/>
+          </a:solidFill>
+          <a:ln w="12700">
+            <a:solidFill>
+              <a:srgbClr val="0D9488"/>
+            </a:solidFill>
+            <a:prstDash val="solid"/>
+          </a:ln>
+        </p:spPr>
+      </p:sp>
+      <p:sp>
+        <p:nvSpPr>
+          <p:cNvPr id="30" name="Text 28"/>
+          <p:cNvSpPr/>
+          <p:nvPr/>
+        </p:nvSpPr>
+        <p:spPr>
+          <a:xfrm>
+            <a:off x="4370832" y="3364992"/>
+            <a:ext cx="1645920" cy="475488"/>
+          </a:xfrm>
+          <a:prstGeom prst="rect">
+            <a:avLst/>
+          </a:prstGeom>
+          <a:noFill/>
+          <a:ln/>
+        </p:spPr>
+        <p:txBody>
+          <a:bodyPr wrap="square" lIns="0" tIns="0" rIns="0" bIns="0" rtlCol="0" anchor="ctr"/>
+          <a:lstStyle/>
+          <a:p>
+            <a:pPr algn="ctr" indent="0" marL="0">
+              <a:buNone/>
+            </a:pPr>
+            <a:r>
+              <a:rPr lang="en-US" sz="1400" b="1" dirty="0">
+                <a:solidFill>
+                  <a:srgbClr val="0D9488"/>
+                </a:solidFill>
+                <a:latin typeface="Trebuchet MS" pitchFamily="34" charset="0"/>
+                <a:ea typeface="Trebuchet MS" pitchFamily="34" charset="-122"/>
+                <a:cs typeface="Trebuchet MS" pitchFamily="34" charset="-120"/>
+              </a:rPr>
+              <a:t>pi</a:t>
+            </a:r>
+            <a:endParaRPr lang="en-US" sz="1400" dirty="0"/>
+          </a:p>
+        </p:txBody>
+      </p:sp>
+      <p:sp>
+        <p:nvSpPr>
+          <p:cNvPr id="31" name="Text 29"/>
+          <p:cNvSpPr/>
+          <p:nvPr/>
+        </p:nvSpPr>
+        <p:spPr>
+          <a:xfrm>
+            <a:off x="6016752" y="3364992"/>
+            <a:ext cx="411480" cy="475488"/>
+          </a:xfrm>
+          <a:prstGeom prst="rect">
+            <a:avLst/>
+          </a:prstGeom>
+          <a:noFill/>
+          <a:ln/>
+        </p:spPr>
+        <p:txBody>
+          <a:bodyPr wrap="square" lIns="0" tIns="0" rIns="0" bIns="0" rtlCol="0" anchor="ctr"/>
+          <a:lstStyle/>
+          <a:p>
+            <a:pPr algn="ctr" indent="0" marL="0">
+              <a:buNone/>
+            </a:pPr>
+            <a:r>
+              <a:rPr lang="en-US" sz="1600" b="1" dirty="0">
+                <a:solidFill>
+                  <a:srgbClr val="0D9488"/>
+                </a:solidFill>
+                <a:latin typeface="Trebuchet MS" pitchFamily="34" charset="0"/>
+                <a:ea typeface="Trebuchet MS" pitchFamily="34" charset="-122"/>
+                <a:cs typeface="Trebuchet MS" pitchFamily="34" charset="-120"/>
+              </a:rPr>
+              <a:t>·</a:t>
+            </a:r>
+            <a:endParaRPr lang="en-US" sz="1600" dirty="0"/>
+          </a:p>
+        </p:txBody>
+      </p:sp>
+      <p:sp>
+        <p:nvSpPr>
+          <p:cNvPr id="32" name="Shape 30"/>
+          <p:cNvSpPr/>
+          <p:nvPr/>
+        </p:nvSpPr>
+        <p:spPr>
+          <a:xfrm>
+            <a:off x="6428232" y="3364992"/>
+            <a:ext cx="1645920" cy="475488"/>
+          </a:xfrm>
+          <a:prstGeom prst="rect">
+            <a:avLst>
+              <a:gd name="adj" fmla="val 9615"/>
+            </a:avLst>
+          </a:prstGeom>
+          <a:solidFill>
+            <a:srgbClr val="FFFFFF"/>
+          </a:solidFill>
+          <a:ln w="12700">
+            <a:solidFill>
+              <a:srgbClr val="0D9488"/>
+            </a:solidFill>
+            <a:prstDash val="solid"/>
+          </a:ln>
+        </p:spPr>
+      </p:sp>
+      <p:sp>
+        <p:nvSpPr>
+          <p:cNvPr id="33" name="Text 31"/>
+          <p:cNvSpPr/>
+          <p:nvPr/>
+        </p:nvSpPr>
+        <p:spPr>
+          <a:xfrm>
+            <a:off x="6428232" y="3364992"/>
+            <a:ext cx="1645920" cy="475488"/>
+          </a:xfrm>
+          <a:prstGeom prst="rect">
+            <a:avLst/>
+          </a:prstGeom>
+          <a:noFill/>
+          <a:ln/>
+        </p:spPr>
+        <p:txBody>
+          <a:bodyPr wrap="square" lIns="0" tIns="0" rIns="0" bIns="0" rtlCol="0" anchor="ctr"/>
+          <a:lstStyle/>
+          <a:p>
+            <a:pPr algn="ctr" indent="0" marL="0">
+              <a:buNone/>
+            </a:pPr>
+            <a:r>
+              <a:rPr lang="en-US" sz="1400" b="1" dirty="0">
+                <a:solidFill>
+                  <a:srgbClr val="0D9488"/>
+                </a:solidFill>
+                <a:latin typeface="Trebuchet MS" pitchFamily="34" charset="0"/>
+                <a:ea typeface="Trebuchet MS" pitchFamily="34" charset="-122"/>
+                <a:cs typeface="Trebuchet MS" pitchFamily="34" charset="-120"/>
+              </a:rPr>
+              <a:t>er</a:t>
+            </a:r>
+            <a:endParaRPr lang="en-US" sz="1400" dirty="0"/>
+          </a:p>
+        </p:txBody>
+      </p:sp>
+      <p:sp>
+        <p:nvSpPr>
+          <p:cNvPr id="34" name="Shape 32"/>
+          <p:cNvSpPr/>
+          <p:nvPr/>
+        </p:nvSpPr>
+        <p:spPr>
+          <a:xfrm>
+            <a:off x="365760" y="4096512"/>
+            <a:ext cx="1371600" cy="804672"/>
+          </a:xfrm>
+          <a:prstGeom prst="rect">
+            <a:avLst>
+              <a:gd name="adj" fmla="val 6818"/>
+            </a:avLst>
+          </a:prstGeom>
+          <a:solidFill>
+            <a:srgbClr val="E2E8F0"/>
+          </a:solidFill>
+          <a:ln w="12700">
+            <a:solidFill>
+              <a:srgbClr val="E2E8F0"/>
+            </a:solidFill>
+            <a:prstDash val="solid"/>
+          </a:ln>
+        </p:spPr>
+      </p:sp>
+      <p:sp>
+        <p:nvSpPr>
+          <p:cNvPr id="35" name="Text 33"/>
+          <p:cNvSpPr/>
+          <p:nvPr/>
+        </p:nvSpPr>
+        <p:spPr>
+          <a:xfrm>
+            <a:off x="365760" y="4096512"/>
+            <a:ext cx="1371600" cy="804672"/>
+          </a:xfrm>
+          <a:prstGeom prst="rect">
+            <a:avLst/>
+          </a:prstGeom>
+          <a:noFill/>
+          <a:ln/>
+        </p:spPr>
+        <p:txBody>
+          <a:bodyPr wrap="square" lIns="0" tIns="0" rIns="0" bIns="0" rtlCol="0" anchor="ctr"/>
+          <a:lstStyle/>
+          <a:p>
+            <a:pPr algn="ctr" indent="0" marL="0">
+              <a:buNone/>
+            </a:pPr>
+            <a:r>
+              <a:rPr lang="en-US" sz="1100" b="1" dirty="0">
+                <a:solidFill>
+                  <a:srgbClr val="475569"/>
+                </a:solidFill>
+                <a:latin typeface="Trebuchet MS" pitchFamily="34" charset="0"/>
+                <a:ea typeface="Trebuchet MS" pitchFamily="34" charset="-122"/>
+                <a:cs typeface="Trebuchet MS" pitchFamily="34" charset="-120"/>
+              </a:rPr>
+              <a:t>Phonemes</a:t>
             </a:r>
             <a:endParaRPr lang="en-US" sz="1100" dirty="0"/>
           </a:p>
@@ -28664,13 +28592,13 @@
       </p:sp>
       <p:sp>
         <p:nvSpPr>
-          <p:cNvPr id="28" name="Shape 26"/>
-          <p:cNvSpPr/>
-          <p:nvPr/>
-        </p:nvSpPr>
-        <p:spPr>
-          <a:xfrm>
-            <a:off x="1874520" y="3273552"/>
+          <p:cNvPr id="36" name="Shape 34"/>
+          <p:cNvSpPr/>
+          <p:nvPr/>
+        </p:nvSpPr>
+        <p:spPr>
+          <a:xfrm>
+            <a:off x="1874520" y="4096512"/>
             <a:ext cx="6903720" cy="658368"/>
           </a:xfrm>
           <a:prstGeom prst="rect">
@@ -28679,30 +28607,30 @@
             </a:avLst>
           </a:prstGeom>
           <a:solidFill>
-            <a:srgbClr val="CCFBF1"/>
-          </a:solidFill>
-          <a:ln w="12700">
-            <a:solidFill>
-              <a:srgbClr val="0D9488"/>
-            </a:solidFill>
-            <a:prstDash val="solid"/>
-          </a:ln>
-        </p:spPr>
-      </p:sp>
-      <p:sp>
-        <p:nvSpPr>
-          <p:cNvPr id="29" name="Shape 27"/>
-          <p:cNvSpPr/>
-          <p:nvPr/>
-        </p:nvSpPr>
-        <p:spPr>
-          <a:xfrm>
-            <a:off x="1975104" y="3364992"/>
-            <a:ext cx="1554480" cy="475488"/>
+            <a:srgbClr val="FCE7F3"/>
+          </a:solidFill>
+          <a:ln w="12700">
+            <a:solidFill>
+              <a:srgbClr val="DB2777"/>
+            </a:solidFill>
+            <a:prstDash val="solid"/>
+          </a:ln>
+        </p:spPr>
+      </p:sp>
+      <p:sp>
+        <p:nvSpPr>
+          <p:cNvPr id="37" name="Shape 35"/>
+          <p:cNvSpPr/>
+          <p:nvPr/>
+        </p:nvSpPr>
+        <p:spPr>
+          <a:xfrm>
+            <a:off x="2427732" y="4169664"/>
+            <a:ext cx="685800" cy="475488"/>
           </a:xfrm>
           <a:prstGeom prst="rect">
             <a:avLst>
-              <a:gd name="adj" fmla="val 9615"/>
+              <a:gd name="adj" fmla="val 7692"/>
             </a:avLst>
           </a:prstGeom>
           <a:solidFill>
@@ -28710,104 +28638,131 @@
           </a:solidFill>
           <a:ln w="12700">
             <a:solidFill>
-              <a:srgbClr val="0D9488"/>
-            </a:solidFill>
-            <a:prstDash val="solid"/>
-          </a:ln>
-        </p:spPr>
-      </p:sp>
-      <p:sp>
-        <p:nvSpPr>
-          <p:cNvPr id="30" name="Text 28"/>
-          <p:cNvSpPr/>
-          <p:nvPr/>
-        </p:nvSpPr>
-        <p:spPr>
-          <a:xfrm>
-            <a:off x="1975104" y="3364992"/>
-            <a:ext cx="1554480" cy="475488"/>
-          </a:xfrm>
-          <a:prstGeom prst="rect">
-            <a:avLst/>
-          </a:prstGeom>
-          <a:noFill/>
-          <a:ln/>
-        </p:spPr>
-        <p:txBody>
-          <a:bodyPr wrap="square" lIns="0" tIns="0" rIns="0" bIns="0" rtlCol="0" anchor="ctr"/>
-          <a:lstStyle/>
-          <a:p>
-            <a:pPr algn="ctr" indent="0" marL="0">
-              <a:buNone/>
-            </a:pPr>
-            <a:r>
-              <a:rPr lang="en-US" sz="1400" b="1" dirty="0">
-                <a:solidFill>
-                  <a:srgbClr val="0D9488"/>
+              <a:srgbClr val="DB2777"/>
+            </a:solidFill>
+            <a:prstDash val="solid"/>
+          </a:ln>
+        </p:spPr>
+      </p:sp>
+      <p:sp>
+        <p:nvSpPr>
+          <p:cNvPr id="38" name="Text 36"/>
+          <p:cNvSpPr/>
+          <p:nvPr/>
+        </p:nvSpPr>
+        <p:spPr>
+          <a:xfrm>
+            <a:off x="2427732" y="4169664"/>
+            <a:ext cx="685800" cy="475488"/>
+          </a:xfrm>
+          <a:prstGeom prst="rect">
+            <a:avLst/>
+          </a:prstGeom>
+          <a:noFill/>
+          <a:ln/>
+        </p:spPr>
+        <p:txBody>
+          <a:bodyPr wrap="square" lIns="0" tIns="0" rIns="0" bIns="0" rtlCol="0" anchor="ctr"/>
+          <a:lstStyle/>
+          <a:p>
+            <a:pPr algn="ctr" indent="0" marL="0">
+              <a:buNone/>
+            </a:pPr>
+            <a:r>
+              <a:rPr lang="en-US" sz="900" b="1" dirty="0">
+                <a:solidFill>
+                  <a:srgbClr val="9D174D"/>
                 </a:solidFill>
                 <a:latin typeface="Trebuchet MS" pitchFamily="34" charset="0"/>
                 <a:ea typeface="Trebuchet MS" pitchFamily="34" charset="-122"/>
                 <a:cs typeface="Trebuchet MS" pitchFamily="34" charset="-120"/>
               </a:rPr>
-              <a:t>un</a:t>
-            </a:r>
-            <a:endParaRPr lang="en-US" sz="1400" dirty="0"/>
-          </a:p>
-        </p:txBody>
-      </p:sp>
-      <p:sp>
-        <p:nvSpPr>
-          <p:cNvPr id="31" name="Text 29"/>
-          <p:cNvSpPr/>
-          <p:nvPr/>
-        </p:nvSpPr>
-        <p:spPr>
-          <a:xfrm>
-            <a:off x="3529584" y="3364992"/>
-            <a:ext cx="73152" cy="475488"/>
-          </a:xfrm>
-          <a:prstGeom prst="rect">
-            <a:avLst/>
-          </a:prstGeom>
-          <a:noFill/>
-          <a:ln/>
-        </p:spPr>
-        <p:txBody>
-          <a:bodyPr wrap="square" lIns="0" tIns="0" rIns="0" bIns="0" rtlCol="0" anchor="ctr"/>
-          <a:lstStyle/>
-          <a:p>
-            <a:pPr algn="ctr" indent="0" marL="0">
-              <a:buNone/>
-            </a:pPr>
-            <a:r>
-              <a:rPr lang="en-US" sz="1600" b="1" dirty="0">
-                <a:solidFill>
-                  <a:srgbClr val="0D9488"/>
+              <a:t>h</a:t>
+            </a:r>
+            <a:endParaRPr lang="en-US" sz="900" dirty="0"/>
+          </a:p>
+        </p:txBody>
+      </p:sp>
+      <p:sp>
+        <p:nvSpPr>
+          <p:cNvPr id="39" name="Shape 37"/>
+          <p:cNvSpPr/>
+          <p:nvPr/>
+        </p:nvSpPr>
+        <p:spPr>
+          <a:xfrm>
+            <a:off x="3639312" y="4169664"/>
+            <a:ext cx="685800" cy="475488"/>
+          </a:xfrm>
+          <a:prstGeom prst="rect">
+            <a:avLst>
+              <a:gd name="adj" fmla="val 7692"/>
+            </a:avLst>
+          </a:prstGeom>
+          <a:solidFill>
+            <a:srgbClr val="FFFFFF"/>
+          </a:solidFill>
+          <a:ln w="12700">
+            <a:solidFill>
+              <a:srgbClr val="DB2777"/>
+            </a:solidFill>
+            <a:prstDash val="solid"/>
+          </a:ln>
+        </p:spPr>
+      </p:sp>
+      <p:sp>
+        <p:nvSpPr>
+          <p:cNvPr id="40" name="Text 38"/>
+          <p:cNvSpPr/>
+          <p:nvPr/>
+        </p:nvSpPr>
+        <p:spPr>
+          <a:xfrm>
+            <a:off x="3639312" y="4169664"/>
+            <a:ext cx="685800" cy="475488"/>
+          </a:xfrm>
+          <a:prstGeom prst="rect">
+            <a:avLst/>
+          </a:prstGeom>
+          <a:noFill/>
+          <a:ln/>
+        </p:spPr>
+        <p:txBody>
+          <a:bodyPr wrap="square" lIns="0" tIns="0" rIns="0" bIns="0" rtlCol="0" anchor="ctr"/>
+          <a:lstStyle/>
+          <a:p>
+            <a:pPr algn="ctr" indent="0" marL="0">
+              <a:buNone/>
+            </a:pPr>
+            <a:r>
+              <a:rPr lang="en-US" sz="900" b="1" dirty="0">
+                <a:solidFill>
+                  <a:srgbClr val="9D174D"/>
                 </a:solidFill>
                 <a:latin typeface="Trebuchet MS" pitchFamily="34" charset="0"/>
                 <a:ea typeface="Trebuchet MS" pitchFamily="34" charset="-122"/>
                 <a:cs typeface="Trebuchet MS" pitchFamily="34" charset="-120"/>
               </a:rPr>
-              <a:t>·</a:t>
-            </a:r>
-            <a:endParaRPr lang="en-US" sz="1600" dirty="0"/>
-          </a:p>
-        </p:txBody>
-      </p:sp>
-      <p:sp>
-        <p:nvSpPr>
-          <p:cNvPr id="32" name="Shape 30"/>
-          <p:cNvSpPr/>
-          <p:nvPr/>
-        </p:nvSpPr>
-        <p:spPr>
-          <a:xfrm>
-            <a:off x="3602736" y="3364992"/>
-            <a:ext cx="1554480" cy="475488"/>
+              <a:t>a</a:t>
+            </a:r>
+            <a:endParaRPr lang="en-US" sz="900" dirty="0"/>
+          </a:p>
+        </p:txBody>
+      </p:sp>
+      <p:sp>
+        <p:nvSpPr>
+          <p:cNvPr id="41" name="Shape 39"/>
+          <p:cNvSpPr/>
+          <p:nvPr/>
+        </p:nvSpPr>
+        <p:spPr>
+          <a:xfrm>
+            <a:off x="4850892" y="4169664"/>
+            <a:ext cx="685800" cy="475488"/>
           </a:xfrm>
           <a:prstGeom prst="rect">
             <a:avLst>
-              <a:gd name="adj" fmla="val 9615"/>
+              <a:gd name="adj" fmla="val 7692"/>
             </a:avLst>
           </a:prstGeom>
           <a:solidFill>
@@ -28815,104 +28770,131 @@
           </a:solidFill>
           <a:ln w="12700">
             <a:solidFill>
-              <a:srgbClr val="0D9488"/>
-            </a:solidFill>
-            <a:prstDash val="solid"/>
-          </a:ln>
-        </p:spPr>
-      </p:sp>
-      <p:sp>
-        <p:nvSpPr>
-          <p:cNvPr id="33" name="Text 31"/>
-          <p:cNvSpPr/>
-          <p:nvPr/>
-        </p:nvSpPr>
-        <p:spPr>
-          <a:xfrm>
-            <a:off x="3602736" y="3364992"/>
-            <a:ext cx="1554480" cy="475488"/>
-          </a:xfrm>
-          <a:prstGeom prst="rect">
-            <a:avLst/>
-          </a:prstGeom>
-          <a:noFill/>
-          <a:ln/>
-        </p:spPr>
-        <p:txBody>
-          <a:bodyPr wrap="square" lIns="0" tIns="0" rIns="0" bIns="0" rtlCol="0" anchor="ctr"/>
-          <a:lstStyle/>
-          <a:p>
-            <a:pPr algn="ctr" indent="0" marL="0">
-              <a:buNone/>
-            </a:pPr>
-            <a:r>
-              <a:rPr lang="en-US" sz="1400" b="1" dirty="0">
-                <a:solidFill>
-                  <a:srgbClr val="0D9488"/>
+              <a:srgbClr val="DB2777"/>
+            </a:solidFill>
+            <a:prstDash val="solid"/>
+          </a:ln>
+        </p:spPr>
+      </p:sp>
+      <p:sp>
+        <p:nvSpPr>
+          <p:cNvPr id="42" name="Text 40"/>
+          <p:cNvSpPr/>
+          <p:nvPr/>
+        </p:nvSpPr>
+        <p:spPr>
+          <a:xfrm>
+            <a:off x="4850892" y="4169664"/>
+            <a:ext cx="685800" cy="475488"/>
+          </a:xfrm>
+          <a:prstGeom prst="rect">
+            <a:avLst/>
+          </a:prstGeom>
+          <a:noFill/>
+          <a:ln/>
+        </p:spPr>
+        <p:txBody>
+          <a:bodyPr wrap="square" lIns="0" tIns="0" rIns="0" bIns="0" rtlCol="0" anchor="ctr"/>
+          <a:lstStyle/>
+          <a:p>
+            <a:pPr algn="ctr" indent="0" marL="0">
+              <a:buNone/>
+            </a:pPr>
+            <a:r>
+              <a:rPr lang="en-US" sz="900" b="1" dirty="0">
+                <a:solidFill>
+                  <a:srgbClr val="9D174D"/>
                 </a:solidFill>
                 <a:latin typeface="Trebuchet MS" pitchFamily="34" charset="0"/>
                 <a:ea typeface="Trebuchet MS" pitchFamily="34" charset="-122"/>
                 <a:cs typeface="Trebuchet MS" pitchFamily="34" charset="-120"/>
               </a:rPr>
-              <a:t>hap</a:t>
-            </a:r>
-            <a:endParaRPr lang="en-US" sz="1400" dirty="0"/>
-          </a:p>
-        </p:txBody>
-      </p:sp>
-      <p:sp>
-        <p:nvSpPr>
-          <p:cNvPr id="34" name="Text 32"/>
-          <p:cNvSpPr/>
-          <p:nvPr/>
-        </p:nvSpPr>
-        <p:spPr>
-          <a:xfrm>
-            <a:off x="5157216" y="3364992"/>
-            <a:ext cx="73152" cy="475488"/>
-          </a:xfrm>
-          <a:prstGeom prst="rect">
-            <a:avLst/>
-          </a:prstGeom>
-          <a:noFill/>
-          <a:ln/>
-        </p:spPr>
-        <p:txBody>
-          <a:bodyPr wrap="square" lIns="0" tIns="0" rIns="0" bIns="0" rtlCol="0" anchor="ctr"/>
-          <a:lstStyle/>
-          <a:p>
-            <a:pPr algn="ctr" indent="0" marL="0">
-              <a:buNone/>
-            </a:pPr>
-            <a:r>
-              <a:rPr lang="en-US" sz="1600" b="1" dirty="0">
-                <a:solidFill>
-                  <a:srgbClr val="0D9488"/>
+              <a:t>pp</a:t>
+            </a:r>
+            <a:endParaRPr lang="en-US" sz="900" dirty="0"/>
+          </a:p>
+        </p:txBody>
+      </p:sp>
+      <p:sp>
+        <p:nvSpPr>
+          <p:cNvPr id="43" name="Shape 41"/>
+          <p:cNvSpPr/>
+          <p:nvPr/>
+        </p:nvSpPr>
+        <p:spPr>
+          <a:xfrm>
+            <a:off x="6062472" y="4169664"/>
+            <a:ext cx="685800" cy="475488"/>
+          </a:xfrm>
+          <a:prstGeom prst="rect">
+            <a:avLst>
+              <a:gd name="adj" fmla="val 7692"/>
+            </a:avLst>
+          </a:prstGeom>
+          <a:solidFill>
+            <a:srgbClr val="FFFFFF"/>
+          </a:solidFill>
+          <a:ln w="12700">
+            <a:solidFill>
+              <a:srgbClr val="DB2777"/>
+            </a:solidFill>
+            <a:prstDash val="solid"/>
+          </a:ln>
+        </p:spPr>
+      </p:sp>
+      <p:sp>
+        <p:nvSpPr>
+          <p:cNvPr id="44" name="Text 42"/>
+          <p:cNvSpPr/>
+          <p:nvPr/>
+        </p:nvSpPr>
+        <p:spPr>
+          <a:xfrm>
+            <a:off x="6062472" y="4169664"/>
+            <a:ext cx="685800" cy="475488"/>
+          </a:xfrm>
+          <a:prstGeom prst="rect">
+            <a:avLst/>
+          </a:prstGeom>
+          <a:noFill/>
+          <a:ln/>
+        </p:spPr>
+        <p:txBody>
+          <a:bodyPr wrap="square" lIns="0" tIns="0" rIns="0" bIns="0" rtlCol="0" anchor="ctr"/>
+          <a:lstStyle/>
+          <a:p>
+            <a:pPr algn="ctr" indent="0" marL="0">
+              <a:buNone/>
+            </a:pPr>
+            <a:r>
+              <a:rPr lang="en-US" sz="900" b="1" dirty="0">
+                <a:solidFill>
+                  <a:srgbClr val="9D174D"/>
                 </a:solidFill>
                 <a:latin typeface="Trebuchet MS" pitchFamily="34" charset="0"/>
                 <a:ea typeface="Trebuchet MS" pitchFamily="34" charset="-122"/>
                 <a:cs typeface="Trebuchet MS" pitchFamily="34" charset="-120"/>
               </a:rPr>
-              <a:t>·</a:t>
-            </a:r>
-            <a:endParaRPr lang="en-US" sz="1600" dirty="0"/>
-          </a:p>
-        </p:txBody>
-      </p:sp>
-      <p:sp>
-        <p:nvSpPr>
-          <p:cNvPr id="35" name="Shape 33"/>
-          <p:cNvSpPr/>
-          <p:nvPr/>
-        </p:nvSpPr>
-        <p:spPr>
-          <a:xfrm>
-            <a:off x="5230368" y="3364992"/>
-            <a:ext cx="1554480" cy="475488"/>
+              <a:t>i</a:t>
+            </a:r>
+            <a:endParaRPr lang="en-US" sz="900" dirty="0"/>
+          </a:p>
+        </p:txBody>
+      </p:sp>
+      <p:sp>
+        <p:nvSpPr>
+          <p:cNvPr id="45" name="Shape 43"/>
+          <p:cNvSpPr/>
+          <p:nvPr/>
+        </p:nvSpPr>
+        <p:spPr>
+          <a:xfrm>
+            <a:off x="7274052" y="4169664"/>
+            <a:ext cx="685800" cy="475488"/>
           </a:xfrm>
           <a:prstGeom prst="rect">
             <a:avLst>
-              <a:gd name="adj" fmla="val 9615"/>
+              <a:gd name="adj" fmla="val 7692"/>
             </a:avLst>
           </a:prstGeom>
           <a:solidFill>
@@ -28920,772 +28902,46 @@
           </a:solidFill>
           <a:ln w="12700">
             <a:solidFill>
-              <a:srgbClr val="0D9488"/>
-            </a:solidFill>
-            <a:prstDash val="solid"/>
-          </a:ln>
-        </p:spPr>
-      </p:sp>
-      <p:sp>
-        <p:nvSpPr>
-          <p:cNvPr id="36" name="Text 34"/>
-          <p:cNvSpPr/>
-          <p:nvPr/>
-        </p:nvSpPr>
-        <p:spPr>
-          <a:xfrm>
-            <a:off x="5230368" y="3364992"/>
-            <a:ext cx="1554480" cy="475488"/>
-          </a:xfrm>
-          <a:prstGeom prst="rect">
-            <a:avLst/>
-          </a:prstGeom>
-          <a:noFill/>
-          <a:ln/>
-        </p:spPr>
-        <p:txBody>
-          <a:bodyPr wrap="square" lIns="0" tIns="0" rIns="0" bIns="0" rtlCol="0" anchor="ctr"/>
-          <a:lstStyle/>
-          <a:p>
-            <a:pPr algn="ctr" indent="0" marL="0">
-              <a:buNone/>
-            </a:pPr>
-            <a:r>
-              <a:rPr lang="en-US" sz="1400" b="1" dirty="0">
-                <a:solidFill>
-                  <a:srgbClr val="0D9488"/>
+              <a:srgbClr val="DB2777"/>
+            </a:solidFill>
+            <a:prstDash val="solid"/>
+          </a:ln>
+        </p:spPr>
+      </p:sp>
+      <p:sp>
+        <p:nvSpPr>
+          <p:cNvPr id="46" name="Text 44"/>
+          <p:cNvSpPr/>
+          <p:nvPr/>
+        </p:nvSpPr>
+        <p:spPr>
+          <a:xfrm>
+            <a:off x="7274052" y="4169664"/>
+            <a:ext cx="685800" cy="475488"/>
+          </a:xfrm>
+          <a:prstGeom prst="rect">
+            <a:avLst/>
+          </a:prstGeom>
+          <a:noFill/>
+          <a:ln/>
+        </p:spPr>
+        <p:txBody>
+          <a:bodyPr wrap="square" lIns="0" tIns="0" rIns="0" bIns="0" rtlCol="0" anchor="ctr"/>
+          <a:lstStyle/>
+          <a:p>
+            <a:pPr algn="ctr" indent="0" marL="0">
+              <a:buNone/>
+            </a:pPr>
+            <a:r>
+              <a:rPr lang="en-US" sz="900" b="1" dirty="0">
+                <a:solidFill>
+                  <a:srgbClr val="9D174D"/>
                 </a:solidFill>
                 <a:latin typeface="Trebuchet MS" pitchFamily="34" charset="0"/>
                 <a:ea typeface="Trebuchet MS" pitchFamily="34" charset="-122"/>
                 <a:cs typeface="Trebuchet MS" pitchFamily="34" charset="-120"/>
               </a:rPr>
-              <a:t>pi</a:t>
-            </a:r>
-            <a:endParaRPr lang="en-US" sz="1400" dirty="0"/>
-          </a:p>
-        </p:txBody>
-      </p:sp>
-      <p:sp>
-        <p:nvSpPr>
-          <p:cNvPr id="37" name="Text 35"/>
-          <p:cNvSpPr/>
-          <p:nvPr/>
-        </p:nvSpPr>
-        <p:spPr>
-          <a:xfrm>
-            <a:off x="6784848" y="3364992"/>
-            <a:ext cx="73152" cy="475488"/>
-          </a:xfrm>
-          <a:prstGeom prst="rect">
-            <a:avLst/>
-          </a:prstGeom>
-          <a:noFill/>
-          <a:ln/>
-        </p:spPr>
-        <p:txBody>
-          <a:bodyPr wrap="square" lIns="0" tIns="0" rIns="0" bIns="0" rtlCol="0" anchor="ctr"/>
-          <a:lstStyle/>
-          <a:p>
-            <a:pPr algn="ctr" indent="0" marL="0">
-              <a:buNone/>
-            </a:pPr>
-            <a:r>
-              <a:rPr lang="en-US" sz="1600" b="1" dirty="0">
-                <a:solidFill>
-                  <a:srgbClr val="0D9488"/>
-                </a:solidFill>
-                <a:latin typeface="Trebuchet MS" pitchFamily="34" charset="0"/>
-                <a:ea typeface="Trebuchet MS" pitchFamily="34" charset="-122"/>
-                <a:cs typeface="Trebuchet MS" pitchFamily="34" charset="-120"/>
-              </a:rPr>
-              <a:t>·</a:t>
-            </a:r>
-            <a:endParaRPr lang="en-US" sz="1600" dirty="0"/>
-          </a:p>
-        </p:txBody>
-      </p:sp>
-      <p:sp>
-        <p:nvSpPr>
-          <p:cNvPr id="38" name="Shape 36"/>
-          <p:cNvSpPr/>
-          <p:nvPr/>
-        </p:nvSpPr>
-        <p:spPr>
-          <a:xfrm>
-            <a:off x="6858000" y="3364992"/>
-            <a:ext cx="1554480" cy="475488"/>
-          </a:xfrm>
-          <a:prstGeom prst="rect">
-            <a:avLst>
-              <a:gd name="adj" fmla="val 9615"/>
-            </a:avLst>
-          </a:prstGeom>
-          <a:solidFill>
-            <a:srgbClr val="FFFFFF"/>
-          </a:solidFill>
-          <a:ln w="12700">
-            <a:solidFill>
-              <a:srgbClr val="0D9488"/>
-            </a:solidFill>
-            <a:prstDash val="solid"/>
-          </a:ln>
-        </p:spPr>
-      </p:sp>
-      <p:sp>
-        <p:nvSpPr>
-          <p:cNvPr id="39" name="Text 37"/>
-          <p:cNvSpPr/>
-          <p:nvPr/>
-        </p:nvSpPr>
-        <p:spPr>
-          <a:xfrm>
-            <a:off x="6858000" y="3364992"/>
-            <a:ext cx="1554480" cy="475488"/>
-          </a:xfrm>
-          <a:prstGeom prst="rect">
-            <a:avLst/>
-          </a:prstGeom>
-          <a:noFill/>
-          <a:ln/>
-        </p:spPr>
-        <p:txBody>
-          <a:bodyPr wrap="square" lIns="0" tIns="0" rIns="0" bIns="0" rtlCol="0" anchor="ctr"/>
-          <a:lstStyle/>
-          <a:p>
-            <a:pPr algn="ctr" indent="0" marL="0">
-              <a:buNone/>
-            </a:pPr>
-            <a:r>
-              <a:rPr lang="en-US" sz="1400" b="1" dirty="0">
-                <a:solidFill>
-                  <a:srgbClr val="0D9488"/>
-                </a:solidFill>
-                <a:latin typeface="Trebuchet MS" pitchFamily="34" charset="0"/>
-                <a:ea typeface="Trebuchet MS" pitchFamily="34" charset="-122"/>
-                <a:cs typeface="Trebuchet MS" pitchFamily="34" charset="-120"/>
-              </a:rPr>
-              <a:t>ly</a:t>
-            </a:r>
-            <a:endParaRPr lang="en-US" sz="1400" dirty="0"/>
-          </a:p>
-        </p:txBody>
-      </p:sp>
-      <p:sp>
-        <p:nvSpPr>
-          <p:cNvPr id="40" name="Shape 38"/>
-          <p:cNvSpPr/>
-          <p:nvPr/>
-        </p:nvSpPr>
-        <p:spPr>
-          <a:xfrm>
-            <a:off x="365760" y="4096512"/>
-            <a:ext cx="1371600" cy="804672"/>
-          </a:xfrm>
-          <a:prstGeom prst="rect">
-            <a:avLst>
-              <a:gd name="adj" fmla="val 6818"/>
-            </a:avLst>
-          </a:prstGeom>
-          <a:solidFill>
-            <a:srgbClr val="E2E8F0"/>
-          </a:solidFill>
-          <a:ln w="12700">
-            <a:solidFill>
-              <a:srgbClr val="E2E8F0"/>
-            </a:solidFill>
-            <a:prstDash val="solid"/>
-          </a:ln>
-        </p:spPr>
-      </p:sp>
-      <p:sp>
-        <p:nvSpPr>
-          <p:cNvPr id="41" name="Text 39"/>
-          <p:cNvSpPr/>
-          <p:nvPr/>
-        </p:nvSpPr>
-        <p:spPr>
-          <a:xfrm>
-            <a:off x="365760" y="4096512"/>
-            <a:ext cx="1371600" cy="804672"/>
-          </a:xfrm>
-          <a:prstGeom prst="rect">
-            <a:avLst/>
-          </a:prstGeom>
-          <a:noFill/>
-          <a:ln/>
-        </p:spPr>
-        <p:txBody>
-          <a:bodyPr wrap="square" lIns="0" tIns="0" rIns="0" bIns="0" rtlCol="0" anchor="ctr"/>
-          <a:lstStyle/>
-          <a:p>
-            <a:pPr algn="ctr" indent="0" marL="0">
-              <a:buNone/>
-            </a:pPr>
-            <a:r>
-              <a:rPr lang="en-US" sz="1100" b="1" dirty="0">
-                <a:solidFill>
-                  <a:srgbClr val="475569"/>
-                </a:solidFill>
-                <a:latin typeface="Trebuchet MS" pitchFamily="34" charset="0"/>
-                <a:ea typeface="Trebuchet MS" pitchFamily="34" charset="-122"/>
-                <a:cs typeface="Trebuchet MS" pitchFamily="34" charset="-120"/>
-              </a:rPr>
-              <a:t>Phonemes</a:t>
-            </a:r>
-            <a:endParaRPr lang="en-US" sz="1100" dirty="0"/>
-          </a:p>
-        </p:txBody>
-      </p:sp>
-      <p:sp>
-        <p:nvSpPr>
-          <p:cNvPr id="42" name="Shape 40"/>
-          <p:cNvSpPr/>
-          <p:nvPr/>
-        </p:nvSpPr>
-        <p:spPr>
-          <a:xfrm>
-            <a:off x="1874520" y="4096512"/>
-            <a:ext cx="6903720" cy="658368"/>
-          </a:xfrm>
-          <a:prstGeom prst="rect">
-            <a:avLst>
-              <a:gd name="adj" fmla="val 8333"/>
-            </a:avLst>
-          </a:prstGeom>
-          <a:solidFill>
-            <a:srgbClr val="FCE7F3"/>
-          </a:solidFill>
-          <a:ln w="12700">
-            <a:solidFill>
-              <a:srgbClr val="DB2777"/>
-            </a:solidFill>
-            <a:prstDash val="solid"/>
-          </a:ln>
-        </p:spPr>
-      </p:sp>
-      <p:sp>
-        <p:nvSpPr>
-          <p:cNvPr id="43" name="Shape 41"/>
-          <p:cNvSpPr/>
-          <p:nvPr/>
-        </p:nvSpPr>
-        <p:spPr>
-          <a:xfrm>
-            <a:off x="2023872" y="4169664"/>
-            <a:ext cx="685800" cy="475488"/>
-          </a:xfrm>
-          <a:prstGeom prst="rect">
-            <a:avLst>
-              <a:gd name="adj" fmla="val 7692"/>
-            </a:avLst>
-          </a:prstGeom>
-          <a:solidFill>
-            <a:srgbClr val="FFFFFF"/>
-          </a:solidFill>
-          <a:ln w="12700">
-            <a:solidFill>
-              <a:srgbClr val="DB2777"/>
-            </a:solidFill>
-            <a:prstDash val="solid"/>
-          </a:ln>
-        </p:spPr>
-      </p:sp>
-      <p:sp>
-        <p:nvSpPr>
-          <p:cNvPr id="44" name="Text 42"/>
-          <p:cNvSpPr/>
-          <p:nvPr/>
-        </p:nvSpPr>
-        <p:spPr>
-          <a:xfrm>
-            <a:off x="2023872" y="4169664"/>
-            <a:ext cx="685800" cy="475488"/>
-          </a:xfrm>
-          <a:prstGeom prst="rect">
-            <a:avLst/>
-          </a:prstGeom>
-          <a:noFill/>
-          <a:ln/>
-        </p:spPr>
-        <p:txBody>
-          <a:bodyPr wrap="square" lIns="0" tIns="0" rIns="0" bIns="0" rtlCol="0" anchor="ctr"/>
-          <a:lstStyle/>
-          <a:p>
-            <a:pPr algn="ctr" indent="0" marL="0">
-              <a:buNone/>
-            </a:pPr>
-            <a:r>
-              <a:rPr lang="en-US" sz="900" b="1" dirty="0">
-                <a:solidFill>
-                  <a:srgbClr val="9D174D"/>
-                </a:solidFill>
-                <a:latin typeface="Trebuchet MS" pitchFamily="34" charset="0"/>
-                <a:ea typeface="Trebuchet MS" pitchFamily="34" charset="-122"/>
-                <a:cs typeface="Trebuchet MS" pitchFamily="34" charset="-120"/>
-              </a:rPr>
-              <a:t>u</a:t>
-            </a:r>
-            <a:endParaRPr lang="en-US" sz="900" dirty="0"/>
-          </a:p>
-        </p:txBody>
-      </p:sp>
-      <p:sp>
-        <p:nvSpPr>
-          <p:cNvPr id="45" name="Shape 43"/>
-          <p:cNvSpPr/>
-          <p:nvPr/>
-        </p:nvSpPr>
-        <p:spPr>
-          <a:xfrm>
-            <a:off x="2831592" y="4169664"/>
-            <a:ext cx="685800" cy="475488"/>
-          </a:xfrm>
-          <a:prstGeom prst="rect">
-            <a:avLst>
-              <a:gd name="adj" fmla="val 7692"/>
-            </a:avLst>
-          </a:prstGeom>
-          <a:solidFill>
-            <a:srgbClr val="FFFFFF"/>
-          </a:solidFill>
-          <a:ln w="12700">
-            <a:solidFill>
-              <a:srgbClr val="DB2777"/>
-            </a:solidFill>
-            <a:prstDash val="solid"/>
-          </a:ln>
-        </p:spPr>
-      </p:sp>
-      <p:sp>
-        <p:nvSpPr>
-          <p:cNvPr id="46" name="Text 44"/>
-          <p:cNvSpPr/>
-          <p:nvPr/>
-        </p:nvSpPr>
-        <p:spPr>
-          <a:xfrm>
-            <a:off x="2831592" y="4169664"/>
-            <a:ext cx="685800" cy="475488"/>
-          </a:xfrm>
-          <a:prstGeom prst="rect">
-            <a:avLst/>
-          </a:prstGeom>
-          <a:noFill/>
-          <a:ln/>
-        </p:spPr>
-        <p:txBody>
-          <a:bodyPr wrap="square" lIns="0" tIns="0" rIns="0" bIns="0" rtlCol="0" anchor="ctr"/>
-          <a:lstStyle/>
-          <a:p>
-            <a:pPr algn="ctr" indent="0" marL="0">
-              <a:buNone/>
-            </a:pPr>
-            <a:r>
-              <a:rPr lang="en-US" sz="900" b="1" dirty="0">
-                <a:solidFill>
-                  <a:srgbClr val="9D174D"/>
-                </a:solidFill>
-                <a:latin typeface="Trebuchet MS" pitchFamily="34" charset="0"/>
-                <a:ea typeface="Trebuchet MS" pitchFamily="34" charset="-122"/>
-                <a:cs typeface="Trebuchet MS" pitchFamily="34" charset="-120"/>
-              </a:rPr>
-              <a:t>n</a:t>
-            </a:r>
-            <a:endParaRPr lang="en-US" sz="900" dirty="0"/>
-          </a:p>
-        </p:txBody>
-      </p:sp>
-      <p:sp>
-        <p:nvSpPr>
-          <p:cNvPr id="47" name="Shape 45"/>
-          <p:cNvSpPr/>
-          <p:nvPr/>
-        </p:nvSpPr>
-        <p:spPr>
-          <a:xfrm>
-            <a:off x="3639312" y="4169664"/>
-            <a:ext cx="685800" cy="475488"/>
-          </a:xfrm>
-          <a:prstGeom prst="rect">
-            <a:avLst>
-              <a:gd name="adj" fmla="val 7692"/>
-            </a:avLst>
-          </a:prstGeom>
-          <a:solidFill>
-            <a:srgbClr val="FFFFFF"/>
-          </a:solidFill>
-          <a:ln w="12700">
-            <a:solidFill>
-              <a:srgbClr val="DB2777"/>
-            </a:solidFill>
-            <a:prstDash val="solid"/>
-          </a:ln>
-        </p:spPr>
-      </p:sp>
-      <p:sp>
-        <p:nvSpPr>
-          <p:cNvPr id="48" name="Text 46"/>
-          <p:cNvSpPr/>
-          <p:nvPr/>
-        </p:nvSpPr>
-        <p:spPr>
-          <a:xfrm>
-            <a:off x="3639312" y="4169664"/>
-            <a:ext cx="685800" cy="475488"/>
-          </a:xfrm>
-          <a:prstGeom prst="rect">
-            <a:avLst/>
-          </a:prstGeom>
-          <a:noFill/>
-          <a:ln/>
-        </p:spPr>
-        <p:txBody>
-          <a:bodyPr wrap="square" lIns="0" tIns="0" rIns="0" bIns="0" rtlCol="0" anchor="ctr"/>
-          <a:lstStyle/>
-          <a:p>
-            <a:pPr algn="ctr" indent="0" marL="0">
-              <a:buNone/>
-            </a:pPr>
-            <a:r>
-              <a:rPr lang="en-US" sz="900" b="1" dirty="0">
-                <a:solidFill>
-                  <a:srgbClr val="9D174D"/>
-                </a:solidFill>
-                <a:latin typeface="Trebuchet MS" pitchFamily="34" charset="0"/>
-                <a:ea typeface="Trebuchet MS" pitchFamily="34" charset="-122"/>
-                <a:cs typeface="Trebuchet MS" pitchFamily="34" charset="-120"/>
-              </a:rPr>
-              <a:t>h</a:t>
-            </a:r>
-            <a:endParaRPr lang="en-US" sz="900" dirty="0"/>
-          </a:p>
-        </p:txBody>
-      </p:sp>
-      <p:sp>
-        <p:nvSpPr>
-          <p:cNvPr id="49" name="Shape 47"/>
-          <p:cNvSpPr/>
-          <p:nvPr/>
-        </p:nvSpPr>
-        <p:spPr>
-          <a:xfrm>
-            <a:off x="4447032" y="4169664"/>
-            <a:ext cx="685800" cy="475488"/>
-          </a:xfrm>
-          <a:prstGeom prst="rect">
-            <a:avLst>
-              <a:gd name="adj" fmla="val 7692"/>
-            </a:avLst>
-          </a:prstGeom>
-          <a:solidFill>
-            <a:srgbClr val="FFFFFF"/>
-          </a:solidFill>
-          <a:ln w="12700">
-            <a:solidFill>
-              <a:srgbClr val="DB2777"/>
-            </a:solidFill>
-            <a:prstDash val="solid"/>
-          </a:ln>
-        </p:spPr>
-      </p:sp>
-      <p:sp>
-        <p:nvSpPr>
-          <p:cNvPr id="50" name="Text 48"/>
-          <p:cNvSpPr/>
-          <p:nvPr/>
-        </p:nvSpPr>
-        <p:spPr>
-          <a:xfrm>
-            <a:off x="4447032" y="4169664"/>
-            <a:ext cx="685800" cy="475488"/>
-          </a:xfrm>
-          <a:prstGeom prst="rect">
-            <a:avLst/>
-          </a:prstGeom>
-          <a:noFill/>
-          <a:ln/>
-        </p:spPr>
-        <p:txBody>
-          <a:bodyPr wrap="square" lIns="0" tIns="0" rIns="0" bIns="0" rtlCol="0" anchor="ctr"/>
-          <a:lstStyle/>
-          <a:p>
-            <a:pPr algn="ctr" indent="0" marL="0">
-              <a:buNone/>
-            </a:pPr>
-            <a:r>
-              <a:rPr lang="en-US" sz="900" b="1" dirty="0">
-                <a:solidFill>
-                  <a:srgbClr val="9D174D"/>
-                </a:solidFill>
-                <a:latin typeface="Trebuchet MS" pitchFamily="34" charset="0"/>
-                <a:ea typeface="Trebuchet MS" pitchFamily="34" charset="-122"/>
-                <a:cs typeface="Trebuchet MS" pitchFamily="34" charset="-120"/>
-              </a:rPr>
-              <a:t>a</a:t>
-            </a:r>
-            <a:endParaRPr lang="en-US" sz="900" dirty="0"/>
-          </a:p>
-        </p:txBody>
-      </p:sp>
-      <p:sp>
-        <p:nvSpPr>
-          <p:cNvPr id="51" name="Shape 49"/>
-          <p:cNvSpPr/>
-          <p:nvPr/>
-        </p:nvSpPr>
-        <p:spPr>
-          <a:xfrm>
-            <a:off x="5254752" y="4169664"/>
-            <a:ext cx="685800" cy="475488"/>
-          </a:xfrm>
-          <a:prstGeom prst="rect">
-            <a:avLst>
-              <a:gd name="adj" fmla="val 7692"/>
-            </a:avLst>
-          </a:prstGeom>
-          <a:solidFill>
-            <a:srgbClr val="FFFFFF"/>
-          </a:solidFill>
-          <a:ln w="12700">
-            <a:solidFill>
-              <a:srgbClr val="DB2777"/>
-            </a:solidFill>
-            <a:prstDash val="solid"/>
-          </a:ln>
-        </p:spPr>
-      </p:sp>
-      <p:sp>
-        <p:nvSpPr>
-          <p:cNvPr id="52" name="Text 50"/>
-          <p:cNvSpPr/>
-          <p:nvPr/>
-        </p:nvSpPr>
-        <p:spPr>
-          <a:xfrm>
-            <a:off x="5254752" y="4169664"/>
-            <a:ext cx="685800" cy="475488"/>
-          </a:xfrm>
-          <a:prstGeom prst="rect">
-            <a:avLst/>
-          </a:prstGeom>
-          <a:noFill/>
-          <a:ln/>
-        </p:spPr>
-        <p:txBody>
-          <a:bodyPr wrap="square" lIns="0" tIns="0" rIns="0" bIns="0" rtlCol="0" anchor="ctr"/>
-          <a:lstStyle/>
-          <a:p>
-            <a:pPr algn="ctr" indent="0" marL="0">
-              <a:buNone/>
-            </a:pPr>
-            <a:r>
-              <a:rPr lang="en-US" sz="900" b="1" dirty="0">
-                <a:solidFill>
-                  <a:srgbClr val="9D174D"/>
-                </a:solidFill>
-                <a:latin typeface="Trebuchet MS" pitchFamily="34" charset="0"/>
-                <a:ea typeface="Trebuchet MS" pitchFamily="34" charset="-122"/>
-                <a:cs typeface="Trebuchet MS" pitchFamily="34" charset="-120"/>
-              </a:rPr>
-              <a:t>pp</a:t>
-            </a:r>
-            <a:endParaRPr lang="en-US" sz="900" dirty="0"/>
-          </a:p>
-        </p:txBody>
-      </p:sp>
-      <p:sp>
-        <p:nvSpPr>
-          <p:cNvPr id="53" name="Shape 51"/>
-          <p:cNvSpPr/>
-          <p:nvPr/>
-        </p:nvSpPr>
-        <p:spPr>
-          <a:xfrm>
-            <a:off x="6062472" y="4169664"/>
-            <a:ext cx="685800" cy="475488"/>
-          </a:xfrm>
-          <a:prstGeom prst="rect">
-            <a:avLst>
-              <a:gd name="adj" fmla="val 7692"/>
-            </a:avLst>
-          </a:prstGeom>
-          <a:solidFill>
-            <a:srgbClr val="FFFFFF"/>
-          </a:solidFill>
-          <a:ln w="12700">
-            <a:solidFill>
-              <a:srgbClr val="DB2777"/>
-            </a:solidFill>
-            <a:prstDash val="solid"/>
-          </a:ln>
-        </p:spPr>
-      </p:sp>
-      <p:sp>
-        <p:nvSpPr>
-          <p:cNvPr id="54" name="Text 52"/>
-          <p:cNvSpPr/>
-          <p:nvPr/>
-        </p:nvSpPr>
-        <p:spPr>
-          <a:xfrm>
-            <a:off x="6062472" y="4169664"/>
-            <a:ext cx="685800" cy="475488"/>
-          </a:xfrm>
-          <a:prstGeom prst="rect">
-            <a:avLst/>
-          </a:prstGeom>
-          <a:noFill/>
-          <a:ln/>
-        </p:spPr>
-        <p:txBody>
-          <a:bodyPr wrap="square" lIns="0" tIns="0" rIns="0" bIns="0" rtlCol="0" anchor="ctr"/>
-          <a:lstStyle/>
-          <a:p>
-            <a:pPr algn="ctr" indent="0" marL="0">
-              <a:buNone/>
-            </a:pPr>
-            <a:r>
-              <a:rPr lang="en-US" sz="900" b="1" dirty="0">
-                <a:solidFill>
-                  <a:srgbClr val="9D174D"/>
-                </a:solidFill>
-                <a:latin typeface="Trebuchet MS" pitchFamily="34" charset="0"/>
-                <a:ea typeface="Trebuchet MS" pitchFamily="34" charset="-122"/>
-                <a:cs typeface="Trebuchet MS" pitchFamily="34" charset="-120"/>
-              </a:rPr>
-              <a:t>i</a:t>
-            </a:r>
-            <a:endParaRPr lang="en-US" sz="900" dirty="0"/>
-          </a:p>
-        </p:txBody>
-      </p:sp>
-      <p:sp>
-        <p:nvSpPr>
-          <p:cNvPr id="55" name="Shape 53"/>
-          <p:cNvSpPr/>
-          <p:nvPr/>
-        </p:nvSpPr>
-        <p:spPr>
-          <a:xfrm>
-            <a:off x="6870192" y="4169664"/>
-            <a:ext cx="685800" cy="475488"/>
-          </a:xfrm>
-          <a:prstGeom prst="rect">
-            <a:avLst>
-              <a:gd name="adj" fmla="val 7692"/>
-            </a:avLst>
-          </a:prstGeom>
-          <a:solidFill>
-            <a:srgbClr val="FFFFFF"/>
-          </a:solidFill>
-          <a:ln w="12700">
-            <a:solidFill>
-              <a:srgbClr val="DB2777"/>
-            </a:solidFill>
-            <a:prstDash val="solid"/>
-          </a:ln>
-        </p:spPr>
-      </p:sp>
-      <p:sp>
-        <p:nvSpPr>
-          <p:cNvPr id="56" name="Text 54"/>
-          <p:cNvSpPr/>
-          <p:nvPr/>
-        </p:nvSpPr>
-        <p:spPr>
-          <a:xfrm>
-            <a:off x="6870192" y="4169664"/>
-            <a:ext cx="685800" cy="475488"/>
-          </a:xfrm>
-          <a:prstGeom prst="rect">
-            <a:avLst/>
-          </a:prstGeom>
-          <a:noFill/>
-          <a:ln/>
-        </p:spPr>
-        <p:txBody>
-          <a:bodyPr wrap="square" lIns="0" tIns="0" rIns="0" bIns="0" rtlCol="0" anchor="ctr"/>
-          <a:lstStyle/>
-          <a:p>
-            <a:pPr algn="ctr" indent="0" marL="0">
-              <a:buNone/>
-            </a:pPr>
-            <a:r>
-              <a:rPr lang="en-US" sz="900" b="1" dirty="0">
-                <a:solidFill>
-                  <a:srgbClr val="9D174D"/>
-                </a:solidFill>
-                <a:latin typeface="Trebuchet MS" pitchFamily="34" charset="0"/>
-                <a:ea typeface="Trebuchet MS" pitchFamily="34" charset="-122"/>
-                <a:cs typeface="Trebuchet MS" pitchFamily="34" charset="-120"/>
-              </a:rPr>
-              <a:t>l</a:t>
-            </a:r>
-            <a:endParaRPr lang="en-US" sz="900" dirty="0"/>
-          </a:p>
-        </p:txBody>
-      </p:sp>
-      <p:sp>
-        <p:nvSpPr>
-          <p:cNvPr id="57" name="Shape 55"/>
-          <p:cNvSpPr/>
-          <p:nvPr/>
-        </p:nvSpPr>
-        <p:spPr>
-          <a:xfrm>
-            <a:off x="7677912" y="4169664"/>
-            <a:ext cx="685800" cy="475488"/>
-          </a:xfrm>
-          <a:prstGeom prst="rect">
-            <a:avLst>
-              <a:gd name="adj" fmla="val 7692"/>
-            </a:avLst>
-          </a:prstGeom>
-          <a:solidFill>
-            <a:srgbClr val="FFFFFF"/>
-          </a:solidFill>
-          <a:ln w="12700">
-            <a:solidFill>
-              <a:srgbClr val="DB2777"/>
-            </a:solidFill>
-            <a:prstDash val="solid"/>
-          </a:ln>
-        </p:spPr>
-      </p:sp>
-      <p:sp>
-        <p:nvSpPr>
-          <p:cNvPr id="58" name="Text 56"/>
-          <p:cNvSpPr/>
-          <p:nvPr/>
-        </p:nvSpPr>
-        <p:spPr>
-          <a:xfrm>
-            <a:off x="7677912" y="4169664"/>
-            <a:ext cx="685800" cy="475488"/>
-          </a:xfrm>
-          <a:prstGeom prst="rect">
-            <a:avLst/>
-          </a:prstGeom>
-          <a:noFill/>
-          <a:ln/>
-        </p:spPr>
-        <p:txBody>
-          <a:bodyPr wrap="square" lIns="0" tIns="0" rIns="0" bIns="0" rtlCol="0" anchor="ctr"/>
-          <a:lstStyle/>
-          <a:p>
-            <a:pPr algn="ctr" indent="0" marL="0">
-              <a:buNone/>
-            </a:pPr>
-            <a:r>
-              <a:rPr lang="en-US" sz="900" b="1" dirty="0">
-                <a:solidFill>
-                  <a:srgbClr val="9D174D"/>
-                </a:solidFill>
-                <a:latin typeface="Trebuchet MS" pitchFamily="34" charset="0"/>
-                <a:ea typeface="Trebuchet MS" pitchFamily="34" charset="-122"/>
-                <a:cs typeface="Trebuchet MS" pitchFamily="34" charset="-120"/>
-              </a:rPr>
-              <a:t>y</a:t>
+              <a:t>er</a:t>
             </a:r>
             <a:endParaRPr lang="en-US" sz="900" dirty="0"/>
           </a:p>
@@ -29977,7 +29233,7 @@
                 <a:ea typeface="Calibri" pitchFamily="34" charset="-122"/>
                 <a:cs typeface="Calibri" pitchFamily="34" charset="-120"/>
               </a:rPr>
-              <a:t>Word Labs  •  wordlabs.app  •  Root: 'happy' = feeling or showing pleasure</a:t>
+              <a:t>Word Labs  •  wordlabs.app  •  Root: 'happy' = feeling pleased or joyful</a:t>
             </a:r>
             <a:endParaRPr lang="en-US" sz="800" dirty="0"/>
           </a:p>
@@ -30116,7 +29372,7 @@
                 <a:ea typeface="Trebuchet MS" pitchFamily="34" charset="-122"/>
                 <a:cs typeface="Trebuchet MS" pitchFamily="34" charset="-120"/>
               </a:rPr>
-              <a:t>happiest</a:t>
+              <a:t>happiness</a:t>
             </a:r>
             <a:endParaRPr lang="en-US" sz="2800" dirty="0"/>
           </a:p>
@@ -30804,7 +30060,7 @@
                 <a:ea typeface="Calibri" pitchFamily="34" charset="-122"/>
                 <a:cs typeface="Calibri" pitchFamily="34" charset="-120"/>
               </a:rPr>
-              <a:t>Word Labs  •  wordlabs.app  •  Root: 'happy' = feeling or showing pleasure</a:t>
+              <a:t>Word Labs  •  wordlabs.app  •  Root: 'happy' = feeling pleased or joyful</a:t>
             </a:r>
             <a:endParaRPr lang="en-US" sz="800" dirty="0"/>
           </a:p>
@@ -30943,7 +30199,7 @@
                 <a:ea typeface="Trebuchet MS" pitchFamily="34" charset="-122"/>
                 <a:cs typeface="Trebuchet MS" pitchFamily="34" charset="-120"/>
               </a:rPr>
-              <a:t>happiest</a:t>
+              <a:t>happiness</a:t>
             </a:r>
             <a:endParaRPr lang="en-US" sz="2800" dirty="0"/>
           </a:p>
@@ -31121,7 +30377,7 @@
                 <a:ea typeface="Calibri" pitchFamily="34" charset="-122"/>
                 <a:cs typeface="Calibri" pitchFamily="34" charset="-120"/>
               </a:rPr>
-              <a:t>feeling pleasure or joy</a:t>
+              <a:t>feeling pleased or joyful</a:t>
             </a:r>
             <a:endParaRPr lang="en-US" sz="850" dirty="0"/>
           </a:p>
@@ -31194,7 +30450,7 @@
                 <a:ea typeface="Trebuchet MS" pitchFamily="34" charset="-122"/>
                 <a:cs typeface="Trebuchet MS" pitchFamily="34" charset="-120"/>
               </a:rPr>
-              <a:t>est</a:t>
+              <a:t>iness</a:t>
             </a:r>
             <a:endParaRPr lang="en-US" sz="1300" dirty="0"/>
           </a:p>
@@ -31233,7 +30489,7 @@
                 <a:ea typeface="Calibri" pitchFamily="34" charset="-122"/>
                 <a:cs typeface="Calibri" pitchFamily="34" charset="-120"/>
               </a:rPr>
-              <a:t>the most</a:t>
+              <a:t>the state of being</a:t>
             </a:r>
             <a:endParaRPr lang="en-US" sz="850" dirty="0"/>
           </a:p>
@@ -31272,7 +30528,7 @@
                 <a:ea typeface="Calibri" pitchFamily="34" charset="-122"/>
                 <a:cs typeface="Calibri" pitchFamily="34" charset="-120"/>
               </a:rPr>
-              <a:t>'y' changes to 'i' before '-est'</a:t>
+              <a:t>y → i before suffix -ness</a:t>
             </a:r>
             <a:endParaRPr lang="en-US" sz="700" dirty="0"/>
           </a:p>
@@ -31828,7 +31084,7 @@
                 <a:ea typeface="Calibri" pitchFamily="34" charset="-122"/>
                 <a:cs typeface="Calibri" pitchFamily="34" charset="-120"/>
               </a:rPr>
-              <a:t>Word Labs  •  wordlabs.app  •  Root: 'happy' = feeling or showing pleasure</a:t>
+              <a:t>Word Labs  •  wordlabs.app  •  Root: 'happy' = feeling pleased or joyful</a:t>
             </a:r>
             <a:endParaRPr lang="en-US" sz="800" dirty="0"/>
           </a:p>
@@ -31967,7 +31223,7 @@
                 <a:ea typeface="Trebuchet MS" pitchFamily="34" charset="-122"/>
                 <a:cs typeface="Trebuchet MS" pitchFamily="34" charset="-120"/>
               </a:rPr>
-              <a:t>happiest</a:t>
+              <a:t>happiness</a:t>
             </a:r>
             <a:endParaRPr lang="en-US" sz="2800" dirty="0"/>
           </a:p>
@@ -32145,7 +31401,7 @@
                 <a:ea typeface="Calibri" pitchFamily="34" charset="-122"/>
                 <a:cs typeface="Calibri" pitchFamily="34" charset="-120"/>
               </a:rPr>
-              <a:t>feeling pleasure or joy</a:t>
+              <a:t>feeling pleased or joyful</a:t>
             </a:r>
             <a:endParaRPr lang="en-US" sz="850" dirty="0"/>
           </a:p>
@@ -32218,7 +31474,7 @@
                 <a:ea typeface="Trebuchet MS" pitchFamily="34" charset="-122"/>
                 <a:cs typeface="Trebuchet MS" pitchFamily="34" charset="-120"/>
               </a:rPr>
-              <a:t>est</a:t>
+              <a:t>iness</a:t>
             </a:r>
             <a:endParaRPr lang="en-US" sz="1300" dirty="0"/>
           </a:p>
@@ -32257,7 +31513,7 @@
                 <a:ea typeface="Calibri" pitchFamily="34" charset="-122"/>
                 <a:cs typeface="Calibri" pitchFamily="34" charset="-120"/>
               </a:rPr>
-              <a:t>the most</a:t>
+              <a:t>the state of being</a:t>
             </a:r>
             <a:endParaRPr lang="en-US" sz="850" dirty="0"/>
           </a:p>
@@ -32296,7 +31552,7 @@
                 <a:ea typeface="Calibri" pitchFamily="34" charset="-122"/>
                 <a:cs typeface="Calibri" pitchFamily="34" charset="-120"/>
               </a:rPr>
-              <a:t>'y' changes to 'i' before '-est'</a:t>
+              <a:t>y → i before suffix -ness</a:t>
             </a:r>
             <a:endParaRPr lang="en-US" sz="700" dirty="0"/>
           </a:p>
@@ -32665,7 +31921,7 @@
                 <a:ea typeface="Trebuchet MS" pitchFamily="34" charset="-122"/>
                 <a:cs typeface="Trebuchet MS" pitchFamily="34" charset="-120"/>
               </a:rPr>
-              <a:t>est</a:t>
+              <a:t>ness</a:t>
             </a:r>
             <a:endParaRPr lang="en-US" sz="1400" dirty="0"/>
           </a:p>
@@ -33089,7 +32345,7 @@
                 <a:ea typeface="Calibri" pitchFamily="34" charset="-122"/>
                 <a:cs typeface="Calibri" pitchFamily="34" charset="-120"/>
               </a:rPr>
-              <a:t>Word Labs  •  wordlabs.app  •  Root: 'happy' = feeling or showing pleasure</a:t>
+              <a:t>Word Labs  •  wordlabs.app  •  Root: 'happy' = feeling pleased or joyful</a:t>
             </a:r>
             <a:endParaRPr lang="en-US" sz="800" dirty="0"/>
           </a:p>
@@ -33228,7 +32484,7 @@
                 <a:ea typeface="Trebuchet MS" pitchFamily="34" charset="-122"/>
                 <a:cs typeface="Trebuchet MS" pitchFamily="34" charset="-120"/>
               </a:rPr>
-              <a:t>happiest</a:t>
+              <a:t>happiness</a:t>
             </a:r>
             <a:endParaRPr lang="en-US" sz="2800" dirty="0"/>
           </a:p>
@@ -33406,7 +32662,7 @@
                 <a:ea typeface="Calibri" pitchFamily="34" charset="-122"/>
                 <a:cs typeface="Calibri" pitchFamily="34" charset="-120"/>
               </a:rPr>
-              <a:t>feeling pleasure or joy</a:t>
+              <a:t>feeling pleased or joyful</a:t>
             </a:r>
             <a:endParaRPr lang="en-US" sz="850" dirty="0"/>
           </a:p>
@@ -33479,7 +32735,7 @@
                 <a:ea typeface="Trebuchet MS" pitchFamily="34" charset="-122"/>
                 <a:cs typeface="Trebuchet MS" pitchFamily="34" charset="-120"/>
               </a:rPr>
-              <a:t>est</a:t>
+              <a:t>iness</a:t>
             </a:r>
             <a:endParaRPr lang="en-US" sz="1300" dirty="0"/>
           </a:p>
@@ -33518,7 +32774,7 @@
                 <a:ea typeface="Calibri" pitchFamily="34" charset="-122"/>
                 <a:cs typeface="Calibri" pitchFamily="34" charset="-120"/>
               </a:rPr>
-              <a:t>the most</a:t>
+              <a:t>the state of being</a:t>
             </a:r>
             <a:endParaRPr lang="en-US" sz="850" dirty="0"/>
           </a:p>
@@ -33557,7 +32813,7 @@
                 <a:ea typeface="Calibri" pitchFamily="34" charset="-122"/>
                 <a:cs typeface="Calibri" pitchFamily="34" charset="-120"/>
               </a:rPr>
-              <a:t>'y' changes to 'i' before '-est'</a:t>
+              <a:t>y → i before suffix -ness</a:t>
             </a:r>
             <a:endParaRPr lang="en-US" sz="700" dirty="0"/>
           </a:p>
@@ -33926,7 +33182,7 @@
                 <a:ea typeface="Trebuchet MS" pitchFamily="34" charset="-122"/>
                 <a:cs typeface="Trebuchet MS" pitchFamily="34" charset="-120"/>
               </a:rPr>
-              <a:t>est</a:t>
+              <a:t>ness</a:t>
             </a:r>
             <a:endParaRPr lang="en-US" sz="1400" dirty="0"/>
           </a:p>
@@ -34349,7 +33605,7 @@
                 <a:ea typeface="Trebuchet MS" pitchFamily="34" charset="-122"/>
                 <a:cs typeface="Trebuchet MS" pitchFamily="34" charset="-120"/>
               </a:rPr>
-              <a:t>e</a:t>
+              <a:t>n</a:t>
             </a:r>
             <a:endParaRPr lang="en-US" sz="900" dirty="0"/>
           </a:p>
@@ -34415,7 +33671,7 @@
                 <a:ea typeface="Trebuchet MS" pitchFamily="34" charset="-122"/>
                 <a:cs typeface="Trebuchet MS" pitchFamily="34" charset="-120"/>
               </a:rPr>
-              <a:t>s</a:t>
+              <a:t>e</a:t>
             </a:r>
             <a:endParaRPr lang="en-US" sz="900" dirty="0"/>
           </a:p>
@@ -34481,7 +33737,7 @@
                 <a:ea typeface="Trebuchet MS" pitchFamily="34" charset="-122"/>
                 <a:cs typeface="Trebuchet MS" pitchFamily="34" charset="-120"/>
               </a:rPr>
-              <a:t>t</a:t>
+              <a:t>ss</a:t>
             </a:r>
             <a:endParaRPr lang="en-US" sz="900" dirty="0"/>
           </a:p>
@@ -34773,7 +34029,7 @@
                 <a:ea typeface="Calibri" pitchFamily="34" charset="-122"/>
                 <a:cs typeface="Calibri" pitchFamily="34" charset="-120"/>
               </a:rPr>
-              <a:t>Word Labs  •  wordlabs.app  •  Root: 'happy' = feeling or showing pleasure</a:t>
+              <a:t>Word Labs  •  wordlabs.app  •  Root: 'happy' = feeling pleased or joyful</a:t>
             </a:r>
             <a:endParaRPr lang="en-US" sz="800" dirty="0"/>
           </a:p>
@@ -35942,7 +35198,7 @@
                 <a:ea typeface="Calibri" pitchFamily="34" charset="-122"/>
                 <a:cs typeface="Calibri" pitchFamily="34" charset="-120"/>
               </a:rPr>
-              <a:t>Word Labs  •  wordlabs.app  •  Root: 'happy' = feeling or showing pleasure</a:t>
+              <a:t>Word Labs  •  wordlabs.app  •  Root: 'happy' = feeling pleased or joyful</a:t>
             </a:r>
             <a:endParaRPr lang="en-US" sz="800" dirty="0"/>
           </a:p>
@@ -36371,7 +35627,7 @@
                 <a:ea typeface="Trebuchet MS" pitchFamily="34" charset="-122"/>
                 <a:cs typeface="Trebuchet MS" pitchFamily="34" charset="-120"/>
               </a:rPr>
-              <a:t>-ness</a:t>
+              <a:t>-ly</a:t>
             </a:r>
             <a:endParaRPr lang="en-US" sz="1300" dirty="0"/>
           </a:p>
@@ -36524,7 +35780,7 @@
                 <a:ea typeface="Trebuchet MS" pitchFamily="34" charset="-122"/>
                 <a:cs typeface="Trebuchet MS" pitchFamily="34" charset="-120"/>
               </a:rPr>
-              <a:t>-ly</a:t>
+              <a:t>-ness</a:t>
             </a:r>
             <a:endParaRPr lang="en-US" sz="1300" dirty="0"/>
           </a:p>
@@ -36588,7 +35844,7 @@
                 <a:ea typeface="Trebuchet MS" pitchFamily="34" charset="-122"/>
                 <a:cs typeface="Trebuchet MS" pitchFamily="34" charset="-120"/>
               </a:rPr>
-              <a:t>dis-</a:t>
+              <a:t>super-</a:t>
             </a:r>
             <a:endParaRPr lang="en-US" sz="1300" dirty="0"/>
           </a:p>
@@ -36741,7 +35997,7 @@
                 <a:ea typeface="Trebuchet MS" pitchFamily="34" charset="-122"/>
                 <a:cs typeface="Trebuchet MS" pitchFamily="34" charset="-120"/>
               </a:rPr>
-              <a:t>up-</a:t>
+              <a:t>extra-</a:t>
             </a:r>
             <a:endParaRPr lang="en-US" sz="1300" dirty="0"/>
           </a:p>
@@ -36894,7 +36150,7 @@
                 <a:ea typeface="Trebuchet MS" pitchFamily="34" charset="-122"/>
                 <a:cs typeface="Trebuchet MS" pitchFamily="34" charset="-120"/>
               </a:rPr>
-              <a:t>re-</a:t>
+              <a:t>dis-</a:t>
             </a:r>
             <a:endParaRPr lang="en-US" sz="1300" dirty="0"/>
           </a:p>
@@ -36983,7 +36239,7 @@
                 <a:ea typeface="Trebuchet MS" pitchFamily="34" charset="-122"/>
                 <a:cs typeface="Trebuchet MS" pitchFamily="34" charset="-120"/>
               </a:rPr>
-              <a:t>-go</a:t>
+              <a:t>-ier</a:t>
             </a:r>
             <a:endParaRPr lang="en-US" sz="1300" dirty="0"/>
           </a:p>
@@ -37484,7 +36740,7 @@
                 <a:ea typeface="Trebuchet MS" pitchFamily="34" charset="-122"/>
                 <a:cs typeface="Trebuchet MS" pitchFamily="34" charset="-120"/>
               </a:rPr>
-              <a:t>unhappiness</a:t>
+              <a:t>unhappily</a:t>
             </a:r>
             <a:endParaRPr lang="en-US" sz="1200" dirty="0"/>
           </a:p>
@@ -37550,7 +36806,7 @@
                 <a:ea typeface="Trebuchet MS" pitchFamily="34" charset="-122"/>
                 <a:cs typeface="Trebuchet MS" pitchFamily="34" charset="-120"/>
               </a:rPr>
-              <a:t>unhappily</a:t>
+              <a:t>unhappiness</a:t>
             </a:r>
             <a:endParaRPr lang="en-US" sz="1200" dirty="0"/>
           </a:p>
@@ -37842,7 +37098,7 @@
                 <a:ea typeface="Calibri" pitchFamily="34" charset="-122"/>
                 <a:cs typeface="Calibri" pitchFamily="34" charset="-120"/>
               </a:rPr>
-              <a:t>Word Labs  •  wordlabs.app  •  Root: 'happy' = feeling or showing pleasure</a:t>
+              <a:t>Word Labs  •  wordlabs.app  •  Root: 'happy' = feeling pleased or joyful</a:t>
             </a:r>
             <a:endParaRPr lang="en-US" sz="800" dirty="0"/>
           </a:p>
@@ -38006,7 +37262,7 @@
                 <a:ea typeface="Calibri" pitchFamily="34" charset="-122"/>
                 <a:cs typeface="Calibri" pitchFamily="34" charset="-120"/>
               </a:rPr>
-              <a:t>The core part of a word carrying its basic meaning. For example, 'happy' means 'feeling or showing pleasure'.</a:t>
+              <a:t>The core part of a word carrying its basic meaning. For example, 'happy' means 'feeling pleased or joyful'.</a:t>
             </a:r>
             <a:endParaRPr lang="en-US" sz="1350" dirty="0"/>
           </a:p>
@@ -38626,7 +37882,7 @@
                 <a:ea typeface="Calibri" pitchFamily="34" charset="-122"/>
                 <a:cs typeface="Calibri" pitchFamily="34" charset="-120"/>
               </a:rPr>
-              <a:t>Word Labs  •  wordlabs.app  •  Root: 'happy' = feeling or showing pleasure</a:t>
+              <a:t>Word Labs  •  wordlabs.app  •  Root: 'happy' = feeling pleased or joyful</a:t>
             </a:r>
             <a:endParaRPr lang="en-US" sz="800" dirty="0"/>
           </a:p>
@@ -38738,7 +37994,7 @@
                 <a:ea typeface="Calibri" pitchFamily="34" charset="-122"/>
                 <a:cs typeface="Calibri" pitchFamily="34" charset="-120"/>
               </a:rPr>
-              <a:t>1.  The word 'unhappy' uses the prefix 'un-' to mean 'not happy'.</a:t>
+              <a:t>1.  The prefix 'un-' added to 'happy' makes a word meaning 'not happy'.</a:t>
             </a:r>
             <a:endParaRPr lang="en-US" sz="1300" dirty="0"/>
           </a:p>
@@ -38877,7 +38133,7 @@
                 <a:ea typeface="Calibri" pitchFamily="34" charset="-122"/>
                 <a:cs typeface="Calibri" pitchFamily="34" charset="-120"/>
               </a:rPr>
-              <a:t>2.  The suffix '-ly' in 'happily' changes the word into a noun.</a:t>
+              <a:t>2.  The word 'happily' contains no suffixes.</a:t>
             </a:r>
             <a:endParaRPr lang="en-US" sz="1300" dirty="0"/>
           </a:p>
@@ -39016,7 +38272,7 @@
                 <a:ea typeface="Calibri" pitchFamily="34" charset="-122"/>
                 <a:cs typeface="Calibri" pitchFamily="34" charset="-120"/>
               </a:rPr>
-              <a:t>3.  The word 'happily' is an adverb that describes how something is done.</a:t>
+              <a:t>3.  The word 'happiest' means less happy than everyone else.</a:t>
             </a:r>
             <a:endParaRPr lang="en-US" sz="1300" dirty="0"/>
           </a:p>
@@ -39039,11 +38295,11 @@
             </a:avLst>
           </a:prstGeom>
           <a:solidFill>
-            <a:srgbClr val="DCFCE7"/>
-          </a:solidFill>
-          <a:ln w="12700">
-            <a:solidFill>
-              <a:srgbClr val="16A34A"/>
+            <a:srgbClr val="FEE2E2"/>
+          </a:solidFill>
+          <a:ln w="12700">
+            <a:solidFill>
+              <a:srgbClr val="DC2626"/>
             </a:solidFill>
             <a:prstDash val="solid"/>
           </a:ln>
@@ -39076,13 +38332,13 @@
             <a:r>
               <a:rPr lang="en-US" sz="1100" b="1" dirty="0">
                 <a:solidFill>
-                  <a:srgbClr val="16A34A"/>
+                  <a:srgbClr val="DC2626"/>
                 </a:solidFill>
                 <a:latin typeface="Trebuchet MS" pitchFamily="34" charset="0"/>
                 <a:ea typeface="Trebuchet MS" pitchFamily="34" charset="-122"/>
                 <a:cs typeface="Trebuchet MS" pitchFamily="34" charset="-120"/>
               </a:rPr>
-              <a:t>TRUE</a:t>
+              <a:t>FALSE</a:t>
             </a:r>
             <a:endParaRPr lang="en-US" sz="1100" dirty="0"/>
           </a:p>
@@ -39155,7 +38411,7 @@
                 <a:ea typeface="Calibri" pitchFamily="34" charset="-122"/>
                 <a:cs typeface="Calibri" pitchFamily="34" charset="-120"/>
               </a:rPr>
-              <a:t>4.  'Happiness' is formed by adding the suffix '-ness' to the base word 'happy'.</a:t>
+              <a:t>4.  The word 'unhappiness' contains both a prefix and a suffix.</a:t>
             </a:r>
             <a:endParaRPr lang="en-US" sz="1300" dirty="0"/>
           </a:p>
@@ -39294,7 +38550,7 @@
                 <a:ea typeface="Calibri" pitchFamily="34" charset="-122"/>
                 <a:cs typeface="Calibri" pitchFamily="34" charset="-120"/>
               </a:rPr>
-              <a:t>5.  The word 'happiest' means less happy than all others.</a:t>
+              <a:t>5.  The root 'happy' describes a feeling of joy or pleasure.</a:t>
             </a:r>
             <a:endParaRPr lang="en-US" sz="1300" dirty="0"/>
           </a:p>
@@ -39317,11 +38573,11 @@
             </a:avLst>
           </a:prstGeom>
           <a:solidFill>
-            <a:srgbClr val="FEE2E2"/>
-          </a:solidFill>
-          <a:ln w="12700">
-            <a:solidFill>
-              <a:srgbClr val="DC2626"/>
+            <a:srgbClr val="DCFCE7"/>
+          </a:solidFill>
+          <a:ln w="12700">
+            <a:solidFill>
+              <a:srgbClr val="16A34A"/>
             </a:solidFill>
             <a:prstDash val="solid"/>
           </a:ln>
@@ -39354,13 +38610,13 @@
             <a:r>
               <a:rPr lang="en-US" sz="1100" b="1" dirty="0">
                 <a:solidFill>
-                  <a:srgbClr val="DC2626"/>
+                  <a:srgbClr val="16A34A"/>
                 </a:solidFill>
                 <a:latin typeface="Trebuchet MS" pitchFamily="34" charset="0"/>
                 <a:ea typeface="Trebuchet MS" pitchFamily="34" charset="-122"/>
                 <a:cs typeface="Trebuchet MS" pitchFamily="34" charset="-120"/>
               </a:rPr>
-              <a:t>FALSE</a:t>
+              <a:t>TRUE</a:t>
             </a:r>
             <a:endParaRPr lang="en-US" sz="1100" dirty="0"/>
           </a:p>
@@ -39652,7 +38908,7 @@
                 <a:ea typeface="Calibri" pitchFamily="34" charset="-122"/>
                 <a:cs typeface="Calibri" pitchFamily="34" charset="-120"/>
               </a:rPr>
-              <a:t>Word Labs  •  wordlabs.app  •  Root: 'happy' = feeling or showing pleasure</a:t>
+              <a:t>Word Labs  •  wordlabs.app  •  Root: 'happy' = feeling pleased or joyful</a:t>
             </a:r>
             <a:endParaRPr lang="en-US" sz="800" dirty="0"/>
           </a:p>
@@ -39789,7 +39045,7 @@
                 <a:ea typeface="Trebuchet MS" pitchFamily="34" charset="-122"/>
                 <a:cs typeface="Trebuchet MS" pitchFamily="34" charset="-120"/>
               </a:rPr>
-              <a:t>feeling or showing pleasure</a:t>
+              <a:t>feeling pleased or joyful</a:t>
             </a:r>
             <a:endParaRPr lang="en-US" sz="2000" dirty="0"/>
           </a:p>
@@ -40329,7 +39585,7 @@
                 <a:ea typeface="Trebuchet MS" pitchFamily="34" charset="-122"/>
                 <a:cs typeface="Trebuchet MS" pitchFamily="34" charset="-120"/>
               </a:rPr>
-              <a:t>unhappiness</a:t>
+              <a:t>unhappily</a:t>
             </a:r>
             <a:endParaRPr lang="en-US" sz="1300" dirty="0"/>
           </a:p>
@@ -40621,7 +39877,7 @@
                 <a:ea typeface="Calibri" pitchFamily="34" charset="-122"/>
                 <a:cs typeface="Calibri" pitchFamily="34" charset="-120"/>
               </a:rPr>
-              <a:t>Word Labs  •  wordlabs.app  •  Root: 'happy' = feeling or showing pleasure</a:t>
+              <a:t>Word Labs  •  wordlabs.app  •  Root: 'happy' = feeling pleased or joyful</a:t>
             </a:r>
             <a:endParaRPr lang="en-US" sz="800" dirty="0"/>
           </a:p>
@@ -41050,7 +40306,7 @@
                 <a:ea typeface="Trebuchet MS" pitchFamily="34" charset="-122"/>
                 <a:cs typeface="Trebuchet MS" pitchFamily="34" charset="-120"/>
               </a:rPr>
-              <a:t>-ness</a:t>
+              <a:t>-ly</a:t>
             </a:r>
             <a:endParaRPr lang="en-US" sz="1300" dirty="0"/>
           </a:p>
@@ -41203,7 +40459,7 @@
                 <a:ea typeface="Trebuchet MS" pitchFamily="34" charset="-122"/>
                 <a:cs typeface="Trebuchet MS" pitchFamily="34" charset="-120"/>
               </a:rPr>
-              <a:t>-ly</a:t>
+              <a:t>-ness</a:t>
             </a:r>
             <a:endParaRPr lang="en-US" sz="1300" dirty="0"/>
           </a:p>
@@ -41267,7 +40523,7 @@
                 <a:ea typeface="Trebuchet MS" pitchFamily="34" charset="-122"/>
                 <a:cs typeface="Trebuchet MS" pitchFamily="34" charset="-120"/>
               </a:rPr>
-              <a:t>dis-</a:t>
+              <a:t>super-</a:t>
             </a:r>
             <a:endParaRPr lang="en-US" sz="1300" dirty="0"/>
           </a:p>
@@ -41420,7 +40676,7 @@
                 <a:ea typeface="Trebuchet MS" pitchFamily="34" charset="-122"/>
                 <a:cs typeface="Trebuchet MS" pitchFamily="34" charset="-120"/>
               </a:rPr>
-              <a:t>up-</a:t>
+              <a:t>extra-</a:t>
             </a:r>
             <a:endParaRPr lang="en-US" sz="1300" dirty="0"/>
           </a:p>
@@ -41573,7 +40829,7 @@
                 <a:ea typeface="Trebuchet MS" pitchFamily="34" charset="-122"/>
                 <a:cs typeface="Trebuchet MS" pitchFamily="34" charset="-120"/>
               </a:rPr>
-              <a:t>re-</a:t>
+              <a:t>dis-</a:t>
             </a:r>
             <a:endParaRPr lang="en-US" sz="1300" dirty="0"/>
           </a:p>
@@ -41662,7 +40918,7 @@
                 <a:ea typeface="Trebuchet MS" pitchFamily="34" charset="-122"/>
                 <a:cs typeface="Trebuchet MS" pitchFamily="34" charset="-120"/>
               </a:rPr>
-              <a:t>-go</a:t>
+              <a:t>-ier</a:t>
             </a:r>
             <a:endParaRPr lang="en-US" sz="1300" dirty="0"/>
           </a:p>
@@ -41940,7 +41196,7 @@
         <p:spPr>
           <a:xfrm>
             <a:off x="4471416" y="4178808"/>
-            <a:ext cx="1097280" cy="420624"/>
+            <a:ext cx="822960" cy="420624"/>
           </a:xfrm>
           <a:prstGeom prst="rect">
             <a:avLst>
@@ -41974,7 +41230,7 @@
         <p:spPr>
           <a:xfrm>
             <a:off x="4471416" y="4178808"/>
-            <a:ext cx="1097280" cy="420624"/>
+            <a:ext cx="822960" cy="420624"/>
           </a:xfrm>
           <a:prstGeom prst="rect">
             <a:avLst/>
@@ -41998,7 +41254,7 @@
                 <a:ea typeface="Trebuchet MS" pitchFamily="34" charset="-122"/>
                 <a:cs typeface="Trebuchet MS" pitchFamily="34" charset="-120"/>
               </a:rPr>
-              <a:t>-ness</a:t>
+              <a:t>-ly</a:t>
             </a:r>
             <a:endParaRPr lang="en-US" sz="1300" dirty="0"/>
           </a:p>
@@ -42012,7 +41268,7 @@
         </p:nvSpPr>
         <p:spPr>
           <a:xfrm>
-            <a:off x="5641848" y="4178808"/>
+            <a:off x="5367528" y="4178808"/>
             <a:ext cx="365760" cy="420624"/>
           </a:xfrm>
           <a:prstGeom prst="rect">
@@ -42051,7 +41307,7 @@
         </p:nvSpPr>
         <p:spPr>
           <a:xfrm>
-            <a:off x="6053328" y="4178808"/>
+            <a:off x="5779008" y="4178808"/>
             <a:ext cx="2194560" cy="420624"/>
           </a:xfrm>
           <a:prstGeom prst="rect">
@@ -42078,7 +41334,7 @@
         </p:nvSpPr>
         <p:spPr>
           <a:xfrm>
-            <a:off x="6053328" y="4178808"/>
+            <a:off x="5779008" y="4178808"/>
             <a:ext cx="2194560" cy="420624"/>
           </a:xfrm>
           <a:prstGeom prst="rect">
@@ -42395,7 +41651,7 @@
                 <a:ea typeface="Calibri" pitchFamily="34" charset="-122"/>
                 <a:cs typeface="Calibri" pitchFamily="34" charset="-120"/>
               </a:rPr>
-              <a:t>Word Labs  •  wordlabs.app  •  Root: 'happy' = feeling or showing pleasure</a:t>
+              <a:t>Word Labs  •  wordlabs.app  •  Root: 'happy' = feeling pleased or joyful</a:t>
             </a:r>
             <a:endParaRPr lang="en-US" sz="800" dirty="0"/>
           </a:p>
@@ -42573,7 +41829,7 @@
                 <a:ea typeface="Calibri" pitchFamily="34" charset="-122"/>
                 <a:cs typeface="Calibri" pitchFamily="34" charset="-120"/>
               </a:rPr>
-              <a:t>More happy than someone or something else.</a:t>
+              <a:t>More pleased or joyful than someone or something else.</a:t>
             </a:r>
             <a:endParaRPr lang="en-US" sz="1200" dirty="0"/>
           </a:p>
@@ -42712,7 +41968,7 @@
                 <a:ea typeface="Calibri" pitchFamily="34" charset="-122"/>
                 <a:cs typeface="Calibri" pitchFamily="34" charset="-120"/>
               </a:rPr>
-              <a:t>The feeling of being very happy and content.</a:t>
+              <a:t>The feeling of being joyful and content.</a:t>
             </a:r>
             <a:endParaRPr lang="en-US" sz="1200" dirty="0"/>
           </a:p>
@@ -42851,7 +42107,7 @@
                 <a:ea typeface="Calibri" pitchFamily="34" charset="-122"/>
                 <a:cs typeface="Calibri" pitchFamily="34" charset="-120"/>
               </a:rPr>
-              <a:t>The most happy of all.</a:t>
+              <a:t>The most joyful or pleased out of everyone.</a:t>
             </a:r>
             <a:endParaRPr lang="en-US" sz="1200" dirty="0"/>
           </a:p>
@@ -42990,7 +42246,7 @@
                 <a:ea typeface="Calibri" pitchFamily="34" charset="-122"/>
                 <a:cs typeface="Calibri" pitchFamily="34" charset="-120"/>
               </a:rPr>
-              <a:t>Doing something in a happy, cheerful way.</a:t>
+              <a:t>Doing something in a cheerful and pleased way.</a:t>
             </a:r>
             <a:endParaRPr lang="en-US" sz="1200" dirty="0"/>
           </a:p>
@@ -43129,7 +42385,7 @@
                 <a:ea typeface="Calibri" pitchFamily="34" charset="-122"/>
                 <a:cs typeface="Calibri" pitchFamily="34" charset="-120"/>
               </a:rPr>
-              <a:t>Feeling good and full of joy.</a:t>
+              <a:t>Feeling good, joyful, and pleased about something.</a:t>
             </a:r>
             <a:endParaRPr lang="en-US" sz="1200" dirty="0"/>
           </a:p>
@@ -43268,7 +42524,7 @@
                 <a:ea typeface="Calibri" pitchFamily="34" charset="-122"/>
                 <a:cs typeface="Calibri" pitchFamily="34" charset="-120"/>
               </a:rPr>
-              <a:t>The feeling of being sad or not content.</a:t>
+              <a:t>Doing something in a sad or displeased way.</a:t>
             </a:r>
             <a:endParaRPr lang="en-US" sz="1200" dirty="0"/>
           </a:p>
@@ -43341,7 +42597,7 @@
                 <a:ea typeface="Trebuchet MS" pitchFamily="34" charset="-122"/>
                 <a:cs typeface="Trebuchet MS" pitchFamily="34" charset="-120"/>
               </a:rPr>
-              <a:t>unhappiness</a:t>
+              <a:t>unhappily</a:t>
             </a:r>
             <a:endParaRPr lang="en-US" sz="1200" dirty="0"/>
           </a:p>
@@ -43407,7 +42663,7 @@
                 <a:ea typeface="Calibri" pitchFamily="34" charset="-122"/>
                 <a:cs typeface="Calibri" pitchFamily="34" charset="-120"/>
               </a:rPr>
-              <a:t>Not feeling happy; sad or upset.</a:t>
+              <a:t>Feeling sad or not pleased about something.</a:t>
             </a:r>
             <a:endParaRPr lang="en-US" sz="1200" dirty="0"/>
           </a:p>
@@ -43699,7 +42955,7 @@
                 <a:ea typeface="Calibri" pitchFamily="34" charset="-122"/>
                 <a:cs typeface="Calibri" pitchFamily="34" charset="-120"/>
               </a:rPr>
-              <a:t>Word Labs  •  wordlabs.app  •  Root: 'happy' = feeling or showing pleasure</a:t>
+              <a:t>Word Labs  •  wordlabs.app  •  Root: 'happy' = feeling pleased or joyful</a:t>
             </a:r>
             <a:endParaRPr lang="en-US" sz="800" dirty="0"/>
           </a:p>
@@ -43902,7 +43158,7 @@
                 <a:ea typeface="Calibri" pitchFamily="34" charset="-122"/>
                 <a:cs typeface="Calibri" pitchFamily="34" charset="-120"/>
               </a:rPr>
-              <a:t>She was the happiest person in the whole school when she found out she had won the award.</a:t>
+              <a:t>The children played happily at the park all afternoon.</a:t>
             </a:r>
             <a:endParaRPr lang="en-US" sz="1500" dirty="0"/>
           </a:p>
@@ -44066,7 +43322,7 @@
                 <a:ea typeface="Calibri" pitchFamily="34" charset="-122"/>
                 <a:cs typeface="Calibri" pitchFamily="34" charset="-120"/>
               </a:rPr>
-              <a:t>The puppy wagged its tail happily as the children played with it in the backyard.</a:t>
+              <a:t>Her unhappiness was clear when she heard the bad news.</a:t>
             </a:r>
             <a:endParaRPr lang="en-US" sz="1500" dirty="0"/>
           </a:p>
@@ -44230,7 +43486,7 @@
                 <a:ea typeface="Calibri" pitchFamily="34" charset="-122"/>
                 <a:cs typeface="Calibri" pitchFamily="34" charset="-120"/>
               </a:rPr>
-              <a:t>His unhappiness was clear to see after he missed out on the school excursion.</a:t>
+              <a:t>Of all the puppies, that fluffy one seemed to be the happiest.</a:t>
             </a:r>
             <a:endParaRPr lang="en-US" sz="1500" dirty="0"/>
           </a:p>
